--- a/week_03_linked_lists/floyd_tortoise_hare.pptx
+++ b/week_03_linked_lists/floyd_tortoise_hare.pptx
@@ -4478,7 +4478,7 @@
                 </a:solidFill>
                 <a:latin typeface="Calibri"/>
               </a:rPr>
-              <a:t>Why Phase 2 works</a:t>
+              <a:t>Why Phase 2 Works</a:t>
             </a:r>
           </a:p>
         </p:txBody>
@@ -4507,14 +4507,14 @@
           <a:p>
             <a:pPr algn="l">
               <a:lnSpc>
-                <a:spcPct val="135000"/>
+                <a:spcPct val="125000"/>
               </a:lnSpc>
               <a:spcAft>
                 <a:spcPts val="400"/>
               </a:spcAft>
             </a:pPr>
             <a:r>
-              <a:rPr sz="1300" b="1">
+              <a:rPr sz="1100" b="1">
                 <a:solidFill>
                   <a:srgbClr val="127A8A"/>
                 </a:solidFill>
@@ -4523,26 +4523,35 @@
               <a:t>▸  </a:t>
             </a:r>
             <a:r>
-              <a:rPr sz="1300">
+              <a:rPr sz="1100" b="1">
+                <a:solidFill>
+                  <a:srgbClr val="0B2A4A"/>
+                </a:solidFill>
+                <a:latin typeface="Calibri"/>
+              </a:rPr>
+              <a:t>Definitions:  </a:t>
+            </a:r>
+            <a:r>
+              <a:rPr sz="1100">
                 <a:solidFill>
                   <a:srgbClr val="333D4A"/>
                 </a:solidFill>
                 <a:latin typeface="Calibri"/>
               </a:rPr>
-              <a:t>Let F = prefix length, L = cycle length.</a:t>
+              <a:t>F = prefix length, L = loop length, a = distance to collision.</a:t>
             </a:r>
           </a:p>
           <a:p>
             <a:pPr algn="l">
               <a:lnSpc>
-                <a:spcPct val="135000"/>
+                <a:spcPct val="125000"/>
               </a:lnSpc>
               <a:spcAft>
                 <a:spcPts val="400"/>
               </a:spcAft>
             </a:pPr>
             <a:r>
-              <a:rPr sz="1300" b="1">
+              <a:rPr sz="1100" b="1">
                 <a:solidFill>
                   <a:srgbClr val="127A8A"/>
                 </a:solidFill>
@@ -4551,26 +4560,35 @@
               <a:t>▸  </a:t>
             </a:r>
             <a:r>
-              <a:rPr sz="1300">
+              <a:rPr sz="1100" b="1">
+                <a:solidFill>
+                  <a:srgbClr val="0B2A4A"/>
+                </a:solidFill>
+                <a:latin typeface="Calibri"/>
+              </a:rPr>
+              <a:t>At Collision:  </a:t>
+            </a:r>
+            <a:r>
+              <a:rPr sz="1100">
                 <a:solidFill>
                   <a:srgbClr val="333D4A"/>
                 </a:solidFill>
                 <a:latin typeface="Calibri"/>
               </a:rPr>
-              <a:t>At collision: slow has moved F + a steps; fast has moved F + a + kL steps (some integer k).</a:t>
+              <a:t>Slow moved F + a. Fast moved 2(F + a) steps.</a:t>
             </a:r>
           </a:p>
           <a:p>
             <a:pPr algn="l">
               <a:lnSpc>
-                <a:spcPct val="135000"/>
+                <a:spcPct val="125000"/>
               </a:lnSpc>
               <a:spcAft>
                 <a:spcPts val="400"/>
               </a:spcAft>
             </a:pPr>
             <a:r>
-              <a:rPr sz="1300" b="1">
+              <a:rPr sz="1100" b="1">
                 <a:solidFill>
                   <a:srgbClr val="127A8A"/>
                 </a:solidFill>
@@ -4579,26 +4597,35 @@
               <a:t>▸  </a:t>
             </a:r>
             <a:r>
-              <a:rPr sz="1300">
+              <a:rPr sz="1100" b="1">
+                <a:solidFill>
+                  <a:srgbClr val="0B2A4A"/>
+                </a:solidFill>
+                <a:latin typeface="Calibri"/>
+              </a:rPr>
+              <a:t>Loop Math:  </a:t>
+            </a:r>
+            <a:r>
+              <a:rPr sz="1100">
                 <a:solidFill>
                   <a:srgbClr val="333D4A"/>
                 </a:solidFill>
                 <a:latin typeface="Calibri"/>
               </a:rPr>
-              <a:t>Reset slow to head. Both advance 1 step / iteration.</a:t>
+              <a:t>Fast is k full loops ahead: 2(F + a) = F + a + k*L  =&gt;  F + a = k*L.</a:t>
             </a:r>
           </a:p>
           <a:p>
             <a:pPr algn="l">
               <a:lnSpc>
-                <a:spcPct val="135000"/>
+                <a:spcPct val="125000"/>
               </a:lnSpc>
               <a:spcAft>
                 <a:spcPts val="400"/>
               </a:spcAft>
             </a:pPr>
             <a:r>
-              <a:rPr sz="1300" b="1">
+              <a:rPr sz="1100" b="1">
                 <a:solidFill>
                   <a:srgbClr val="127A8A"/>
                 </a:solidFill>
@@ -4607,26 +4634,35 @@
               <a:t>▸  </a:t>
             </a:r>
             <a:r>
-              <a:rPr sz="1300">
+              <a:rPr sz="1100" b="1">
+                <a:solidFill>
+                  <a:srgbClr val="0B2A4A"/>
+                </a:solidFill>
+                <a:latin typeface="Calibri"/>
+              </a:rPr>
+              <a:t>Express F:  </a:t>
+            </a:r>
+            <a:r>
+              <a:rPr sz="1100">
                 <a:solidFill>
                   <a:srgbClr val="333D4A"/>
                 </a:solidFill>
                 <a:latin typeface="Calibri"/>
               </a:rPr>
-              <a:t>After F more steps, slow reaches entry. Fast (from collision point) also reaches entry — proven by modular arithmetic.</a:t>
+              <a:t>F = k*L - a.</a:t>
             </a:r>
           </a:p>
           <a:p>
             <a:pPr algn="l">
               <a:lnSpc>
-                <a:spcPct val="135000"/>
+                <a:spcPct val="125000"/>
               </a:lnSpc>
               <a:spcAft>
                 <a:spcPts val="400"/>
               </a:spcAft>
             </a:pPr>
             <a:r>
-              <a:rPr sz="1300" b="1">
+              <a:rPr sz="1100" b="1">
                 <a:solidFill>
                   <a:srgbClr val="127A8A"/>
                 </a:solidFill>
@@ -4635,13 +4671,96 @@
               <a:t>▸  </a:t>
             </a:r>
             <a:r>
-              <a:rPr sz="1300">
+              <a:rPr sz="1100" b="1">
+                <a:solidFill>
+                  <a:srgbClr val="0B2A4A"/>
+                </a:solidFill>
+                <a:latin typeface="Calibri"/>
+              </a:rPr>
+              <a:t>Phase 2:  </a:t>
+            </a:r>
+            <a:r>
+              <a:rPr sz="1100">
                 <a:solidFill>
                   <a:srgbClr val="333D4A"/>
                 </a:solidFill>
                 <a:latin typeface="Calibri"/>
               </a:rPr>
-              <a:t>They meet exactly at the cycle entry. ∎</a:t>
+              <a:t>Reset slow. Both move 1 step/iter. Slow takes F steps to reach entry.</a:t>
+            </a:r>
+          </a:p>
+          <a:p>
+            <a:pPr algn="l">
+              <a:lnSpc>
+                <a:spcPct val="125000"/>
+              </a:lnSpc>
+              <a:spcAft>
+                <a:spcPts val="400"/>
+              </a:spcAft>
+            </a:pPr>
+            <a:r>
+              <a:rPr sz="1100" b="1">
+                <a:solidFill>
+                  <a:srgbClr val="127A8A"/>
+                </a:solidFill>
+                <a:latin typeface="Calibri"/>
+              </a:rPr>
+              <a:t>▸  </a:t>
+            </a:r>
+            <a:r>
+              <a:rPr sz="1100" b="1">
+                <a:solidFill>
+                  <a:srgbClr val="0B2A4A"/>
+                </a:solidFill>
+                <a:latin typeface="Calibri"/>
+              </a:rPr>
+              <a:t>Fast Position:  </a:t>
+            </a:r>
+            <a:r>
+              <a:rPr sz="1100">
+                <a:solidFill>
+                  <a:srgbClr val="333D4A"/>
+                </a:solidFill>
+                <a:latin typeface="Calibri"/>
+              </a:rPr>
+              <a:t>Starting at a, Fast moves F steps: a + F = a + (k*L - a) = k*L.</a:t>
+            </a:r>
+          </a:p>
+          <a:p>
+            <a:pPr algn="l">
+              <a:lnSpc>
+                <a:spcPct val="125000"/>
+              </a:lnSpc>
+              <a:spcAft>
+                <a:spcPts val="400"/>
+              </a:spcAft>
+            </a:pPr>
+            <a:r>
+              <a:rPr sz="1100" b="1">
+                <a:solidFill>
+                  <a:srgbClr val="127A8A"/>
+                </a:solidFill>
+                <a:latin typeface="Calibri"/>
+              </a:rPr>
+              <a:t>▸  </a:t>
+            </a:r>
+            <a:r>
+              <a:rPr sz="1100" b="1">
+                <a:solidFill>
+                  <a:srgbClr val="0B2A4A"/>
+                </a:solidFill>
+                <a:latin typeface="Calibri"/>
+              </a:rPr>
+              <a:t>Meeting Point:  </a:t>
+            </a:r>
+            <a:r>
+              <a:rPr sz="1100">
+                <a:solidFill>
+                  <a:srgbClr val="333D4A"/>
+                </a:solidFill>
+                <a:latin typeface="Calibri"/>
+              </a:rPr>
+              <a:t>Since k*L is a multiple of L, Fast is also exactly at the entry node! ∎</a:t>
             </a:r>
           </a:p>
         </p:txBody>
@@ -23746,6 +23865,87 @@
             <a:avLst/>
           </a:prstGeom>
           <a:solidFill>
+            <a:srgbClr val="FFFFFF"/>
+          </a:solidFill>
+          <a:ln w="25400">
+            <a:solidFill>
+              <a:srgbClr val="0B2A4A"/>
+            </a:solidFill>
+          </a:ln>
+          <a:effectLst/>
+        </p:spPr>
+        <p:style>
+          <a:lnRef idx="1">
+            <a:schemeClr val="accent1"/>
+          </a:lnRef>
+          <a:fillRef idx="3">
+            <a:schemeClr val="accent1"/>
+          </a:fillRef>
+          <a:effectRef idx="2">
+            <a:schemeClr val="accent1"/>
+          </a:effectRef>
+          <a:fontRef idx="minor">
+            <a:schemeClr val="lt1"/>
+          </a:fontRef>
+        </p:style>
+        <p:txBody>
+          <a:bodyPr rtlCol="0" anchor="ctr"/>
+          <a:lstStyle/>
+          <a:p>
+            <a:pPr algn="ctr"/>
+          </a:p>
+        </p:txBody>
+      </p:sp>
+      <p:sp>
+        <p:nvSpPr>
+          <p:cNvPr id="123" name="TextBox 122"/>
+          <p:cNvSpPr txBox="1"/>
+          <p:nvPr/>
+        </p:nvSpPr>
+        <p:spPr>
+          <a:xfrm>
+            <a:off x="3319272" y="4389120"/>
+            <a:ext cx="749808" cy="475488"/>
+          </a:xfrm>
+          <a:prstGeom prst="rect">
+            <a:avLst/>
+          </a:prstGeom>
+          <a:noFill/>
+        </p:spPr>
+        <p:txBody>
+          <a:bodyPr wrap="square" lIns="45720" rIns="45720" tIns="18288" bIns="18288" anchor="ctr">
+            <a:spAutoFit/>
+          </a:bodyPr>
+          <a:lstStyle/>
+          <a:p>
+            <a:pPr algn="ctr"/>
+            <a:r>
+              <a:rPr sz="1300" b="1" i="0">
+                <a:solidFill>
+                  <a:srgbClr val="0B2A4A"/>
+                </a:solidFill>
+                <a:latin typeface="Calibri"/>
+              </a:rPr>
+              <a:t>3</a:t>
+            </a:r>
+          </a:p>
+        </p:txBody>
+      </p:sp>
+      <p:sp>
+        <p:nvSpPr>
+          <p:cNvPr id="124" name="Rounded Rectangle 123"/>
+          <p:cNvSpPr/>
+          <p:nvPr/>
+        </p:nvSpPr>
+        <p:spPr>
+          <a:xfrm>
+            <a:off x="4270248" y="4389120"/>
+            <a:ext cx="749808" cy="475488"/>
+          </a:xfrm>
+          <a:prstGeom prst="roundRect">
+            <a:avLst/>
+          </a:prstGeom>
+          <a:solidFill>
             <a:srgbClr val="FFE0B2"/>
           </a:solidFill>
           <a:ln w="25400">
@@ -23779,13 +23979,13 @@
       </p:sp>
       <p:sp>
         <p:nvSpPr>
-          <p:cNvPr id="123" name="TextBox 122"/>
+          <p:cNvPr id="125" name="TextBox 124"/>
           <p:cNvSpPr txBox="1"/>
           <p:nvPr/>
         </p:nvSpPr>
         <p:spPr>
           <a:xfrm>
-            <a:off x="3319272" y="4389120"/>
+            <a:off x="4270248" y="4389120"/>
             <a:ext cx="749808" cy="475488"/>
           </a:xfrm>
           <a:prstGeom prst="rect">
@@ -23807,20 +24007,101 @@
                 </a:solidFill>
                 <a:latin typeface="Calibri"/>
               </a:rPr>
-              <a:t>3</a:t>
-            </a:r>
-          </a:p>
-        </p:txBody>
-      </p:sp>
-      <p:sp>
-        <p:nvSpPr>
-          <p:cNvPr id="124" name="Rounded Rectangle 123"/>
+              <a:t>4</a:t>
+            </a:r>
+          </a:p>
+        </p:txBody>
+      </p:sp>
+      <p:sp>
+        <p:nvSpPr>
+          <p:cNvPr id="126" name="Rounded Rectangle 125"/>
           <p:cNvSpPr/>
           <p:nvPr/>
         </p:nvSpPr>
         <p:spPr>
           <a:xfrm>
-            <a:off x="4270248" y="4389120"/>
+            <a:off x="5221224" y="4389120"/>
+            <a:ext cx="749808" cy="475488"/>
+          </a:xfrm>
+          <a:prstGeom prst="roundRect">
+            <a:avLst/>
+          </a:prstGeom>
+          <a:solidFill>
+            <a:srgbClr val="D0F0D0"/>
+          </a:solidFill>
+          <a:ln w="25400">
+            <a:solidFill>
+              <a:srgbClr val="0B2A4A"/>
+            </a:solidFill>
+          </a:ln>
+          <a:effectLst/>
+        </p:spPr>
+        <p:style>
+          <a:lnRef idx="1">
+            <a:schemeClr val="accent1"/>
+          </a:lnRef>
+          <a:fillRef idx="3">
+            <a:schemeClr val="accent1"/>
+          </a:fillRef>
+          <a:effectRef idx="2">
+            <a:schemeClr val="accent1"/>
+          </a:effectRef>
+          <a:fontRef idx="minor">
+            <a:schemeClr val="lt1"/>
+          </a:fontRef>
+        </p:style>
+        <p:txBody>
+          <a:bodyPr rtlCol="0" anchor="ctr"/>
+          <a:lstStyle/>
+          <a:p>
+            <a:pPr algn="ctr"/>
+          </a:p>
+        </p:txBody>
+      </p:sp>
+      <p:sp>
+        <p:nvSpPr>
+          <p:cNvPr id="127" name="TextBox 126"/>
+          <p:cNvSpPr txBox="1"/>
+          <p:nvPr/>
+        </p:nvSpPr>
+        <p:spPr>
+          <a:xfrm>
+            <a:off x="5221224" y="4389120"/>
+            <a:ext cx="749808" cy="475488"/>
+          </a:xfrm>
+          <a:prstGeom prst="rect">
+            <a:avLst/>
+          </a:prstGeom>
+          <a:noFill/>
+        </p:spPr>
+        <p:txBody>
+          <a:bodyPr wrap="square" lIns="45720" rIns="45720" tIns="18288" bIns="18288" anchor="ctr">
+            <a:spAutoFit/>
+          </a:bodyPr>
+          <a:lstStyle/>
+          <a:p>
+            <a:pPr algn="ctr"/>
+            <a:r>
+              <a:rPr sz="1300" b="1" i="0">
+                <a:solidFill>
+                  <a:srgbClr val="FFFFFF"/>
+                </a:solidFill>
+                <a:latin typeface="Calibri"/>
+              </a:rPr>
+              <a:t>5</a:t>
+            </a:r>
+          </a:p>
+        </p:txBody>
+      </p:sp>
+      <p:sp>
+        <p:nvSpPr>
+          <p:cNvPr id="128" name="Rounded Rectangle 127"/>
+          <p:cNvSpPr/>
+          <p:nvPr/>
+        </p:nvSpPr>
+        <p:spPr>
+          <a:xfrm>
+            <a:off x="6172200" y="4389120"/>
             <a:ext cx="749808" cy="475488"/>
           </a:xfrm>
           <a:prstGeom prst="roundRect">
@@ -23860,13 +24141,13 @@
       </p:sp>
       <p:sp>
         <p:nvSpPr>
-          <p:cNvPr id="125" name="TextBox 124"/>
+          <p:cNvPr id="129" name="TextBox 128"/>
           <p:cNvSpPr txBox="1"/>
           <p:nvPr/>
         </p:nvSpPr>
         <p:spPr>
           <a:xfrm>
-            <a:off x="4270248" y="4389120"/>
+            <a:off x="6172200" y="4389120"/>
             <a:ext cx="749808" cy="475488"/>
           </a:xfrm>
           <a:prstGeom prst="rect">
@@ -23888,6 +24169,873 @@
                 </a:solidFill>
                 <a:latin typeface="Calibri"/>
               </a:rPr>
+              <a:t>6</a:t>
+            </a:r>
+          </a:p>
+        </p:txBody>
+      </p:sp>
+      <p:sp>
+        <p:nvSpPr>
+          <p:cNvPr id="130" name="Rounded Rectangle 129"/>
+          <p:cNvSpPr/>
+          <p:nvPr/>
+        </p:nvSpPr>
+        <p:spPr>
+          <a:xfrm>
+            <a:off x="7123176" y="4389120"/>
+            <a:ext cx="749808" cy="475488"/>
+          </a:xfrm>
+          <a:prstGeom prst="roundRect">
+            <a:avLst/>
+          </a:prstGeom>
+          <a:solidFill>
+            <a:srgbClr val="FFFFFF"/>
+          </a:solidFill>
+          <a:ln w="25400">
+            <a:solidFill>
+              <a:srgbClr val="0B2A4A"/>
+            </a:solidFill>
+          </a:ln>
+          <a:effectLst/>
+        </p:spPr>
+        <p:style>
+          <a:lnRef idx="1">
+            <a:schemeClr val="accent1"/>
+          </a:lnRef>
+          <a:fillRef idx="3">
+            <a:schemeClr val="accent1"/>
+          </a:fillRef>
+          <a:effectRef idx="2">
+            <a:schemeClr val="accent1"/>
+          </a:effectRef>
+          <a:fontRef idx="minor">
+            <a:schemeClr val="lt1"/>
+          </a:fontRef>
+        </p:style>
+        <p:txBody>
+          <a:bodyPr rtlCol="0" anchor="ctr"/>
+          <a:lstStyle/>
+          <a:p>
+            <a:pPr algn="ctr"/>
+          </a:p>
+        </p:txBody>
+      </p:sp>
+      <p:sp>
+        <p:nvSpPr>
+          <p:cNvPr id="131" name="TextBox 130"/>
+          <p:cNvSpPr txBox="1"/>
+          <p:nvPr/>
+        </p:nvSpPr>
+        <p:spPr>
+          <a:xfrm>
+            <a:off x="7123176" y="4389120"/>
+            <a:ext cx="749808" cy="475488"/>
+          </a:xfrm>
+          <a:prstGeom prst="rect">
+            <a:avLst/>
+          </a:prstGeom>
+          <a:noFill/>
+        </p:spPr>
+        <p:txBody>
+          <a:bodyPr wrap="square" lIns="45720" rIns="45720" tIns="18288" bIns="18288" anchor="ctr">
+            <a:spAutoFit/>
+          </a:bodyPr>
+          <a:lstStyle/>
+          <a:p>
+            <a:pPr algn="ctr"/>
+            <a:r>
+              <a:rPr sz="1300" b="1" i="0">
+                <a:solidFill>
+                  <a:srgbClr val="0B2A4A"/>
+                </a:solidFill>
+                <a:latin typeface="Calibri"/>
+              </a:rPr>
+              <a:t>7</a:t>
+            </a:r>
+          </a:p>
+        </p:txBody>
+      </p:sp>
+      <p:cxnSp>
+        <p:nvCxnSpPr>
+          <p:cNvPr id="132" name="Connector 131"/>
+          <p:cNvCxnSpPr/>
+          <p:nvPr/>
+        </p:nvCxnSpPr>
+        <p:spPr>
+          <a:xfrm>
+            <a:off x="2167128" y="4626864.0"/>
+            <a:ext cx="201168" cy="0.0"/>
+          </a:xfrm>
+          <a:prstGeom prst="line">
+            <a:avLst/>
+          </a:prstGeom>
+          <a:ln w="19050">
+            <a:solidFill>
+              <a:srgbClr val="127A8A"/>
+            </a:solidFill>
+            <a:tailEnd type="triangle" w="med" len="med"/>
+          </a:ln>
+        </p:spPr>
+        <p:style>
+          <a:lnRef idx="2">
+            <a:schemeClr val="accent1"/>
+          </a:lnRef>
+          <a:fillRef idx="0">
+            <a:schemeClr val="accent1"/>
+          </a:fillRef>
+          <a:effectRef idx="1">
+            <a:schemeClr val="accent1"/>
+          </a:effectRef>
+          <a:fontRef idx="minor">
+            <a:schemeClr val="tx1"/>
+          </a:fontRef>
+        </p:style>
+      </p:cxnSp>
+      <p:cxnSp>
+        <p:nvCxnSpPr>
+          <p:cNvPr id="133" name="Connector 132"/>
+          <p:cNvCxnSpPr/>
+          <p:nvPr/>
+        </p:nvCxnSpPr>
+        <p:spPr>
+          <a:xfrm>
+            <a:off x="3118104" y="4626864.0"/>
+            <a:ext cx="201168" cy="0.0"/>
+          </a:xfrm>
+          <a:prstGeom prst="line">
+            <a:avLst/>
+          </a:prstGeom>
+          <a:ln w="19050">
+            <a:solidFill>
+              <a:srgbClr val="127A8A"/>
+            </a:solidFill>
+            <a:tailEnd type="triangle" w="med" len="med"/>
+          </a:ln>
+        </p:spPr>
+        <p:style>
+          <a:lnRef idx="2">
+            <a:schemeClr val="accent1"/>
+          </a:lnRef>
+          <a:fillRef idx="0">
+            <a:schemeClr val="accent1"/>
+          </a:fillRef>
+          <a:effectRef idx="1">
+            <a:schemeClr val="accent1"/>
+          </a:effectRef>
+          <a:fontRef idx="minor">
+            <a:schemeClr val="tx1"/>
+          </a:fontRef>
+        </p:style>
+      </p:cxnSp>
+      <p:cxnSp>
+        <p:nvCxnSpPr>
+          <p:cNvPr id="134" name="Connector 133"/>
+          <p:cNvCxnSpPr/>
+          <p:nvPr/>
+        </p:nvCxnSpPr>
+        <p:spPr>
+          <a:xfrm>
+            <a:off x="4069080" y="4626864.0"/>
+            <a:ext cx="201168" cy="0.0"/>
+          </a:xfrm>
+          <a:prstGeom prst="line">
+            <a:avLst/>
+          </a:prstGeom>
+          <a:ln w="19050">
+            <a:solidFill>
+              <a:srgbClr val="127A8A"/>
+            </a:solidFill>
+            <a:tailEnd type="triangle" w="med" len="med"/>
+          </a:ln>
+        </p:spPr>
+        <p:style>
+          <a:lnRef idx="2">
+            <a:schemeClr val="accent1"/>
+          </a:lnRef>
+          <a:fillRef idx="0">
+            <a:schemeClr val="accent1"/>
+          </a:fillRef>
+          <a:effectRef idx="1">
+            <a:schemeClr val="accent1"/>
+          </a:effectRef>
+          <a:fontRef idx="minor">
+            <a:schemeClr val="tx1"/>
+          </a:fontRef>
+        </p:style>
+      </p:cxnSp>
+      <p:cxnSp>
+        <p:nvCxnSpPr>
+          <p:cNvPr id="135" name="Connector 134"/>
+          <p:cNvCxnSpPr/>
+          <p:nvPr/>
+        </p:nvCxnSpPr>
+        <p:spPr>
+          <a:xfrm>
+            <a:off x="5020056" y="4626864.0"/>
+            <a:ext cx="201168" cy="0.0"/>
+          </a:xfrm>
+          <a:prstGeom prst="line">
+            <a:avLst/>
+          </a:prstGeom>
+          <a:ln w="19050">
+            <a:solidFill>
+              <a:srgbClr val="127A8A"/>
+            </a:solidFill>
+            <a:tailEnd type="triangle" w="med" len="med"/>
+          </a:ln>
+        </p:spPr>
+        <p:style>
+          <a:lnRef idx="2">
+            <a:schemeClr val="accent1"/>
+          </a:lnRef>
+          <a:fillRef idx="0">
+            <a:schemeClr val="accent1"/>
+          </a:fillRef>
+          <a:effectRef idx="1">
+            <a:schemeClr val="accent1"/>
+          </a:effectRef>
+          <a:fontRef idx="minor">
+            <a:schemeClr val="tx1"/>
+          </a:fontRef>
+        </p:style>
+      </p:cxnSp>
+      <p:cxnSp>
+        <p:nvCxnSpPr>
+          <p:cNvPr id="136" name="Connector 135"/>
+          <p:cNvCxnSpPr/>
+          <p:nvPr/>
+        </p:nvCxnSpPr>
+        <p:spPr>
+          <a:xfrm>
+            <a:off x="5971032" y="4626864.0"/>
+            <a:ext cx="201168" cy="0.0"/>
+          </a:xfrm>
+          <a:prstGeom prst="line">
+            <a:avLst/>
+          </a:prstGeom>
+          <a:ln w="19050">
+            <a:solidFill>
+              <a:srgbClr val="127A8A"/>
+            </a:solidFill>
+            <a:tailEnd type="triangle" w="med" len="med"/>
+          </a:ln>
+        </p:spPr>
+        <p:style>
+          <a:lnRef idx="2">
+            <a:schemeClr val="accent1"/>
+          </a:lnRef>
+          <a:fillRef idx="0">
+            <a:schemeClr val="accent1"/>
+          </a:fillRef>
+          <a:effectRef idx="1">
+            <a:schemeClr val="accent1"/>
+          </a:effectRef>
+          <a:fontRef idx="minor">
+            <a:schemeClr val="tx1"/>
+          </a:fontRef>
+        </p:style>
+      </p:cxnSp>
+      <p:cxnSp>
+        <p:nvCxnSpPr>
+          <p:cNvPr id="137" name="Connector 136"/>
+          <p:cNvCxnSpPr/>
+          <p:nvPr/>
+        </p:nvCxnSpPr>
+        <p:spPr>
+          <a:xfrm>
+            <a:off x="6922008" y="4626864.0"/>
+            <a:ext cx="201168" cy="0.0"/>
+          </a:xfrm>
+          <a:prstGeom prst="line">
+            <a:avLst/>
+          </a:prstGeom>
+          <a:ln w="19050">
+            <a:solidFill>
+              <a:srgbClr val="127A8A"/>
+            </a:solidFill>
+            <a:tailEnd type="triangle" w="med" len="med"/>
+          </a:ln>
+        </p:spPr>
+        <p:style>
+          <a:lnRef idx="2">
+            <a:schemeClr val="accent1"/>
+          </a:lnRef>
+          <a:fillRef idx="0">
+            <a:schemeClr val="accent1"/>
+          </a:fillRef>
+          <a:effectRef idx="1">
+            <a:schemeClr val="accent1"/>
+          </a:effectRef>
+          <a:fontRef idx="minor">
+            <a:schemeClr val="tx1"/>
+          </a:fontRef>
+        </p:style>
+      </p:cxnSp>
+      <p:cxnSp>
+        <p:nvCxnSpPr>
+          <p:cNvPr id="138" name="Connector 137"/>
+          <p:cNvCxnSpPr/>
+          <p:nvPr/>
+        </p:nvCxnSpPr>
+        <p:spPr>
+          <a:xfrm>
+            <a:off x="7872984" y="4626864.0"/>
+            <a:ext cx="182880" cy="0.0"/>
+          </a:xfrm>
+          <a:prstGeom prst="line">
+            <a:avLst/>
+          </a:prstGeom>
+          <a:ln w="19050">
+            <a:solidFill>
+              <a:srgbClr val="C0392B"/>
+            </a:solidFill>
+          </a:ln>
+        </p:spPr>
+        <p:style>
+          <a:lnRef idx="2">
+            <a:schemeClr val="accent1"/>
+          </a:lnRef>
+          <a:fillRef idx="0">
+            <a:schemeClr val="accent1"/>
+          </a:fillRef>
+          <a:effectRef idx="1">
+            <a:schemeClr val="accent1"/>
+          </a:effectRef>
+          <a:fontRef idx="minor">
+            <a:schemeClr val="tx1"/>
+          </a:fontRef>
+        </p:style>
+      </p:cxnSp>
+      <p:cxnSp>
+        <p:nvCxnSpPr>
+          <p:cNvPr id="139" name="Connector 138"/>
+          <p:cNvCxnSpPr/>
+          <p:nvPr/>
+        </p:nvCxnSpPr>
+        <p:spPr>
+          <a:xfrm flipV="1">
+            <a:off x="8055864" y="4224528"/>
+            <a:ext cx="0" cy="402336.0"/>
+          </a:xfrm>
+          <a:prstGeom prst="line">
+            <a:avLst/>
+          </a:prstGeom>
+          <a:ln w="19050">
+            <a:solidFill>
+              <a:srgbClr val="C0392B"/>
+            </a:solidFill>
+          </a:ln>
+        </p:spPr>
+        <p:style>
+          <a:lnRef idx="2">
+            <a:schemeClr val="accent1"/>
+          </a:lnRef>
+          <a:fillRef idx="0">
+            <a:schemeClr val="accent1"/>
+          </a:fillRef>
+          <a:effectRef idx="1">
+            <a:schemeClr val="accent1"/>
+          </a:effectRef>
+          <a:fontRef idx="minor">
+            <a:schemeClr val="tx1"/>
+          </a:fontRef>
+        </p:style>
+      </p:cxnSp>
+      <p:cxnSp>
+        <p:nvCxnSpPr>
+          <p:cNvPr id="140" name="Connector 139"/>
+          <p:cNvCxnSpPr/>
+          <p:nvPr/>
+        </p:nvCxnSpPr>
+        <p:spPr>
+          <a:xfrm flipH="1">
+            <a:off x="3694176.0" y="4224528"/>
+            <a:ext cx="4361688.0" cy="0"/>
+          </a:xfrm>
+          <a:prstGeom prst="line">
+            <a:avLst/>
+          </a:prstGeom>
+          <a:ln w="19050">
+            <a:solidFill>
+              <a:srgbClr val="C0392B"/>
+            </a:solidFill>
+          </a:ln>
+        </p:spPr>
+        <p:style>
+          <a:lnRef idx="2">
+            <a:schemeClr val="accent1"/>
+          </a:lnRef>
+          <a:fillRef idx="0">
+            <a:schemeClr val="accent1"/>
+          </a:fillRef>
+          <a:effectRef idx="1">
+            <a:schemeClr val="accent1"/>
+          </a:effectRef>
+          <a:fontRef idx="minor">
+            <a:schemeClr val="tx1"/>
+          </a:fontRef>
+        </p:style>
+      </p:cxnSp>
+      <p:cxnSp>
+        <p:nvCxnSpPr>
+          <p:cNvPr id="141" name="Connector 140"/>
+          <p:cNvCxnSpPr/>
+          <p:nvPr/>
+        </p:nvCxnSpPr>
+        <p:spPr>
+          <a:xfrm>
+            <a:off x="3694176.0" y="4224528"/>
+            <a:ext cx="0.0" cy="164592"/>
+          </a:xfrm>
+          <a:prstGeom prst="line">
+            <a:avLst/>
+          </a:prstGeom>
+          <a:ln w="19050">
+            <a:solidFill>
+              <a:srgbClr val="C0392B"/>
+            </a:solidFill>
+            <a:tailEnd type="triangle" w="med" len="med"/>
+          </a:ln>
+        </p:spPr>
+        <p:style>
+          <a:lnRef idx="2">
+            <a:schemeClr val="accent1"/>
+          </a:lnRef>
+          <a:fillRef idx="0">
+            <a:schemeClr val="accent1"/>
+          </a:fillRef>
+          <a:effectRef idx="1">
+            <a:schemeClr val="accent1"/>
+          </a:effectRef>
+          <a:fontRef idx="minor">
+            <a:schemeClr val="tx1"/>
+          </a:fontRef>
+        </p:style>
+      </p:cxnSp>
+      <p:sp>
+        <p:nvSpPr>
+          <p:cNvPr id="142" name="TextBox 141"/>
+          <p:cNvSpPr txBox="1"/>
+          <p:nvPr/>
+        </p:nvSpPr>
+        <p:spPr>
+          <a:xfrm>
+            <a:off x="5321808" y="4901184"/>
+            <a:ext cx="548640" cy="228600"/>
+          </a:xfrm>
+          <a:prstGeom prst="rect">
+            <a:avLst/>
+          </a:prstGeom>
+          <a:noFill/>
+        </p:spPr>
+        <p:txBody>
+          <a:bodyPr wrap="square" lIns="45720" rIns="45720" tIns="18288" bIns="18288" anchor="t">
+            <a:spAutoFit/>
+          </a:bodyPr>
+          <a:lstStyle/>
+          <a:p>
+            <a:pPr algn="ctr"/>
+            <a:r>
+              <a:rPr sz="1100" b="1" i="0">
+                <a:solidFill>
+                  <a:srgbClr val="2E7D32"/>
+                </a:solidFill>
+                <a:latin typeface="Calibri"/>
+              </a:rPr>
+              <a:t>S</a:t>
+            </a:r>
+          </a:p>
+        </p:txBody>
+      </p:sp>
+      <p:sp>
+        <p:nvSpPr>
+          <p:cNvPr id="143" name="TextBox 142"/>
+          <p:cNvSpPr txBox="1"/>
+          <p:nvPr/>
+        </p:nvSpPr>
+        <p:spPr>
+          <a:xfrm>
+            <a:off x="4370832" y="4901184"/>
+            <a:ext cx="548640" cy="228600"/>
+          </a:xfrm>
+          <a:prstGeom prst="rect">
+            <a:avLst/>
+          </a:prstGeom>
+          <a:noFill/>
+        </p:spPr>
+        <p:txBody>
+          <a:bodyPr wrap="square" lIns="45720" rIns="45720" tIns="18288" bIns="18288" anchor="t">
+            <a:spAutoFit/>
+          </a:bodyPr>
+          <a:lstStyle/>
+          <a:p>
+            <a:pPr algn="ctr"/>
+            <a:r>
+              <a:rPr sz="1100" b="1" i="0">
+                <a:solidFill>
+                  <a:srgbClr val="E65C00"/>
+                </a:solidFill>
+                <a:latin typeface="Calibri"/>
+              </a:rPr>
+              <a:t>F</a:t>
+            </a:r>
+          </a:p>
+        </p:txBody>
+      </p:sp>
+      <p:sp>
+        <p:nvSpPr>
+          <p:cNvPr id="144" name="TextBox 143"/>
+          <p:cNvSpPr txBox="1"/>
+          <p:nvPr/>
+        </p:nvSpPr>
+        <p:spPr>
+          <a:xfrm>
+            <a:off x="502920" y="5138928"/>
+            <a:ext cx="1097280" cy="475488"/>
+          </a:xfrm>
+          <a:prstGeom prst="rect">
+            <a:avLst/>
+          </a:prstGeom>
+          <a:noFill/>
+        </p:spPr>
+        <p:txBody>
+          <a:bodyPr wrap="square" lIns="45720" rIns="45720" tIns="18288" bIns="18288" anchor="ctr">
+            <a:spAutoFit/>
+          </a:bodyPr>
+          <a:lstStyle/>
+          <a:p>
+            <a:pPr algn="r"/>
+            <a:r>
+              <a:rPr sz="1200" b="1" i="0">
+                <a:solidFill>
+                  <a:srgbClr val="0B2A4A"/>
+                </a:solidFill>
+                <a:latin typeface="Calibri"/>
+              </a:rPr>
+              <a:t>Step 5 ✓</a:t>
+            </a:r>
+          </a:p>
+        </p:txBody>
+      </p:sp>
+      <p:sp>
+        <p:nvSpPr>
+          <p:cNvPr id="145" name="Rounded Rectangle 144"/>
+          <p:cNvSpPr/>
+          <p:nvPr/>
+        </p:nvSpPr>
+        <p:spPr>
+          <a:xfrm>
+            <a:off x="1417320" y="5138928"/>
+            <a:ext cx="749808" cy="475488"/>
+          </a:xfrm>
+          <a:prstGeom prst="roundRect">
+            <a:avLst/>
+          </a:prstGeom>
+          <a:solidFill>
+            <a:srgbClr val="FFFFFF"/>
+          </a:solidFill>
+          <a:ln w="25400">
+            <a:solidFill>
+              <a:srgbClr val="0B2A4A"/>
+            </a:solidFill>
+          </a:ln>
+          <a:effectLst/>
+        </p:spPr>
+        <p:style>
+          <a:lnRef idx="1">
+            <a:schemeClr val="accent1"/>
+          </a:lnRef>
+          <a:fillRef idx="3">
+            <a:schemeClr val="accent1"/>
+          </a:fillRef>
+          <a:effectRef idx="2">
+            <a:schemeClr val="accent1"/>
+          </a:effectRef>
+          <a:fontRef idx="minor">
+            <a:schemeClr val="lt1"/>
+          </a:fontRef>
+        </p:style>
+        <p:txBody>
+          <a:bodyPr rtlCol="0" anchor="ctr"/>
+          <a:lstStyle/>
+          <a:p>
+            <a:pPr algn="ctr"/>
+          </a:p>
+        </p:txBody>
+      </p:sp>
+      <p:sp>
+        <p:nvSpPr>
+          <p:cNvPr id="146" name="TextBox 145"/>
+          <p:cNvSpPr txBox="1"/>
+          <p:nvPr/>
+        </p:nvSpPr>
+        <p:spPr>
+          <a:xfrm>
+            <a:off x="1417320" y="5138928"/>
+            <a:ext cx="749808" cy="475488"/>
+          </a:xfrm>
+          <a:prstGeom prst="rect">
+            <a:avLst/>
+          </a:prstGeom>
+          <a:noFill/>
+        </p:spPr>
+        <p:txBody>
+          <a:bodyPr wrap="square" lIns="45720" rIns="45720" tIns="18288" bIns="18288" anchor="ctr">
+            <a:spAutoFit/>
+          </a:bodyPr>
+          <a:lstStyle/>
+          <a:p>
+            <a:pPr algn="ctr"/>
+            <a:r>
+              <a:rPr sz="1300" b="1" i="0">
+                <a:solidFill>
+                  <a:srgbClr val="0B2A4A"/>
+                </a:solidFill>
+                <a:latin typeface="Calibri"/>
+              </a:rPr>
+              <a:t>1</a:t>
+            </a:r>
+          </a:p>
+        </p:txBody>
+      </p:sp>
+      <p:sp>
+        <p:nvSpPr>
+          <p:cNvPr id="147" name="Rounded Rectangle 146"/>
+          <p:cNvSpPr/>
+          <p:nvPr/>
+        </p:nvSpPr>
+        <p:spPr>
+          <a:xfrm>
+            <a:off x="2368296" y="5138928"/>
+            <a:ext cx="749808" cy="475488"/>
+          </a:xfrm>
+          <a:prstGeom prst="roundRect">
+            <a:avLst/>
+          </a:prstGeom>
+          <a:solidFill>
+            <a:srgbClr val="FFFFFF"/>
+          </a:solidFill>
+          <a:ln w="25400">
+            <a:solidFill>
+              <a:srgbClr val="0B2A4A"/>
+            </a:solidFill>
+          </a:ln>
+          <a:effectLst/>
+        </p:spPr>
+        <p:style>
+          <a:lnRef idx="1">
+            <a:schemeClr val="accent1"/>
+          </a:lnRef>
+          <a:fillRef idx="3">
+            <a:schemeClr val="accent1"/>
+          </a:fillRef>
+          <a:effectRef idx="2">
+            <a:schemeClr val="accent1"/>
+          </a:effectRef>
+          <a:fontRef idx="minor">
+            <a:schemeClr val="lt1"/>
+          </a:fontRef>
+        </p:style>
+        <p:txBody>
+          <a:bodyPr rtlCol="0" anchor="ctr"/>
+          <a:lstStyle/>
+          <a:p>
+            <a:pPr algn="ctr"/>
+          </a:p>
+        </p:txBody>
+      </p:sp>
+      <p:sp>
+        <p:nvSpPr>
+          <p:cNvPr id="148" name="TextBox 147"/>
+          <p:cNvSpPr txBox="1"/>
+          <p:nvPr/>
+        </p:nvSpPr>
+        <p:spPr>
+          <a:xfrm>
+            <a:off x="2368296" y="5138928"/>
+            <a:ext cx="749808" cy="475488"/>
+          </a:xfrm>
+          <a:prstGeom prst="rect">
+            <a:avLst/>
+          </a:prstGeom>
+          <a:noFill/>
+        </p:spPr>
+        <p:txBody>
+          <a:bodyPr wrap="square" lIns="45720" rIns="45720" tIns="18288" bIns="18288" anchor="ctr">
+            <a:spAutoFit/>
+          </a:bodyPr>
+          <a:lstStyle/>
+          <a:p>
+            <a:pPr algn="ctr"/>
+            <a:r>
+              <a:rPr sz="1300" b="1" i="0">
+                <a:solidFill>
+                  <a:srgbClr val="0B2A4A"/>
+                </a:solidFill>
+                <a:latin typeface="Calibri"/>
+              </a:rPr>
+              <a:t>2</a:t>
+            </a:r>
+          </a:p>
+        </p:txBody>
+      </p:sp>
+      <p:sp>
+        <p:nvSpPr>
+          <p:cNvPr id="149" name="Rounded Rectangle 148"/>
+          <p:cNvSpPr/>
+          <p:nvPr/>
+        </p:nvSpPr>
+        <p:spPr>
+          <a:xfrm>
+            <a:off x="3319272" y="5138928"/>
+            <a:ext cx="749808" cy="475488"/>
+          </a:xfrm>
+          <a:prstGeom prst="roundRect">
+            <a:avLst/>
+          </a:prstGeom>
+          <a:solidFill>
+            <a:srgbClr val="FFFFFF"/>
+          </a:solidFill>
+          <a:ln w="25400">
+            <a:solidFill>
+              <a:srgbClr val="0B2A4A"/>
+            </a:solidFill>
+          </a:ln>
+          <a:effectLst/>
+        </p:spPr>
+        <p:style>
+          <a:lnRef idx="1">
+            <a:schemeClr val="accent1"/>
+          </a:lnRef>
+          <a:fillRef idx="3">
+            <a:schemeClr val="accent1"/>
+          </a:fillRef>
+          <a:effectRef idx="2">
+            <a:schemeClr val="accent1"/>
+          </a:effectRef>
+          <a:fontRef idx="minor">
+            <a:schemeClr val="lt1"/>
+          </a:fontRef>
+        </p:style>
+        <p:txBody>
+          <a:bodyPr rtlCol="0" anchor="ctr"/>
+          <a:lstStyle/>
+          <a:p>
+            <a:pPr algn="ctr"/>
+          </a:p>
+        </p:txBody>
+      </p:sp>
+      <p:sp>
+        <p:nvSpPr>
+          <p:cNvPr id="150" name="TextBox 149"/>
+          <p:cNvSpPr txBox="1"/>
+          <p:nvPr/>
+        </p:nvSpPr>
+        <p:spPr>
+          <a:xfrm>
+            <a:off x="3319272" y="5138928"/>
+            <a:ext cx="749808" cy="475488"/>
+          </a:xfrm>
+          <a:prstGeom prst="rect">
+            <a:avLst/>
+          </a:prstGeom>
+          <a:noFill/>
+        </p:spPr>
+        <p:txBody>
+          <a:bodyPr wrap="square" lIns="45720" rIns="45720" tIns="18288" bIns="18288" anchor="ctr">
+            <a:spAutoFit/>
+          </a:bodyPr>
+          <a:lstStyle/>
+          <a:p>
+            <a:pPr algn="ctr"/>
+            <a:r>
+              <a:rPr sz="1300" b="1" i="0">
+                <a:solidFill>
+                  <a:srgbClr val="0B2A4A"/>
+                </a:solidFill>
+                <a:latin typeface="Calibri"/>
+              </a:rPr>
+              <a:t>3</a:t>
+            </a:r>
+          </a:p>
+        </p:txBody>
+      </p:sp>
+      <p:sp>
+        <p:nvSpPr>
+          <p:cNvPr id="151" name="Rounded Rectangle 150"/>
+          <p:cNvSpPr/>
+          <p:nvPr/>
+        </p:nvSpPr>
+        <p:spPr>
+          <a:xfrm>
+            <a:off x="4270248" y="5138928"/>
+            <a:ext cx="749808" cy="475488"/>
+          </a:xfrm>
+          <a:prstGeom prst="roundRect">
+            <a:avLst/>
+          </a:prstGeom>
+          <a:solidFill>
+            <a:srgbClr val="FFFFFF"/>
+          </a:solidFill>
+          <a:ln w="25400">
+            <a:solidFill>
+              <a:srgbClr val="0B2A4A"/>
+            </a:solidFill>
+          </a:ln>
+          <a:effectLst/>
+        </p:spPr>
+        <p:style>
+          <a:lnRef idx="1">
+            <a:schemeClr val="accent1"/>
+          </a:lnRef>
+          <a:fillRef idx="3">
+            <a:schemeClr val="accent1"/>
+          </a:fillRef>
+          <a:effectRef idx="2">
+            <a:schemeClr val="accent1"/>
+          </a:effectRef>
+          <a:fontRef idx="minor">
+            <a:schemeClr val="lt1"/>
+          </a:fontRef>
+        </p:style>
+        <p:txBody>
+          <a:bodyPr rtlCol="0" anchor="ctr"/>
+          <a:lstStyle/>
+          <a:p>
+            <a:pPr algn="ctr"/>
+          </a:p>
+        </p:txBody>
+      </p:sp>
+      <p:sp>
+        <p:nvSpPr>
+          <p:cNvPr id="152" name="TextBox 151"/>
+          <p:cNvSpPr txBox="1"/>
+          <p:nvPr/>
+        </p:nvSpPr>
+        <p:spPr>
+          <a:xfrm>
+            <a:off x="4270248" y="5138928"/>
+            <a:ext cx="749808" cy="475488"/>
+          </a:xfrm>
+          <a:prstGeom prst="rect">
+            <a:avLst/>
+          </a:prstGeom>
+          <a:noFill/>
+        </p:spPr>
+        <p:txBody>
+          <a:bodyPr wrap="square" lIns="45720" rIns="45720" tIns="18288" bIns="18288" anchor="ctr">
+            <a:spAutoFit/>
+          </a:bodyPr>
+          <a:lstStyle/>
+          <a:p>
+            <a:pPr algn="ctr"/>
+            <a:r>
+              <a:rPr sz="1300" b="1" i="0">
+                <a:solidFill>
+                  <a:srgbClr val="0B2A4A"/>
+                </a:solidFill>
+                <a:latin typeface="Calibri"/>
+              </a:rPr>
               <a:t>4</a:t>
             </a:r>
           </a:p>
@@ -23895,14 +25043,765 @@
       </p:sp>
       <p:sp>
         <p:nvSpPr>
-          <p:cNvPr id="126" name="Rounded Rectangle 125"/>
+          <p:cNvPr id="153" name="Rounded Rectangle 152"/>
           <p:cNvSpPr/>
           <p:nvPr/>
         </p:nvSpPr>
         <p:spPr>
           <a:xfrm>
-            <a:off x="5221224" y="4389120"/>
+            <a:off x="5221224" y="5138928"/>
             <a:ext cx="749808" cy="475488"/>
+          </a:xfrm>
+          <a:prstGeom prst="roundRect">
+            <a:avLst/>
+          </a:prstGeom>
+          <a:solidFill>
+            <a:srgbClr val="FFFFFF"/>
+          </a:solidFill>
+          <a:ln w="25400">
+            <a:solidFill>
+              <a:srgbClr val="0B2A4A"/>
+            </a:solidFill>
+          </a:ln>
+          <a:effectLst/>
+        </p:spPr>
+        <p:style>
+          <a:lnRef idx="1">
+            <a:schemeClr val="accent1"/>
+          </a:lnRef>
+          <a:fillRef idx="3">
+            <a:schemeClr val="accent1"/>
+          </a:fillRef>
+          <a:effectRef idx="2">
+            <a:schemeClr val="accent1"/>
+          </a:effectRef>
+          <a:fontRef idx="minor">
+            <a:schemeClr val="lt1"/>
+          </a:fontRef>
+        </p:style>
+        <p:txBody>
+          <a:bodyPr rtlCol="0" anchor="ctr"/>
+          <a:lstStyle/>
+          <a:p>
+            <a:pPr algn="ctr"/>
+          </a:p>
+        </p:txBody>
+      </p:sp>
+      <p:sp>
+        <p:nvSpPr>
+          <p:cNvPr id="154" name="TextBox 153"/>
+          <p:cNvSpPr txBox="1"/>
+          <p:nvPr/>
+        </p:nvSpPr>
+        <p:spPr>
+          <a:xfrm>
+            <a:off x="5221224" y="5138928"/>
+            <a:ext cx="749808" cy="475488"/>
+          </a:xfrm>
+          <a:prstGeom prst="rect">
+            <a:avLst/>
+          </a:prstGeom>
+          <a:noFill/>
+        </p:spPr>
+        <p:txBody>
+          <a:bodyPr wrap="square" lIns="45720" rIns="45720" tIns="18288" bIns="18288" anchor="ctr">
+            <a:spAutoFit/>
+          </a:bodyPr>
+          <a:lstStyle/>
+          <a:p>
+            <a:pPr algn="ctr"/>
+            <a:r>
+              <a:rPr sz="1300" b="1" i="0">
+                <a:solidFill>
+                  <a:srgbClr val="0B2A4A"/>
+                </a:solidFill>
+                <a:latin typeface="Calibri"/>
+              </a:rPr>
+              <a:t>5</a:t>
+            </a:r>
+          </a:p>
+        </p:txBody>
+      </p:sp>
+      <p:sp>
+        <p:nvSpPr>
+          <p:cNvPr id="155" name="Rounded Rectangle 154"/>
+          <p:cNvSpPr/>
+          <p:nvPr/>
+        </p:nvSpPr>
+        <p:spPr>
+          <a:xfrm>
+            <a:off x="6172200" y="5138928"/>
+            <a:ext cx="749808" cy="475488"/>
+          </a:xfrm>
+          <a:prstGeom prst="roundRect">
+            <a:avLst/>
+          </a:prstGeom>
+          <a:solidFill>
+            <a:srgbClr val="C0392B"/>
+          </a:solidFill>
+          <a:ln w="25400">
+            <a:solidFill>
+              <a:srgbClr val="C0392B"/>
+            </a:solidFill>
+          </a:ln>
+          <a:effectLst/>
+        </p:spPr>
+        <p:style>
+          <a:lnRef idx="1">
+            <a:schemeClr val="accent1"/>
+          </a:lnRef>
+          <a:fillRef idx="3">
+            <a:schemeClr val="accent1"/>
+          </a:fillRef>
+          <a:effectRef idx="2">
+            <a:schemeClr val="accent1"/>
+          </a:effectRef>
+          <a:fontRef idx="minor">
+            <a:schemeClr val="lt1"/>
+          </a:fontRef>
+        </p:style>
+        <p:txBody>
+          <a:bodyPr rtlCol="0" anchor="ctr"/>
+          <a:lstStyle/>
+          <a:p>
+            <a:pPr algn="ctr"/>
+          </a:p>
+        </p:txBody>
+      </p:sp>
+      <p:sp>
+        <p:nvSpPr>
+          <p:cNvPr id="156" name="TextBox 155"/>
+          <p:cNvSpPr txBox="1"/>
+          <p:nvPr/>
+        </p:nvSpPr>
+        <p:spPr>
+          <a:xfrm>
+            <a:off x="6172200" y="5138928"/>
+            <a:ext cx="749808" cy="475488"/>
+          </a:xfrm>
+          <a:prstGeom prst="rect">
+            <a:avLst/>
+          </a:prstGeom>
+          <a:noFill/>
+        </p:spPr>
+        <p:txBody>
+          <a:bodyPr wrap="square" lIns="45720" rIns="45720" tIns="18288" bIns="18288" anchor="ctr">
+            <a:spAutoFit/>
+          </a:bodyPr>
+          <a:lstStyle/>
+          <a:p>
+            <a:pPr algn="ctr"/>
+            <a:r>
+              <a:rPr sz="1300" b="1" i="0">
+                <a:solidFill>
+                  <a:srgbClr val="FFFFFF"/>
+                </a:solidFill>
+                <a:latin typeface="Calibri"/>
+              </a:rPr>
+              <a:t>6</a:t>
+            </a:r>
+          </a:p>
+        </p:txBody>
+      </p:sp>
+      <p:sp>
+        <p:nvSpPr>
+          <p:cNvPr id="157" name="Rounded Rectangle 156"/>
+          <p:cNvSpPr/>
+          <p:nvPr/>
+        </p:nvSpPr>
+        <p:spPr>
+          <a:xfrm>
+            <a:off x="7123176" y="5138928"/>
+            <a:ext cx="749808" cy="475488"/>
+          </a:xfrm>
+          <a:prstGeom prst="roundRect">
+            <a:avLst/>
+          </a:prstGeom>
+          <a:solidFill>
+            <a:srgbClr val="FFFFFF"/>
+          </a:solidFill>
+          <a:ln w="25400">
+            <a:solidFill>
+              <a:srgbClr val="0B2A4A"/>
+            </a:solidFill>
+          </a:ln>
+          <a:effectLst/>
+        </p:spPr>
+        <p:style>
+          <a:lnRef idx="1">
+            <a:schemeClr val="accent1"/>
+          </a:lnRef>
+          <a:fillRef idx="3">
+            <a:schemeClr val="accent1"/>
+          </a:fillRef>
+          <a:effectRef idx="2">
+            <a:schemeClr val="accent1"/>
+          </a:effectRef>
+          <a:fontRef idx="minor">
+            <a:schemeClr val="lt1"/>
+          </a:fontRef>
+        </p:style>
+        <p:txBody>
+          <a:bodyPr rtlCol="0" anchor="ctr"/>
+          <a:lstStyle/>
+          <a:p>
+            <a:pPr algn="ctr"/>
+          </a:p>
+        </p:txBody>
+      </p:sp>
+      <p:sp>
+        <p:nvSpPr>
+          <p:cNvPr id="158" name="TextBox 157"/>
+          <p:cNvSpPr txBox="1"/>
+          <p:nvPr/>
+        </p:nvSpPr>
+        <p:spPr>
+          <a:xfrm>
+            <a:off x="7123176" y="5138928"/>
+            <a:ext cx="749808" cy="475488"/>
+          </a:xfrm>
+          <a:prstGeom prst="rect">
+            <a:avLst/>
+          </a:prstGeom>
+          <a:noFill/>
+        </p:spPr>
+        <p:txBody>
+          <a:bodyPr wrap="square" lIns="45720" rIns="45720" tIns="18288" bIns="18288" anchor="ctr">
+            <a:spAutoFit/>
+          </a:bodyPr>
+          <a:lstStyle/>
+          <a:p>
+            <a:pPr algn="ctr"/>
+            <a:r>
+              <a:rPr sz="1300" b="1" i="0">
+                <a:solidFill>
+                  <a:srgbClr val="0B2A4A"/>
+                </a:solidFill>
+                <a:latin typeface="Calibri"/>
+              </a:rPr>
+              <a:t>7</a:t>
+            </a:r>
+          </a:p>
+        </p:txBody>
+      </p:sp>
+      <p:cxnSp>
+        <p:nvCxnSpPr>
+          <p:cNvPr id="159" name="Connector 158"/>
+          <p:cNvCxnSpPr/>
+          <p:nvPr/>
+        </p:nvCxnSpPr>
+        <p:spPr>
+          <a:xfrm>
+            <a:off x="2167128" y="5376672.0"/>
+            <a:ext cx="201168" cy="0.0"/>
+          </a:xfrm>
+          <a:prstGeom prst="line">
+            <a:avLst/>
+          </a:prstGeom>
+          <a:ln w="19050">
+            <a:solidFill>
+              <a:srgbClr val="127A8A"/>
+            </a:solidFill>
+            <a:tailEnd type="triangle" w="med" len="med"/>
+          </a:ln>
+        </p:spPr>
+        <p:style>
+          <a:lnRef idx="2">
+            <a:schemeClr val="accent1"/>
+          </a:lnRef>
+          <a:fillRef idx="0">
+            <a:schemeClr val="accent1"/>
+          </a:fillRef>
+          <a:effectRef idx="1">
+            <a:schemeClr val="accent1"/>
+          </a:effectRef>
+          <a:fontRef idx="minor">
+            <a:schemeClr val="tx1"/>
+          </a:fontRef>
+        </p:style>
+      </p:cxnSp>
+      <p:cxnSp>
+        <p:nvCxnSpPr>
+          <p:cNvPr id="160" name="Connector 159"/>
+          <p:cNvCxnSpPr/>
+          <p:nvPr/>
+        </p:nvCxnSpPr>
+        <p:spPr>
+          <a:xfrm>
+            <a:off x="3118104" y="5376672.0"/>
+            <a:ext cx="201168" cy="0.0"/>
+          </a:xfrm>
+          <a:prstGeom prst="line">
+            <a:avLst/>
+          </a:prstGeom>
+          <a:ln w="19050">
+            <a:solidFill>
+              <a:srgbClr val="127A8A"/>
+            </a:solidFill>
+            <a:tailEnd type="triangle" w="med" len="med"/>
+          </a:ln>
+        </p:spPr>
+        <p:style>
+          <a:lnRef idx="2">
+            <a:schemeClr val="accent1"/>
+          </a:lnRef>
+          <a:fillRef idx="0">
+            <a:schemeClr val="accent1"/>
+          </a:fillRef>
+          <a:effectRef idx="1">
+            <a:schemeClr val="accent1"/>
+          </a:effectRef>
+          <a:fontRef idx="minor">
+            <a:schemeClr val="tx1"/>
+          </a:fontRef>
+        </p:style>
+      </p:cxnSp>
+      <p:cxnSp>
+        <p:nvCxnSpPr>
+          <p:cNvPr id="161" name="Connector 160"/>
+          <p:cNvCxnSpPr/>
+          <p:nvPr/>
+        </p:nvCxnSpPr>
+        <p:spPr>
+          <a:xfrm>
+            <a:off x="4069080" y="5376672.0"/>
+            <a:ext cx="201168" cy="0.0"/>
+          </a:xfrm>
+          <a:prstGeom prst="line">
+            <a:avLst/>
+          </a:prstGeom>
+          <a:ln w="19050">
+            <a:solidFill>
+              <a:srgbClr val="127A8A"/>
+            </a:solidFill>
+            <a:tailEnd type="triangle" w="med" len="med"/>
+          </a:ln>
+        </p:spPr>
+        <p:style>
+          <a:lnRef idx="2">
+            <a:schemeClr val="accent1"/>
+          </a:lnRef>
+          <a:fillRef idx="0">
+            <a:schemeClr val="accent1"/>
+          </a:fillRef>
+          <a:effectRef idx="1">
+            <a:schemeClr val="accent1"/>
+          </a:effectRef>
+          <a:fontRef idx="minor">
+            <a:schemeClr val="tx1"/>
+          </a:fontRef>
+        </p:style>
+      </p:cxnSp>
+      <p:cxnSp>
+        <p:nvCxnSpPr>
+          <p:cNvPr id="162" name="Connector 161"/>
+          <p:cNvCxnSpPr/>
+          <p:nvPr/>
+        </p:nvCxnSpPr>
+        <p:spPr>
+          <a:xfrm>
+            <a:off x="5020056" y="5376672.0"/>
+            <a:ext cx="201168" cy="0.0"/>
+          </a:xfrm>
+          <a:prstGeom prst="line">
+            <a:avLst/>
+          </a:prstGeom>
+          <a:ln w="19050">
+            <a:solidFill>
+              <a:srgbClr val="127A8A"/>
+            </a:solidFill>
+            <a:tailEnd type="triangle" w="med" len="med"/>
+          </a:ln>
+        </p:spPr>
+        <p:style>
+          <a:lnRef idx="2">
+            <a:schemeClr val="accent1"/>
+          </a:lnRef>
+          <a:fillRef idx="0">
+            <a:schemeClr val="accent1"/>
+          </a:fillRef>
+          <a:effectRef idx="1">
+            <a:schemeClr val="accent1"/>
+          </a:effectRef>
+          <a:fontRef idx="minor">
+            <a:schemeClr val="tx1"/>
+          </a:fontRef>
+        </p:style>
+      </p:cxnSp>
+      <p:cxnSp>
+        <p:nvCxnSpPr>
+          <p:cNvPr id="163" name="Connector 162"/>
+          <p:cNvCxnSpPr/>
+          <p:nvPr/>
+        </p:nvCxnSpPr>
+        <p:spPr>
+          <a:xfrm>
+            <a:off x="5971032" y="5376672.0"/>
+            <a:ext cx="201168" cy="0.0"/>
+          </a:xfrm>
+          <a:prstGeom prst="line">
+            <a:avLst/>
+          </a:prstGeom>
+          <a:ln w="19050">
+            <a:solidFill>
+              <a:srgbClr val="127A8A"/>
+            </a:solidFill>
+            <a:tailEnd type="triangle" w="med" len="med"/>
+          </a:ln>
+        </p:spPr>
+        <p:style>
+          <a:lnRef idx="2">
+            <a:schemeClr val="accent1"/>
+          </a:lnRef>
+          <a:fillRef idx="0">
+            <a:schemeClr val="accent1"/>
+          </a:fillRef>
+          <a:effectRef idx="1">
+            <a:schemeClr val="accent1"/>
+          </a:effectRef>
+          <a:fontRef idx="minor">
+            <a:schemeClr val="tx1"/>
+          </a:fontRef>
+        </p:style>
+      </p:cxnSp>
+      <p:cxnSp>
+        <p:nvCxnSpPr>
+          <p:cNvPr id="164" name="Connector 163"/>
+          <p:cNvCxnSpPr/>
+          <p:nvPr/>
+        </p:nvCxnSpPr>
+        <p:spPr>
+          <a:xfrm>
+            <a:off x="6922008" y="5376672.0"/>
+            <a:ext cx="201168" cy="0.0"/>
+          </a:xfrm>
+          <a:prstGeom prst="line">
+            <a:avLst/>
+          </a:prstGeom>
+          <a:ln w="19050">
+            <a:solidFill>
+              <a:srgbClr val="127A8A"/>
+            </a:solidFill>
+            <a:tailEnd type="triangle" w="med" len="med"/>
+          </a:ln>
+        </p:spPr>
+        <p:style>
+          <a:lnRef idx="2">
+            <a:schemeClr val="accent1"/>
+          </a:lnRef>
+          <a:fillRef idx="0">
+            <a:schemeClr val="accent1"/>
+          </a:fillRef>
+          <a:effectRef idx="1">
+            <a:schemeClr val="accent1"/>
+          </a:effectRef>
+          <a:fontRef idx="minor">
+            <a:schemeClr val="tx1"/>
+          </a:fontRef>
+        </p:style>
+      </p:cxnSp>
+      <p:cxnSp>
+        <p:nvCxnSpPr>
+          <p:cNvPr id="165" name="Connector 164"/>
+          <p:cNvCxnSpPr/>
+          <p:nvPr/>
+        </p:nvCxnSpPr>
+        <p:spPr>
+          <a:xfrm>
+            <a:off x="7872984" y="5376672.0"/>
+            <a:ext cx="182880" cy="0.0"/>
+          </a:xfrm>
+          <a:prstGeom prst="line">
+            <a:avLst/>
+          </a:prstGeom>
+          <a:ln w="19050">
+            <a:solidFill>
+              <a:srgbClr val="C0392B"/>
+            </a:solidFill>
+          </a:ln>
+        </p:spPr>
+        <p:style>
+          <a:lnRef idx="2">
+            <a:schemeClr val="accent1"/>
+          </a:lnRef>
+          <a:fillRef idx="0">
+            <a:schemeClr val="accent1"/>
+          </a:fillRef>
+          <a:effectRef idx="1">
+            <a:schemeClr val="accent1"/>
+          </a:effectRef>
+          <a:fontRef idx="minor">
+            <a:schemeClr val="tx1"/>
+          </a:fontRef>
+        </p:style>
+      </p:cxnSp>
+      <p:cxnSp>
+        <p:nvCxnSpPr>
+          <p:cNvPr id="166" name="Connector 165"/>
+          <p:cNvCxnSpPr/>
+          <p:nvPr/>
+        </p:nvCxnSpPr>
+        <p:spPr>
+          <a:xfrm flipV="1">
+            <a:off x="8055864" y="4974336"/>
+            <a:ext cx="0" cy="402336.0"/>
+          </a:xfrm>
+          <a:prstGeom prst="line">
+            <a:avLst/>
+          </a:prstGeom>
+          <a:ln w="19050">
+            <a:solidFill>
+              <a:srgbClr val="C0392B"/>
+            </a:solidFill>
+          </a:ln>
+        </p:spPr>
+        <p:style>
+          <a:lnRef idx="2">
+            <a:schemeClr val="accent1"/>
+          </a:lnRef>
+          <a:fillRef idx="0">
+            <a:schemeClr val="accent1"/>
+          </a:fillRef>
+          <a:effectRef idx="1">
+            <a:schemeClr val="accent1"/>
+          </a:effectRef>
+          <a:fontRef idx="minor">
+            <a:schemeClr val="tx1"/>
+          </a:fontRef>
+        </p:style>
+      </p:cxnSp>
+      <p:cxnSp>
+        <p:nvCxnSpPr>
+          <p:cNvPr id="167" name="Connector 166"/>
+          <p:cNvCxnSpPr/>
+          <p:nvPr/>
+        </p:nvCxnSpPr>
+        <p:spPr>
+          <a:xfrm flipH="1">
+            <a:off x="3694176.0" y="4974336"/>
+            <a:ext cx="4361688.0" cy="0"/>
+          </a:xfrm>
+          <a:prstGeom prst="line">
+            <a:avLst/>
+          </a:prstGeom>
+          <a:ln w="19050">
+            <a:solidFill>
+              <a:srgbClr val="C0392B"/>
+            </a:solidFill>
+          </a:ln>
+        </p:spPr>
+        <p:style>
+          <a:lnRef idx="2">
+            <a:schemeClr val="accent1"/>
+          </a:lnRef>
+          <a:fillRef idx="0">
+            <a:schemeClr val="accent1"/>
+          </a:fillRef>
+          <a:effectRef idx="1">
+            <a:schemeClr val="accent1"/>
+          </a:effectRef>
+          <a:fontRef idx="minor">
+            <a:schemeClr val="tx1"/>
+          </a:fontRef>
+        </p:style>
+      </p:cxnSp>
+      <p:cxnSp>
+        <p:nvCxnSpPr>
+          <p:cNvPr id="168" name="Connector 167"/>
+          <p:cNvCxnSpPr/>
+          <p:nvPr/>
+        </p:nvCxnSpPr>
+        <p:spPr>
+          <a:xfrm>
+            <a:off x="3694176.0" y="4974336"/>
+            <a:ext cx="0.0" cy="164592"/>
+          </a:xfrm>
+          <a:prstGeom prst="line">
+            <a:avLst/>
+          </a:prstGeom>
+          <a:ln w="19050">
+            <a:solidFill>
+              <a:srgbClr val="C0392B"/>
+            </a:solidFill>
+            <a:tailEnd type="triangle" w="med" len="med"/>
+          </a:ln>
+        </p:spPr>
+        <p:style>
+          <a:lnRef idx="2">
+            <a:schemeClr val="accent1"/>
+          </a:lnRef>
+          <a:fillRef idx="0">
+            <a:schemeClr val="accent1"/>
+          </a:fillRef>
+          <a:effectRef idx="1">
+            <a:schemeClr val="accent1"/>
+          </a:effectRef>
+          <a:fontRef idx="minor">
+            <a:schemeClr val="tx1"/>
+          </a:fontRef>
+        </p:style>
+      </p:cxnSp>
+      <p:sp>
+        <p:nvSpPr>
+          <p:cNvPr id="169" name="TextBox 168"/>
+          <p:cNvSpPr txBox="1"/>
+          <p:nvPr/>
+        </p:nvSpPr>
+        <p:spPr>
+          <a:xfrm>
+            <a:off x="6272784" y="5650992"/>
+            <a:ext cx="548640" cy="228600"/>
+          </a:xfrm>
+          <a:prstGeom prst="rect">
+            <a:avLst/>
+          </a:prstGeom>
+          <a:noFill/>
+        </p:spPr>
+        <p:txBody>
+          <a:bodyPr wrap="square" lIns="45720" rIns="45720" tIns="18288" bIns="18288" anchor="t">
+            <a:spAutoFit/>
+          </a:bodyPr>
+          <a:lstStyle/>
+          <a:p>
+            <a:pPr algn="ctr"/>
+            <a:r>
+              <a:rPr sz="1100" b="1" i="0">
+                <a:solidFill>
+                  <a:srgbClr val="C0392B"/>
+                </a:solidFill>
+                <a:latin typeface="Calibri"/>
+              </a:rPr>
+              <a:t>S</a:t>
+            </a:r>
+          </a:p>
+        </p:txBody>
+      </p:sp>
+      <p:sp>
+        <p:nvSpPr>
+          <p:cNvPr id="170" name="TextBox 169"/>
+          <p:cNvSpPr txBox="1"/>
+          <p:nvPr/>
+        </p:nvSpPr>
+        <p:spPr>
+          <a:xfrm>
+            <a:off x="6272784" y="5650992"/>
+            <a:ext cx="548640" cy="228600"/>
+          </a:xfrm>
+          <a:prstGeom prst="rect">
+            <a:avLst/>
+          </a:prstGeom>
+          <a:noFill/>
+        </p:spPr>
+        <p:txBody>
+          <a:bodyPr wrap="square" lIns="45720" rIns="45720" tIns="18288" bIns="18288" anchor="t">
+            <a:spAutoFit/>
+          </a:bodyPr>
+          <a:lstStyle/>
+          <a:p>
+            <a:pPr algn="ctr"/>
+            <a:r>
+              <a:rPr sz="1100" b="1" i="0">
+                <a:solidFill>
+                  <a:srgbClr val="C0392B"/>
+                </a:solidFill>
+                <a:latin typeface="Calibri"/>
+              </a:rPr>
+              <a:t>S=F</a:t>
+            </a:r>
+          </a:p>
+        </p:txBody>
+      </p:sp>
+      <p:sp>
+        <p:nvSpPr>
+          <p:cNvPr id="171" name="Rounded Rectangle 170"/>
+          <p:cNvSpPr/>
+          <p:nvPr/>
+        </p:nvSpPr>
+        <p:spPr>
+          <a:xfrm>
+            <a:off x="10500055" y="1389888"/>
+            <a:ext cx="1325880" cy="1463040"/>
+          </a:xfrm>
+          <a:prstGeom prst="roundRect">
+            <a:avLst/>
+          </a:prstGeom>
+          <a:solidFill>
+            <a:srgbClr val="F2F4F7"/>
+          </a:solidFill>
+          <a:ln w="25400">
+            <a:solidFill>
+              <a:srgbClr val="333D4A"/>
+            </a:solidFill>
+          </a:ln>
+          <a:effectLst/>
+        </p:spPr>
+        <p:style>
+          <a:lnRef idx="1">
+            <a:schemeClr val="accent1"/>
+          </a:lnRef>
+          <a:fillRef idx="3">
+            <a:schemeClr val="accent1"/>
+          </a:fillRef>
+          <a:effectRef idx="2">
+            <a:schemeClr val="accent1"/>
+          </a:effectRef>
+          <a:fontRef idx="minor">
+            <a:schemeClr val="lt1"/>
+          </a:fontRef>
+        </p:style>
+        <p:txBody>
+          <a:bodyPr rtlCol="0" anchor="ctr"/>
+          <a:lstStyle/>
+          <a:p>
+            <a:pPr algn="ctr"/>
+          </a:p>
+        </p:txBody>
+      </p:sp>
+      <p:sp>
+        <p:nvSpPr>
+          <p:cNvPr id="172" name="TextBox 171"/>
+          <p:cNvSpPr txBox="1"/>
+          <p:nvPr/>
+        </p:nvSpPr>
+        <p:spPr>
+          <a:xfrm>
+            <a:off x="10545775" y="1444752"/>
+            <a:ext cx="1234440" cy="320040"/>
+          </a:xfrm>
+          <a:prstGeom prst="rect">
+            <a:avLst/>
+          </a:prstGeom>
+          <a:noFill/>
+        </p:spPr>
+        <p:txBody>
+          <a:bodyPr wrap="square" lIns="45720" rIns="45720" tIns="18288" bIns="18288" anchor="t">
+            <a:spAutoFit/>
+          </a:bodyPr>
+          <a:lstStyle/>
+          <a:p>
+            <a:pPr algn="l"/>
+            <a:r>
+              <a:rPr sz="1200" b="1" i="0">
+                <a:solidFill>
+                  <a:srgbClr val="0B2A4A"/>
+                </a:solidFill>
+                <a:latin typeface="Calibri"/>
+              </a:rPr>
+              <a:t>Legend</a:t>
+            </a:r>
+          </a:p>
+        </p:txBody>
+      </p:sp>
+      <p:sp>
+        <p:nvSpPr>
+          <p:cNvPr id="173" name="Rounded Rectangle 172"/>
+          <p:cNvSpPr/>
+          <p:nvPr/>
+        </p:nvSpPr>
+        <p:spPr>
+          <a:xfrm>
+            <a:off x="10564063" y="1810512"/>
+            <a:ext cx="384048" cy="292608"/>
           </a:xfrm>
           <a:prstGeom prst="roundRect">
             <a:avLst/>
@@ -23941,14 +25840,14 @@
       </p:sp>
       <p:sp>
         <p:nvSpPr>
-          <p:cNvPr id="127" name="TextBox 126"/>
+          <p:cNvPr id="174" name="TextBox 173"/>
           <p:cNvSpPr txBox="1"/>
           <p:nvPr/>
         </p:nvSpPr>
         <p:spPr>
           <a:xfrm>
-            <a:off x="5221224" y="4389120"/>
-            <a:ext cx="749808" cy="475488"/>
+            <a:off x="10564063" y="1810512"/>
+            <a:ext cx="384048" cy="292608"/>
           </a:xfrm>
           <a:prstGeom prst="rect">
             <a:avLst/>
@@ -23963,73 +25862,27 @@
           <a:p>
             <a:pPr algn="ctr"/>
             <a:r>
-              <a:rPr sz="1300" b="1" i="0">
+              <a:rPr sz="1100" b="1" i="0">
                 <a:solidFill>
                   <a:srgbClr val="FFFFFF"/>
                 </a:solidFill>
                 <a:latin typeface="Calibri"/>
               </a:rPr>
-              <a:t>5</a:t>
-            </a:r>
-          </a:p>
-        </p:txBody>
-      </p:sp>
-      <p:sp>
-        <p:nvSpPr>
-          <p:cNvPr id="128" name="Rounded Rectangle 127"/>
-          <p:cNvSpPr/>
-          <p:nvPr/>
-        </p:nvSpPr>
-        <p:spPr>
-          <a:xfrm>
-            <a:off x="6172200" y="4389120"/>
-            <a:ext cx="749808" cy="475488"/>
-          </a:xfrm>
-          <a:prstGeom prst="roundRect">
-            <a:avLst/>
-          </a:prstGeom>
-          <a:solidFill>
-            <a:srgbClr val="FFFFFF"/>
-          </a:solidFill>
-          <a:ln w="25400">
-            <a:solidFill>
-              <a:srgbClr val="0B2A4A"/>
-            </a:solidFill>
-          </a:ln>
-          <a:effectLst/>
-        </p:spPr>
-        <p:style>
-          <a:lnRef idx="1">
-            <a:schemeClr val="accent1"/>
-          </a:lnRef>
-          <a:fillRef idx="3">
-            <a:schemeClr val="accent1"/>
-          </a:fillRef>
-          <a:effectRef idx="2">
-            <a:schemeClr val="accent1"/>
-          </a:effectRef>
-          <a:fontRef idx="minor">
-            <a:schemeClr val="lt1"/>
-          </a:fontRef>
-        </p:style>
-        <p:txBody>
-          <a:bodyPr rtlCol="0" anchor="ctr"/>
-          <a:lstStyle/>
-          <a:p>
-            <a:pPr algn="ctr"/>
-          </a:p>
-        </p:txBody>
-      </p:sp>
-      <p:sp>
-        <p:nvSpPr>
-          <p:cNvPr id="129" name="TextBox 128"/>
+              <a:t>S</a:t>
+            </a:r>
+          </a:p>
+        </p:txBody>
+      </p:sp>
+      <p:sp>
+        <p:nvSpPr>
+          <p:cNvPr id="175" name="TextBox 174"/>
           <p:cNvSpPr txBox="1"/>
           <p:nvPr/>
         </p:nvSpPr>
         <p:spPr>
           <a:xfrm>
-            <a:off x="6172200" y="4389120"/>
-            <a:ext cx="749808" cy="475488"/>
+            <a:off x="11002975" y="1810512"/>
+            <a:ext cx="1005840" cy="292608"/>
           </a:xfrm>
           <a:prstGeom prst="rect">
             <a:avLst/>
@@ -24042,896 +25895,29 @@
           </a:bodyPr>
           <a:lstStyle/>
           <a:p>
-            <a:pPr algn="ctr"/>
-            <a:r>
-              <a:rPr sz="1300" b="1" i="0">
-                <a:solidFill>
-                  <a:srgbClr val="0B2A4A"/>
-                </a:solidFill>
-                <a:latin typeface="Calibri"/>
-              </a:rPr>
-              <a:t>6</a:t>
-            </a:r>
-          </a:p>
-        </p:txBody>
-      </p:sp>
-      <p:sp>
-        <p:nvSpPr>
-          <p:cNvPr id="130" name="Rounded Rectangle 129"/>
+            <a:pPr algn="l"/>
+            <a:r>
+              <a:rPr sz="1100" b="0" i="0">
+                <a:solidFill>
+                  <a:srgbClr val="333D4A"/>
+                </a:solidFill>
+                <a:latin typeface="Calibri"/>
+              </a:rPr>
+              <a:t>= slow</a:t>
+            </a:r>
+          </a:p>
+        </p:txBody>
+      </p:sp>
+      <p:sp>
+        <p:nvSpPr>
+          <p:cNvPr id="176" name="Rounded Rectangle 175"/>
           <p:cNvSpPr/>
           <p:nvPr/>
         </p:nvSpPr>
         <p:spPr>
           <a:xfrm>
-            <a:off x="7123176" y="4389120"/>
-            <a:ext cx="749808" cy="475488"/>
-          </a:xfrm>
-          <a:prstGeom prst="roundRect">
-            <a:avLst/>
-          </a:prstGeom>
-          <a:solidFill>
-            <a:srgbClr val="FFFFFF"/>
-          </a:solidFill>
-          <a:ln w="25400">
-            <a:solidFill>
-              <a:srgbClr val="0B2A4A"/>
-            </a:solidFill>
-          </a:ln>
-          <a:effectLst/>
-        </p:spPr>
-        <p:style>
-          <a:lnRef idx="1">
-            <a:schemeClr val="accent1"/>
-          </a:lnRef>
-          <a:fillRef idx="3">
-            <a:schemeClr val="accent1"/>
-          </a:fillRef>
-          <a:effectRef idx="2">
-            <a:schemeClr val="accent1"/>
-          </a:effectRef>
-          <a:fontRef idx="minor">
-            <a:schemeClr val="lt1"/>
-          </a:fontRef>
-        </p:style>
-        <p:txBody>
-          <a:bodyPr rtlCol="0" anchor="ctr"/>
-          <a:lstStyle/>
-          <a:p>
-            <a:pPr algn="ctr"/>
-          </a:p>
-        </p:txBody>
-      </p:sp>
-      <p:sp>
-        <p:nvSpPr>
-          <p:cNvPr id="131" name="TextBox 130"/>
-          <p:cNvSpPr txBox="1"/>
-          <p:nvPr/>
-        </p:nvSpPr>
-        <p:spPr>
-          <a:xfrm>
-            <a:off x="7123176" y="4389120"/>
-            <a:ext cx="749808" cy="475488"/>
-          </a:xfrm>
-          <a:prstGeom prst="rect">
-            <a:avLst/>
-          </a:prstGeom>
-          <a:noFill/>
-        </p:spPr>
-        <p:txBody>
-          <a:bodyPr wrap="square" lIns="45720" rIns="45720" tIns="18288" bIns="18288" anchor="ctr">
-            <a:spAutoFit/>
-          </a:bodyPr>
-          <a:lstStyle/>
-          <a:p>
-            <a:pPr algn="ctr"/>
-            <a:r>
-              <a:rPr sz="1300" b="1" i="0">
-                <a:solidFill>
-                  <a:srgbClr val="0B2A4A"/>
-                </a:solidFill>
-                <a:latin typeface="Calibri"/>
-              </a:rPr>
-              <a:t>7</a:t>
-            </a:r>
-          </a:p>
-        </p:txBody>
-      </p:sp>
-      <p:cxnSp>
-        <p:nvCxnSpPr>
-          <p:cNvPr id="132" name="Connector 131"/>
-          <p:cNvCxnSpPr/>
-          <p:nvPr/>
-        </p:nvCxnSpPr>
-        <p:spPr>
-          <a:xfrm>
-            <a:off x="2167128" y="4626864.0"/>
-            <a:ext cx="201168" cy="0.0"/>
-          </a:xfrm>
-          <a:prstGeom prst="line">
-            <a:avLst/>
-          </a:prstGeom>
-          <a:ln w="19050">
-            <a:solidFill>
-              <a:srgbClr val="127A8A"/>
-            </a:solidFill>
-            <a:tailEnd type="triangle" w="med" len="med"/>
-          </a:ln>
-        </p:spPr>
-        <p:style>
-          <a:lnRef idx="2">
-            <a:schemeClr val="accent1"/>
-          </a:lnRef>
-          <a:fillRef idx="0">
-            <a:schemeClr val="accent1"/>
-          </a:fillRef>
-          <a:effectRef idx="1">
-            <a:schemeClr val="accent1"/>
-          </a:effectRef>
-          <a:fontRef idx="minor">
-            <a:schemeClr val="tx1"/>
-          </a:fontRef>
-        </p:style>
-      </p:cxnSp>
-      <p:cxnSp>
-        <p:nvCxnSpPr>
-          <p:cNvPr id="133" name="Connector 132"/>
-          <p:cNvCxnSpPr/>
-          <p:nvPr/>
-        </p:nvCxnSpPr>
-        <p:spPr>
-          <a:xfrm>
-            <a:off x="3118104" y="4626864.0"/>
-            <a:ext cx="201168" cy="0.0"/>
-          </a:xfrm>
-          <a:prstGeom prst="line">
-            <a:avLst/>
-          </a:prstGeom>
-          <a:ln w="19050">
-            <a:solidFill>
-              <a:srgbClr val="127A8A"/>
-            </a:solidFill>
-            <a:tailEnd type="triangle" w="med" len="med"/>
-          </a:ln>
-        </p:spPr>
-        <p:style>
-          <a:lnRef idx="2">
-            <a:schemeClr val="accent1"/>
-          </a:lnRef>
-          <a:fillRef idx="0">
-            <a:schemeClr val="accent1"/>
-          </a:fillRef>
-          <a:effectRef idx="1">
-            <a:schemeClr val="accent1"/>
-          </a:effectRef>
-          <a:fontRef idx="minor">
-            <a:schemeClr val="tx1"/>
-          </a:fontRef>
-        </p:style>
-      </p:cxnSp>
-      <p:cxnSp>
-        <p:nvCxnSpPr>
-          <p:cNvPr id="134" name="Connector 133"/>
-          <p:cNvCxnSpPr/>
-          <p:nvPr/>
-        </p:nvCxnSpPr>
-        <p:spPr>
-          <a:xfrm>
-            <a:off x="4069080" y="4626864.0"/>
-            <a:ext cx="201168" cy="0.0"/>
-          </a:xfrm>
-          <a:prstGeom prst="line">
-            <a:avLst/>
-          </a:prstGeom>
-          <a:ln w="19050">
-            <a:solidFill>
-              <a:srgbClr val="127A8A"/>
-            </a:solidFill>
-            <a:tailEnd type="triangle" w="med" len="med"/>
-          </a:ln>
-        </p:spPr>
-        <p:style>
-          <a:lnRef idx="2">
-            <a:schemeClr val="accent1"/>
-          </a:lnRef>
-          <a:fillRef idx="0">
-            <a:schemeClr val="accent1"/>
-          </a:fillRef>
-          <a:effectRef idx="1">
-            <a:schemeClr val="accent1"/>
-          </a:effectRef>
-          <a:fontRef idx="minor">
-            <a:schemeClr val="tx1"/>
-          </a:fontRef>
-        </p:style>
-      </p:cxnSp>
-      <p:cxnSp>
-        <p:nvCxnSpPr>
-          <p:cNvPr id="135" name="Connector 134"/>
-          <p:cNvCxnSpPr/>
-          <p:nvPr/>
-        </p:nvCxnSpPr>
-        <p:spPr>
-          <a:xfrm>
-            <a:off x="5020056" y="4626864.0"/>
-            <a:ext cx="201168" cy="0.0"/>
-          </a:xfrm>
-          <a:prstGeom prst="line">
-            <a:avLst/>
-          </a:prstGeom>
-          <a:ln w="19050">
-            <a:solidFill>
-              <a:srgbClr val="127A8A"/>
-            </a:solidFill>
-            <a:tailEnd type="triangle" w="med" len="med"/>
-          </a:ln>
-        </p:spPr>
-        <p:style>
-          <a:lnRef idx="2">
-            <a:schemeClr val="accent1"/>
-          </a:lnRef>
-          <a:fillRef idx="0">
-            <a:schemeClr val="accent1"/>
-          </a:fillRef>
-          <a:effectRef idx="1">
-            <a:schemeClr val="accent1"/>
-          </a:effectRef>
-          <a:fontRef idx="minor">
-            <a:schemeClr val="tx1"/>
-          </a:fontRef>
-        </p:style>
-      </p:cxnSp>
-      <p:cxnSp>
-        <p:nvCxnSpPr>
-          <p:cNvPr id="136" name="Connector 135"/>
-          <p:cNvCxnSpPr/>
-          <p:nvPr/>
-        </p:nvCxnSpPr>
-        <p:spPr>
-          <a:xfrm>
-            <a:off x="5971032" y="4626864.0"/>
-            <a:ext cx="201168" cy="0.0"/>
-          </a:xfrm>
-          <a:prstGeom prst="line">
-            <a:avLst/>
-          </a:prstGeom>
-          <a:ln w="19050">
-            <a:solidFill>
-              <a:srgbClr val="127A8A"/>
-            </a:solidFill>
-            <a:tailEnd type="triangle" w="med" len="med"/>
-          </a:ln>
-        </p:spPr>
-        <p:style>
-          <a:lnRef idx="2">
-            <a:schemeClr val="accent1"/>
-          </a:lnRef>
-          <a:fillRef idx="0">
-            <a:schemeClr val="accent1"/>
-          </a:fillRef>
-          <a:effectRef idx="1">
-            <a:schemeClr val="accent1"/>
-          </a:effectRef>
-          <a:fontRef idx="minor">
-            <a:schemeClr val="tx1"/>
-          </a:fontRef>
-        </p:style>
-      </p:cxnSp>
-      <p:cxnSp>
-        <p:nvCxnSpPr>
-          <p:cNvPr id="137" name="Connector 136"/>
-          <p:cNvCxnSpPr/>
-          <p:nvPr/>
-        </p:nvCxnSpPr>
-        <p:spPr>
-          <a:xfrm>
-            <a:off x="6922008" y="4626864.0"/>
-            <a:ext cx="201168" cy="0.0"/>
-          </a:xfrm>
-          <a:prstGeom prst="line">
-            <a:avLst/>
-          </a:prstGeom>
-          <a:ln w="19050">
-            <a:solidFill>
-              <a:srgbClr val="127A8A"/>
-            </a:solidFill>
-            <a:tailEnd type="triangle" w="med" len="med"/>
-          </a:ln>
-        </p:spPr>
-        <p:style>
-          <a:lnRef idx="2">
-            <a:schemeClr val="accent1"/>
-          </a:lnRef>
-          <a:fillRef idx="0">
-            <a:schemeClr val="accent1"/>
-          </a:fillRef>
-          <a:effectRef idx="1">
-            <a:schemeClr val="accent1"/>
-          </a:effectRef>
-          <a:fontRef idx="minor">
-            <a:schemeClr val="tx1"/>
-          </a:fontRef>
-        </p:style>
-      </p:cxnSp>
-      <p:cxnSp>
-        <p:nvCxnSpPr>
-          <p:cNvPr id="138" name="Connector 137"/>
-          <p:cNvCxnSpPr/>
-          <p:nvPr/>
-        </p:nvCxnSpPr>
-        <p:spPr>
-          <a:xfrm>
-            <a:off x="7872984" y="4626864.0"/>
-            <a:ext cx="182880" cy="0.0"/>
-          </a:xfrm>
-          <a:prstGeom prst="line">
-            <a:avLst/>
-          </a:prstGeom>
-          <a:ln w="19050">
-            <a:solidFill>
-              <a:srgbClr val="C0392B"/>
-            </a:solidFill>
-          </a:ln>
-        </p:spPr>
-        <p:style>
-          <a:lnRef idx="2">
-            <a:schemeClr val="accent1"/>
-          </a:lnRef>
-          <a:fillRef idx="0">
-            <a:schemeClr val="accent1"/>
-          </a:fillRef>
-          <a:effectRef idx="1">
-            <a:schemeClr val="accent1"/>
-          </a:effectRef>
-          <a:fontRef idx="minor">
-            <a:schemeClr val="tx1"/>
-          </a:fontRef>
-        </p:style>
-      </p:cxnSp>
-      <p:cxnSp>
-        <p:nvCxnSpPr>
-          <p:cNvPr id="139" name="Connector 138"/>
-          <p:cNvCxnSpPr/>
-          <p:nvPr/>
-        </p:nvCxnSpPr>
-        <p:spPr>
-          <a:xfrm flipV="1">
-            <a:off x="8055864" y="4224528"/>
-            <a:ext cx="0" cy="402336.0"/>
-          </a:xfrm>
-          <a:prstGeom prst="line">
-            <a:avLst/>
-          </a:prstGeom>
-          <a:ln w="19050">
-            <a:solidFill>
-              <a:srgbClr val="C0392B"/>
-            </a:solidFill>
-          </a:ln>
-        </p:spPr>
-        <p:style>
-          <a:lnRef idx="2">
-            <a:schemeClr val="accent1"/>
-          </a:lnRef>
-          <a:fillRef idx="0">
-            <a:schemeClr val="accent1"/>
-          </a:fillRef>
-          <a:effectRef idx="1">
-            <a:schemeClr val="accent1"/>
-          </a:effectRef>
-          <a:fontRef idx="minor">
-            <a:schemeClr val="tx1"/>
-          </a:fontRef>
-        </p:style>
-      </p:cxnSp>
-      <p:cxnSp>
-        <p:nvCxnSpPr>
-          <p:cNvPr id="140" name="Connector 139"/>
-          <p:cNvCxnSpPr/>
-          <p:nvPr/>
-        </p:nvCxnSpPr>
-        <p:spPr>
-          <a:xfrm flipH="1">
-            <a:off x="3694176.0" y="4224528"/>
-            <a:ext cx="4361688.0" cy="0"/>
-          </a:xfrm>
-          <a:prstGeom prst="line">
-            <a:avLst/>
-          </a:prstGeom>
-          <a:ln w="19050">
-            <a:solidFill>
-              <a:srgbClr val="C0392B"/>
-            </a:solidFill>
-          </a:ln>
-        </p:spPr>
-        <p:style>
-          <a:lnRef idx="2">
-            <a:schemeClr val="accent1"/>
-          </a:lnRef>
-          <a:fillRef idx="0">
-            <a:schemeClr val="accent1"/>
-          </a:fillRef>
-          <a:effectRef idx="1">
-            <a:schemeClr val="accent1"/>
-          </a:effectRef>
-          <a:fontRef idx="minor">
-            <a:schemeClr val="tx1"/>
-          </a:fontRef>
-        </p:style>
-      </p:cxnSp>
-      <p:cxnSp>
-        <p:nvCxnSpPr>
-          <p:cNvPr id="141" name="Connector 140"/>
-          <p:cNvCxnSpPr/>
-          <p:nvPr/>
-        </p:nvCxnSpPr>
-        <p:spPr>
-          <a:xfrm>
-            <a:off x="3694176.0" y="4224528"/>
-            <a:ext cx="0.0" cy="164592"/>
-          </a:xfrm>
-          <a:prstGeom prst="line">
-            <a:avLst/>
-          </a:prstGeom>
-          <a:ln w="19050">
-            <a:solidFill>
-              <a:srgbClr val="C0392B"/>
-            </a:solidFill>
-            <a:tailEnd type="triangle" w="med" len="med"/>
-          </a:ln>
-        </p:spPr>
-        <p:style>
-          <a:lnRef idx="2">
-            <a:schemeClr val="accent1"/>
-          </a:lnRef>
-          <a:fillRef idx="0">
-            <a:schemeClr val="accent1"/>
-          </a:fillRef>
-          <a:effectRef idx="1">
-            <a:schemeClr val="accent1"/>
-          </a:effectRef>
-          <a:fontRef idx="minor">
-            <a:schemeClr val="tx1"/>
-          </a:fontRef>
-        </p:style>
-      </p:cxnSp>
-      <p:sp>
-        <p:nvSpPr>
-          <p:cNvPr id="142" name="TextBox 141"/>
-          <p:cNvSpPr txBox="1"/>
-          <p:nvPr/>
-        </p:nvSpPr>
-        <p:spPr>
-          <a:xfrm>
-            <a:off x="5321808" y="4901184"/>
-            <a:ext cx="548640" cy="228600"/>
-          </a:xfrm>
-          <a:prstGeom prst="rect">
-            <a:avLst/>
-          </a:prstGeom>
-          <a:noFill/>
-        </p:spPr>
-        <p:txBody>
-          <a:bodyPr wrap="square" lIns="45720" rIns="45720" tIns="18288" bIns="18288" anchor="t">
-            <a:spAutoFit/>
-          </a:bodyPr>
-          <a:lstStyle/>
-          <a:p>
-            <a:pPr algn="ctr"/>
-            <a:r>
-              <a:rPr sz="1100" b="1" i="0">
-                <a:solidFill>
-                  <a:srgbClr val="2E7D32"/>
-                </a:solidFill>
-                <a:latin typeface="Calibri"/>
-              </a:rPr>
-              <a:t>S</a:t>
-            </a:r>
-          </a:p>
-        </p:txBody>
-      </p:sp>
-      <p:sp>
-        <p:nvSpPr>
-          <p:cNvPr id="143" name="TextBox 142"/>
-          <p:cNvSpPr txBox="1"/>
-          <p:nvPr/>
-        </p:nvSpPr>
-        <p:spPr>
-          <a:xfrm>
-            <a:off x="3419856" y="4901184"/>
-            <a:ext cx="548640" cy="228600"/>
-          </a:xfrm>
-          <a:prstGeom prst="rect">
-            <a:avLst/>
-          </a:prstGeom>
-          <a:noFill/>
-        </p:spPr>
-        <p:txBody>
-          <a:bodyPr wrap="square" lIns="45720" rIns="45720" tIns="18288" bIns="18288" anchor="t">
-            <a:spAutoFit/>
-          </a:bodyPr>
-          <a:lstStyle/>
-          <a:p>
-            <a:pPr algn="ctr"/>
-            <a:r>
-              <a:rPr sz="1100" b="1" i="0">
-                <a:solidFill>
-                  <a:srgbClr val="E65C00"/>
-                </a:solidFill>
-                <a:latin typeface="Calibri"/>
-              </a:rPr>
-              <a:t>F</a:t>
-            </a:r>
-          </a:p>
-        </p:txBody>
-      </p:sp>
-      <p:sp>
-        <p:nvSpPr>
-          <p:cNvPr id="144" name="TextBox 143"/>
-          <p:cNvSpPr txBox="1"/>
-          <p:nvPr/>
-        </p:nvSpPr>
-        <p:spPr>
-          <a:xfrm>
-            <a:off x="502920" y="5138928"/>
-            <a:ext cx="1097280" cy="475488"/>
-          </a:xfrm>
-          <a:prstGeom prst="rect">
-            <a:avLst/>
-          </a:prstGeom>
-          <a:noFill/>
-        </p:spPr>
-        <p:txBody>
-          <a:bodyPr wrap="square" lIns="45720" rIns="45720" tIns="18288" bIns="18288" anchor="ctr">
-            <a:spAutoFit/>
-          </a:bodyPr>
-          <a:lstStyle/>
-          <a:p>
-            <a:pPr algn="r"/>
-            <a:r>
-              <a:rPr sz="1200" b="1" i="0">
-                <a:solidFill>
-                  <a:srgbClr val="0B2A4A"/>
-                </a:solidFill>
-                <a:latin typeface="Calibri"/>
-              </a:rPr>
-              <a:t>Step 5</a:t>
-            </a:r>
-          </a:p>
-        </p:txBody>
-      </p:sp>
-      <p:sp>
-        <p:nvSpPr>
-          <p:cNvPr id="145" name="Rounded Rectangle 144"/>
-          <p:cNvSpPr/>
-          <p:nvPr/>
-        </p:nvSpPr>
-        <p:spPr>
-          <a:xfrm>
-            <a:off x="1417320" y="5138928"/>
-            <a:ext cx="749808" cy="475488"/>
-          </a:xfrm>
-          <a:prstGeom prst="roundRect">
-            <a:avLst/>
-          </a:prstGeom>
-          <a:solidFill>
-            <a:srgbClr val="FFFFFF"/>
-          </a:solidFill>
-          <a:ln w="25400">
-            <a:solidFill>
-              <a:srgbClr val="0B2A4A"/>
-            </a:solidFill>
-          </a:ln>
-          <a:effectLst/>
-        </p:spPr>
-        <p:style>
-          <a:lnRef idx="1">
-            <a:schemeClr val="accent1"/>
-          </a:lnRef>
-          <a:fillRef idx="3">
-            <a:schemeClr val="accent1"/>
-          </a:fillRef>
-          <a:effectRef idx="2">
-            <a:schemeClr val="accent1"/>
-          </a:effectRef>
-          <a:fontRef idx="minor">
-            <a:schemeClr val="lt1"/>
-          </a:fontRef>
-        </p:style>
-        <p:txBody>
-          <a:bodyPr rtlCol="0" anchor="ctr"/>
-          <a:lstStyle/>
-          <a:p>
-            <a:pPr algn="ctr"/>
-          </a:p>
-        </p:txBody>
-      </p:sp>
-      <p:sp>
-        <p:nvSpPr>
-          <p:cNvPr id="146" name="TextBox 145"/>
-          <p:cNvSpPr txBox="1"/>
-          <p:nvPr/>
-        </p:nvSpPr>
-        <p:spPr>
-          <a:xfrm>
-            <a:off x="1417320" y="5138928"/>
-            <a:ext cx="749808" cy="475488"/>
-          </a:xfrm>
-          <a:prstGeom prst="rect">
-            <a:avLst/>
-          </a:prstGeom>
-          <a:noFill/>
-        </p:spPr>
-        <p:txBody>
-          <a:bodyPr wrap="square" lIns="45720" rIns="45720" tIns="18288" bIns="18288" anchor="ctr">
-            <a:spAutoFit/>
-          </a:bodyPr>
-          <a:lstStyle/>
-          <a:p>
-            <a:pPr algn="ctr"/>
-            <a:r>
-              <a:rPr sz="1300" b="1" i="0">
-                <a:solidFill>
-                  <a:srgbClr val="0B2A4A"/>
-                </a:solidFill>
-                <a:latin typeface="Calibri"/>
-              </a:rPr>
-              <a:t>1</a:t>
-            </a:r>
-          </a:p>
-        </p:txBody>
-      </p:sp>
-      <p:sp>
-        <p:nvSpPr>
-          <p:cNvPr id="147" name="Rounded Rectangle 146"/>
-          <p:cNvSpPr/>
-          <p:nvPr/>
-        </p:nvSpPr>
-        <p:spPr>
-          <a:xfrm>
-            <a:off x="2368296" y="5138928"/>
-            <a:ext cx="749808" cy="475488"/>
-          </a:xfrm>
-          <a:prstGeom prst="roundRect">
-            <a:avLst/>
-          </a:prstGeom>
-          <a:solidFill>
-            <a:srgbClr val="FFFFFF"/>
-          </a:solidFill>
-          <a:ln w="25400">
-            <a:solidFill>
-              <a:srgbClr val="0B2A4A"/>
-            </a:solidFill>
-          </a:ln>
-          <a:effectLst/>
-        </p:spPr>
-        <p:style>
-          <a:lnRef idx="1">
-            <a:schemeClr val="accent1"/>
-          </a:lnRef>
-          <a:fillRef idx="3">
-            <a:schemeClr val="accent1"/>
-          </a:fillRef>
-          <a:effectRef idx="2">
-            <a:schemeClr val="accent1"/>
-          </a:effectRef>
-          <a:fontRef idx="minor">
-            <a:schemeClr val="lt1"/>
-          </a:fontRef>
-        </p:style>
-        <p:txBody>
-          <a:bodyPr rtlCol="0" anchor="ctr"/>
-          <a:lstStyle/>
-          <a:p>
-            <a:pPr algn="ctr"/>
-          </a:p>
-        </p:txBody>
-      </p:sp>
-      <p:sp>
-        <p:nvSpPr>
-          <p:cNvPr id="148" name="TextBox 147"/>
-          <p:cNvSpPr txBox="1"/>
-          <p:nvPr/>
-        </p:nvSpPr>
-        <p:spPr>
-          <a:xfrm>
-            <a:off x="2368296" y="5138928"/>
-            <a:ext cx="749808" cy="475488"/>
-          </a:xfrm>
-          <a:prstGeom prst="rect">
-            <a:avLst/>
-          </a:prstGeom>
-          <a:noFill/>
-        </p:spPr>
-        <p:txBody>
-          <a:bodyPr wrap="square" lIns="45720" rIns="45720" tIns="18288" bIns="18288" anchor="ctr">
-            <a:spAutoFit/>
-          </a:bodyPr>
-          <a:lstStyle/>
-          <a:p>
-            <a:pPr algn="ctr"/>
-            <a:r>
-              <a:rPr sz="1300" b="1" i="0">
-                <a:solidFill>
-                  <a:srgbClr val="0B2A4A"/>
-                </a:solidFill>
-                <a:latin typeface="Calibri"/>
-              </a:rPr>
-              <a:t>2</a:t>
-            </a:r>
-          </a:p>
-        </p:txBody>
-      </p:sp>
-      <p:sp>
-        <p:nvSpPr>
-          <p:cNvPr id="149" name="Rounded Rectangle 148"/>
-          <p:cNvSpPr/>
-          <p:nvPr/>
-        </p:nvSpPr>
-        <p:spPr>
-          <a:xfrm>
-            <a:off x="3319272" y="5138928"/>
-            <a:ext cx="749808" cy="475488"/>
-          </a:xfrm>
-          <a:prstGeom prst="roundRect">
-            <a:avLst/>
-          </a:prstGeom>
-          <a:solidFill>
-            <a:srgbClr val="FFFFFF"/>
-          </a:solidFill>
-          <a:ln w="25400">
-            <a:solidFill>
-              <a:srgbClr val="0B2A4A"/>
-            </a:solidFill>
-          </a:ln>
-          <a:effectLst/>
-        </p:spPr>
-        <p:style>
-          <a:lnRef idx="1">
-            <a:schemeClr val="accent1"/>
-          </a:lnRef>
-          <a:fillRef idx="3">
-            <a:schemeClr val="accent1"/>
-          </a:fillRef>
-          <a:effectRef idx="2">
-            <a:schemeClr val="accent1"/>
-          </a:effectRef>
-          <a:fontRef idx="minor">
-            <a:schemeClr val="lt1"/>
-          </a:fontRef>
-        </p:style>
-        <p:txBody>
-          <a:bodyPr rtlCol="0" anchor="ctr"/>
-          <a:lstStyle/>
-          <a:p>
-            <a:pPr algn="ctr"/>
-          </a:p>
-        </p:txBody>
-      </p:sp>
-      <p:sp>
-        <p:nvSpPr>
-          <p:cNvPr id="150" name="TextBox 149"/>
-          <p:cNvSpPr txBox="1"/>
-          <p:nvPr/>
-        </p:nvSpPr>
-        <p:spPr>
-          <a:xfrm>
-            <a:off x="3319272" y="5138928"/>
-            <a:ext cx="749808" cy="475488"/>
-          </a:xfrm>
-          <a:prstGeom prst="rect">
-            <a:avLst/>
-          </a:prstGeom>
-          <a:noFill/>
-        </p:spPr>
-        <p:txBody>
-          <a:bodyPr wrap="square" lIns="45720" rIns="45720" tIns="18288" bIns="18288" anchor="ctr">
-            <a:spAutoFit/>
-          </a:bodyPr>
-          <a:lstStyle/>
-          <a:p>
-            <a:pPr algn="ctr"/>
-            <a:r>
-              <a:rPr sz="1300" b="1" i="0">
-                <a:solidFill>
-                  <a:srgbClr val="0B2A4A"/>
-                </a:solidFill>
-                <a:latin typeface="Calibri"/>
-              </a:rPr>
-              <a:t>3</a:t>
-            </a:r>
-          </a:p>
-        </p:txBody>
-      </p:sp>
-      <p:sp>
-        <p:nvSpPr>
-          <p:cNvPr id="151" name="Rounded Rectangle 150"/>
-          <p:cNvSpPr/>
-          <p:nvPr/>
-        </p:nvSpPr>
-        <p:spPr>
-          <a:xfrm>
-            <a:off x="4270248" y="5138928"/>
-            <a:ext cx="749808" cy="475488"/>
-          </a:xfrm>
-          <a:prstGeom prst="roundRect">
-            <a:avLst/>
-          </a:prstGeom>
-          <a:solidFill>
-            <a:srgbClr val="FFFFFF"/>
-          </a:solidFill>
-          <a:ln w="25400">
-            <a:solidFill>
-              <a:srgbClr val="0B2A4A"/>
-            </a:solidFill>
-          </a:ln>
-          <a:effectLst/>
-        </p:spPr>
-        <p:style>
-          <a:lnRef idx="1">
-            <a:schemeClr val="accent1"/>
-          </a:lnRef>
-          <a:fillRef idx="3">
-            <a:schemeClr val="accent1"/>
-          </a:fillRef>
-          <a:effectRef idx="2">
-            <a:schemeClr val="accent1"/>
-          </a:effectRef>
-          <a:fontRef idx="minor">
-            <a:schemeClr val="lt1"/>
-          </a:fontRef>
-        </p:style>
-        <p:txBody>
-          <a:bodyPr rtlCol="0" anchor="ctr"/>
-          <a:lstStyle/>
-          <a:p>
-            <a:pPr algn="ctr"/>
-          </a:p>
-        </p:txBody>
-      </p:sp>
-      <p:sp>
-        <p:nvSpPr>
-          <p:cNvPr id="152" name="TextBox 151"/>
-          <p:cNvSpPr txBox="1"/>
-          <p:nvPr/>
-        </p:nvSpPr>
-        <p:spPr>
-          <a:xfrm>
-            <a:off x="4270248" y="5138928"/>
-            <a:ext cx="749808" cy="475488"/>
-          </a:xfrm>
-          <a:prstGeom prst="rect">
-            <a:avLst/>
-          </a:prstGeom>
-          <a:noFill/>
-        </p:spPr>
-        <p:txBody>
-          <a:bodyPr wrap="square" lIns="45720" rIns="45720" tIns="18288" bIns="18288" anchor="ctr">
-            <a:spAutoFit/>
-          </a:bodyPr>
-          <a:lstStyle/>
-          <a:p>
-            <a:pPr algn="ctr"/>
-            <a:r>
-              <a:rPr sz="1300" b="1" i="0">
-                <a:solidFill>
-                  <a:srgbClr val="0B2A4A"/>
-                </a:solidFill>
-                <a:latin typeface="Calibri"/>
-              </a:rPr>
-              <a:t>4</a:t>
-            </a:r>
-          </a:p>
-        </p:txBody>
-      </p:sp>
-      <p:sp>
-        <p:nvSpPr>
-          <p:cNvPr id="153" name="Rounded Rectangle 152"/>
-          <p:cNvSpPr/>
-          <p:nvPr/>
-        </p:nvSpPr>
-        <p:spPr>
-          <a:xfrm>
-            <a:off x="5221224" y="5138928"/>
-            <a:ext cx="749808" cy="475488"/>
+            <a:off x="10564063" y="2148840"/>
+            <a:ext cx="384048" cy="292608"/>
           </a:xfrm>
           <a:prstGeom prst="roundRect">
             <a:avLst/>
@@ -24970,14 +25956,14 @@
       </p:sp>
       <p:sp>
         <p:nvSpPr>
-          <p:cNvPr id="154" name="TextBox 153"/>
+          <p:cNvPr id="177" name="TextBox 176"/>
           <p:cNvSpPr txBox="1"/>
           <p:nvPr/>
         </p:nvSpPr>
         <p:spPr>
           <a:xfrm>
-            <a:off x="5221224" y="5138928"/>
-            <a:ext cx="749808" cy="475488"/>
+            <a:off x="10564063" y="2148840"/>
+            <a:ext cx="384048" cy="292608"/>
           </a:xfrm>
           <a:prstGeom prst="rect">
             <a:avLst/>
@@ -24992,73 +25978,27 @@
           <a:p>
             <a:pPr algn="ctr"/>
             <a:r>
-              <a:rPr sz="1300" b="1" i="0">
+              <a:rPr sz="1100" b="1" i="0">
                 <a:solidFill>
                   <a:srgbClr val="FFFFFF"/>
                 </a:solidFill>
                 <a:latin typeface="Calibri"/>
               </a:rPr>
-              <a:t>5</a:t>
-            </a:r>
-          </a:p>
-        </p:txBody>
-      </p:sp>
-      <p:sp>
-        <p:nvSpPr>
-          <p:cNvPr id="155" name="Rounded Rectangle 154"/>
-          <p:cNvSpPr/>
-          <p:nvPr/>
-        </p:nvSpPr>
-        <p:spPr>
-          <a:xfrm>
-            <a:off x="6172200" y="5138928"/>
-            <a:ext cx="749808" cy="475488"/>
-          </a:xfrm>
-          <a:prstGeom prst="roundRect">
-            <a:avLst/>
-          </a:prstGeom>
-          <a:solidFill>
-            <a:srgbClr val="D0F0D0"/>
-          </a:solidFill>
-          <a:ln w="25400">
-            <a:solidFill>
-              <a:srgbClr val="0B2A4A"/>
-            </a:solidFill>
-          </a:ln>
-          <a:effectLst/>
-        </p:spPr>
-        <p:style>
-          <a:lnRef idx="1">
-            <a:schemeClr val="accent1"/>
-          </a:lnRef>
-          <a:fillRef idx="3">
-            <a:schemeClr val="accent1"/>
-          </a:fillRef>
-          <a:effectRef idx="2">
-            <a:schemeClr val="accent1"/>
-          </a:effectRef>
-          <a:fontRef idx="minor">
-            <a:schemeClr val="lt1"/>
-          </a:fontRef>
-        </p:style>
-        <p:txBody>
-          <a:bodyPr rtlCol="0" anchor="ctr"/>
-          <a:lstStyle/>
-          <a:p>
-            <a:pPr algn="ctr"/>
-          </a:p>
-        </p:txBody>
-      </p:sp>
-      <p:sp>
-        <p:nvSpPr>
-          <p:cNvPr id="156" name="TextBox 155"/>
+              <a:t>F</a:t>
+            </a:r>
+          </a:p>
+        </p:txBody>
+      </p:sp>
+      <p:sp>
+        <p:nvSpPr>
+          <p:cNvPr id="178" name="TextBox 177"/>
           <p:cNvSpPr txBox="1"/>
           <p:nvPr/>
         </p:nvSpPr>
         <p:spPr>
           <a:xfrm>
-            <a:off x="6172200" y="5138928"/>
-            <a:ext cx="749808" cy="475488"/>
+            <a:off x="11002975" y="2148840"/>
+            <a:ext cx="1005840" cy="292608"/>
           </a:xfrm>
           <a:prstGeom prst="rect">
             <a:avLst/>
@@ -25071,1058 +26011,29 @@
           </a:bodyPr>
           <a:lstStyle/>
           <a:p>
-            <a:pPr algn="ctr"/>
-            <a:r>
-              <a:rPr sz="1300" b="1" i="0">
-                <a:solidFill>
-                  <a:srgbClr val="FFFFFF"/>
-                </a:solidFill>
-                <a:latin typeface="Calibri"/>
-              </a:rPr>
-              <a:t>6</a:t>
-            </a:r>
-          </a:p>
-        </p:txBody>
-      </p:sp>
-      <p:sp>
-        <p:nvSpPr>
-          <p:cNvPr id="157" name="Rounded Rectangle 156"/>
+            <a:pPr algn="l"/>
+            <a:r>
+              <a:rPr sz="1100" b="0" i="0">
+                <a:solidFill>
+                  <a:srgbClr val="333D4A"/>
+                </a:solidFill>
+                <a:latin typeface="Calibri"/>
+              </a:rPr>
+              <a:t>= fast</a:t>
+            </a:r>
+          </a:p>
+        </p:txBody>
+      </p:sp>
+      <p:sp>
+        <p:nvSpPr>
+          <p:cNvPr id="179" name="Rounded Rectangle 178"/>
           <p:cNvSpPr/>
           <p:nvPr/>
         </p:nvSpPr>
         <p:spPr>
           <a:xfrm>
-            <a:off x="7123176" y="5138928"/>
-            <a:ext cx="749808" cy="475488"/>
-          </a:xfrm>
-          <a:prstGeom prst="roundRect">
-            <a:avLst/>
-          </a:prstGeom>
-          <a:solidFill>
-            <a:srgbClr val="FFFFFF"/>
-          </a:solidFill>
-          <a:ln w="25400">
-            <a:solidFill>
-              <a:srgbClr val="0B2A4A"/>
-            </a:solidFill>
-          </a:ln>
-          <a:effectLst/>
-        </p:spPr>
-        <p:style>
-          <a:lnRef idx="1">
-            <a:schemeClr val="accent1"/>
-          </a:lnRef>
-          <a:fillRef idx="3">
-            <a:schemeClr val="accent1"/>
-          </a:fillRef>
-          <a:effectRef idx="2">
-            <a:schemeClr val="accent1"/>
-          </a:effectRef>
-          <a:fontRef idx="minor">
-            <a:schemeClr val="lt1"/>
-          </a:fontRef>
-        </p:style>
-        <p:txBody>
-          <a:bodyPr rtlCol="0" anchor="ctr"/>
-          <a:lstStyle/>
-          <a:p>
-            <a:pPr algn="ctr"/>
-          </a:p>
-        </p:txBody>
-      </p:sp>
-      <p:sp>
-        <p:nvSpPr>
-          <p:cNvPr id="158" name="TextBox 157"/>
-          <p:cNvSpPr txBox="1"/>
-          <p:nvPr/>
-        </p:nvSpPr>
-        <p:spPr>
-          <a:xfrm>
-            <a:off x="7123176" y="5138928"/>
-            <a:ext cx="749808" cy="475488"/>
-          </a:xfrm>
-          <a:prstGeom prst="rect">
-            <a:avLst/>
-          </a:prstGeom>
-          <a:noFill/>
-        </p:spPr>
-        <p:txBody>
-          <a:bodyPr wrap="square" lIns="45720" rIns="45720" tIns="18288" bIns="18288" anchor="ctr">
-            <a:spAutoFit/>
-          </a:bodyPr>
-          <a:lstStyle/>
-          <a:p>
-            <a:pPr algn="ctr"/>
-            <a:r>
-              <a:rPr sz="1300" b="1" i="0">
-                <a:solidFill>
-                  <a:srgbClr val="0B2A4A"/>
-                </a:solidFill>
-                <a:latin typeface="Calibri"/>
-              </a:rPr>
-              <a:t>7</a:t>
-            </a:r>
-          </a:p>
-        </p:txBody>
-      </p:sp>
-      <p:cxnSp>
-        <p:nvCxnSpPr>
-          <p:cNvPr id="159" name="Connector 158"/>
-          <p:cNvCxnSpPr/>
-          <p:nvPr/>
-        </p:nvCxnSpPr>
-        <p:spPr>
-          <a:xfrm>
-            <a:off x="2167128" y="5376672.0"/>
-            <a:ext cx="201168" cy="0.0"/>
-          </a:xfrm>
-          <a:prstGeom prst="line">
-            <a:avLst/>
-          </a:prstGeom>
-          <a:ln w="19050">
-            <a:solidFill>
-              <a:srgbClr val="127A8A"/>
-            </a:solidFill>
-            <a:tailEnd type="triangle" w="med" len="med"/>
-          </a:ln>
-        </p:spPr>
-        <p:style>
-          <a:lnRef idx="2">
-            <a:schemeClr val="accent1"/>
-          </a:lnRef>
-          <a:fillRef idx="0">
-            <a:schemeClr val="accent1"/>
-          </a:fillRef>
-          <a:effectRef idx="1">
-            <a:schemeClr val="accent1"/>
-          </a:effectRef>
-          <a:fontRef idx="minor">
-            <a:schemeClr val="tx1"/>
-          </a:fontRef>
-        </p:style>
-      </p:cxnSp>
-      <p:cxnSp>
-        <p:nvCxnSpPr>
-          <p:cNvPr id="160" name="Connector 159"/>
-          <p:cNvCxnSpPr/>
-          <p:nvPr/>
-        </p:nvCxnSpPr>
-        <p:spPr>
-          <a:xfrm>
-            <a:off x="3118104" y="5376672.0"/>
-            <a:ext cx="201168" cy="0.0"/>
-          </a:xfrm>
-          <a:prstGeom prst="line">
-            <a:avLst/>
-          </a:prstGeom>
-          <a:ln w="19050">
-            <a:solidFill>
-              <a:srgbClr val="127A8A"/>
-            </a:solidFill>
-            <a:tailEnd type="triangle" w="med" len="med"/>
-          </a:ln>
-        </p:spPr>
-        <p:style>
-          <a:lnRef idx="2">
-            <a:schemeClr val="accent1"/>
-          </a:lnRef>
-          <a:fillRef idx="0">
-            <a:schemeClr val="accent1"/>
-          </a:fillRef>
-          <a:effectRef idx="1">
-            <a:schemeClr val="accent1"/>
-          </a:effectRef>
-          <a:fontRef idx="minor">
-            <a:schemeClr val="tx1"/>
-          </a:fontRef>
-        </p:style>
-      </p:cxnSp>
-      <p:cxnSp>
-        <p:nvCxnSpPr>
-          <p:cNvPr id="161" name="Connector 160"/>
-          <p:cNvCxnSpPr/>
-          <p:nvPr/>
-        </p:nvCxnSpPr>
-        <p:spPr>
-          <a:xfrm>
-            <a:off x="4069080" y="5376672.0"/>
-            <a:ext cx="201168" cy="0.0"/>
-          </a:xfrm>
-          <a:prstGeom prst="line">
-            <a:avLst/>
-          </a:prstGeom>
-          <a:ln w="19050">
-            <a:solidFill>
-              <a:srgbClr val="127A8A"/>
-            </a:solidFill>
-            <a:tailEnd type="triangle" w="med" len="med"/>
-          </a:ln>
-        </p:spPr>
-        <p:style>
-          <a:lnRef idx="2">
-            <a:schemeClr val="accent1"/>
-          </a:lnRef>
-          <a:fillRef idx="0">
-            <a:schemeClr val="accent1"/>
-          </a:fillRef>
-          <a:effectRef idx="1">
-            <a:schemeClr val="accent1"/>
-          </a:effectRef>
-          <a:fontRef idx="minor">
-            <a:schemeClr val="tx1"/>
-          </a:fontRef>
-        </p:style>
-      </p:cxnSp>
-      <p:cxnSp>
-        <p:nvCxnSpPr>
-          <p:cNvPr id="162" name="Connector 161"/>
-          <p:cNvCxnSpPr/>
-          <p:nvPr/>
-        </p:nvCxnSpPr>
-        <p:spPr>
-          <a:xfrm>
-            <a:off x="5020056" y="5376672.0"/>
-            <a:ext cx="201168" cy="0.0"/>
-          </a:xfrm>
-          <a:prstGeom prst="line">
-            <a:avLst/>
-          </a:prstGeom>
-          <a:ln w="19050">
-            <a:solidFill>
-              <a:srgbClr val="127A8A"/>
-            </a:solidFill>
-            <a:tailEnd type="triangle" w="med" len="med"/>
-          </a:ln>
-        </p:spPr>
-        <p:style>
-          <a:lnRef idx="2">
-            <a:schemeClr val="accent1"/>
-          </a:lnRef>
-          <a:fillRef idx="0">
-            <a:schemeClr val="accent1"/>
-          </a:fillRef>
-          <a:effectRef idx="1">
-            <a:schemeClr val="accent1"/>
-          </a:effectRef>
-          <a:fontRef idx="minor">
-            <a:schemeClr val="tx1"/>
-          </a:fontRef>
-        </p:style>
-      </p:cxnSp>
-      <p:cxnSp>
-        <p:nvCxnSpPr>
-          <p:cNvPr id="163" name="Connector 162"/>
-          <p:cNvCxnSpPr/>
-          <p:nvPr/>
-        </p:nvCxnSpPr>
-        <p:spPr>
-          <a:xfrm>
-            <a:off x="5971032" y="5376672.0"/>
-            <a:ext cx="201168" cy="0.0"/>
-          </a:xfrm>
-          <a:prstGeom prst="line">
-            <a:avLst/>
-          </a:prstGeom>
-          <a:ln w="19050">
-            <a:solidFill>
-              <a:srgbClr val="127A8A"/>
-            </a:solidFill>
-            <a:tailEnd type="triangle" w="med" len="med"/>
-          </a:ln>
-        </p:spPr>
-        <p:style>
-          <a:lnRef idx="2">
-            <a:schemeClr val="accent1"/>
-          </a:lnRef>
-          <a:fillRef idx="0">
-            <a:schemeClr val="accent1"/>
-          </a:fillRef>
-          <a:effectRef idx="1">
-            <a:schemeClr val="accent1"/>
-          </a:effectRef>
-          <a:fontRef idx="minor">
-            <a:schemeClr val="tx1"/>
-          </a:fontRef>
-        </p:style>
-      </p:cxnSp>
-      <p:cxnSp>
-        <p:nvCxnSpPr>
-          <p:cNvPr id="164" name="Connector 163"/>
-          <p:cNvCxnSpPr/>
-          <p:nvPr/>
-        </p:nvCxnSpPr>
-        <p:spPr>
-          <a:xfrm>
-            <a:off x="6922008" y="5376672.0"/>
-            <a:ext cx="201168" cy="0.0"/>
-          </a:xfrm>
-          <a:prstGeom prst="line">
-            <a:avLst/>
-          </a:prstGeom>
-          <a:ln w="19050">
-            <a:solidFill>
-              <a:srgbClr val="127A8A"/>
-            </a:solidFill>
-            <a:tailEnd type="triangle" w="med" len="med"/>
-          </a:ln>
-        </p:spPr>
-        <p:style>
-          <a:lnRef idx="2">
-            <a:schemeClr val="accent1"/>
-          </a:lnRef>
-          <a:fillRef idx="0">
-            <a:schemeClr val="accent1"/>
-          </a:fillRef>
-          <a:effectRef idx="1">
-            <a:schemeClr val="accent1"/>
-          </a:effectRef>
-          <a:fontRef idx="minor">
-            <a:schemeClr val="tx1"/>
-          </a:fontRef>
-        </p:style>
-      </p:cxnSp>
-      <p:cxnSp>
-        <p:nvCxnSpPr>
-          <p:cNvPr id="165" name="Connector 164"/>
-          <p:cNvCxnSpPr/>
-          <p:nvPr/>
-        </p:nvCxnSpPr>
-        <p:spPr>
-          <a:xfrm>
-            <a:off x="7872984" y="5376672.0"/>
-            <a:ext cx="182880" cy="0.0"/>
-          </a:xfrm>
-          <a:prstGeom prst="line">
-            <a:avLst/>
-          </a:prstGeom>
-          <a:ln w="19050">
-            <a:solidFill>
-              <a:srgbClr val="C0392B"/>
-            </a:solidFill>
-          </a:ln>
-        </p:spPr>
-        <p:style>
-          <a:lnRef idx="2">
-            <a:schemeClr val="accent1"/>
-          </a:lnRef>
-          <a:fillRef idx="0">
-            <a:schemeClr val="accent1"/>
-          </a:fillRef>
-          <a:effectRef idx="1">
-            <a:schemeClr val="accent1"/>
-          </a:effectRef>
-          <a:fontRef idx="minor">
-            <a:schemeClr val="tx1"/>
-          </a:fontRef>
-        </p:style>
-      </p:cxnSp>
-      <p:cxnSp>
-        <p:nvCxnSpPr>
-          <p:cNvPr id="166" name="Connector 165"/>
-          <p:cNvCxnSpPr/>
-          <p:nvPr/>
-        </p:nvCxnSpPr>
-        <p:spPr>
-          <a:xfrm flipV="1">
-            <a:off x="8055864" y="4974336"/>
-            <a:ext cx="0" cy="402336.0"/>
-          </a:xfrm>
-          <a:prstGeom prst="line">
-            <a:avLst/>
-          </a:prstGeom>
-          <a:ln w="19050">
-            <a:solidFill>
-              <a:srgbClr val="C0392B"/>
-            </a:solidFill>
-          </a:ln>
-        </p:spPr>
-        <p:style>
-          <a:lnRef idx="2">
-            <a:schemeClr val="accent1"/>
-          </a:lnRef>
-          <a:fillRef idx="0">
-            <a:schemeClr val="accent1"/>
-          </a:fillRef>
-          <a:effectRef idx="1">
-            <a:schemeClr val="accent1"/>
-          </a:effectRef>
-          <a:fontRef idx="minor">
-            <a:schemeClr val="tx1"/>
-          </a:fontRef>
-        </p:style>
-      </p:cxnSp>
-      <p:cxnSp>
-        <p:nvCxnSpPr>
-          <p:cNvPr id="167" name="Connector 166"/>
-          <p:cNvCxnSpPr/>
-          <p:nvPr/>
-        </p:nvCxnSpPr>
-        <p:spPr>
-          <a:xfrm flipH="1">
-            <a:off x="3694176.0" y="4974336"/>
-            <a:ext cx="4361688.0" cy="0"/>
-          </a:xfrm>
-          <a:prstGeom prst="line">
-            <a:avLst/>
-          </a:prstGeom>
-          <a:ln w="19050">
-            <a:solidFill>
-              <a:srgbClr val="C0392B"/>
-            </a:solidFill>
-          </a:ln>
-        </p:spPr>
-        <p:style>
-          <a:lnRef idx="2">
-            <a:schemeClr val="accent1"/>
-          </a:lnRef>
-          <a:fillRef idx="0">
-            <a:schemeClr val="accent1"/>
-          </a:fillRef>
-          <a:effectRef idx="1">
-            <a:schemeClr val="accent1"/>
-          </a:effectRef>
-          <a:fontRef idx="minor">
-            <a:schemeClr val="tx1"/>
-          </a:fontRef>
-        </p:style>
-      </p:cxnSp>
-      <p:cxnSp>
-        <p:nvCxnSpPr>
-          <p:cNvPr id="168" name="Connector 167"/>
-          <p:cNvCxnSpPr/>
-          <p:nvPr/>
-        </p:nvCxnSpPr>
-        <p:spPr>
-          <a:xfrm>
-            <a:off x="3694176.0" y="4974336"/>
-            <a:ext cx="0.0" cy="164592"/>
-          </a:xfrm>
-          <a:prstGeom prst="line">
-            <a:avLst/>
-          </a:prstGeom>
-          <a:ln w="19050">
-            <a:solidFill>
-              <a:srgbClr val="C0392B"/>
-            </a:solidFill>
-            <a:tailEnd type="triangle" w="med" len="med"/>
-          </a:ln>
-        </p:spPr>
-        <p:style>
-          <a:lnRef idx="2">
-            <a:schemeClr val="accent1"/>
-          </a:lnRef>
-          <a:fillRef idx="0">
-            <a:schemeClr val="accent1"/>
-          </a:fillRef>
-          <a:effectRef idx="1">
-            <a:schemeClr val="accent1"/>
-          </a:effectRef>
-          <a:fontRef idx="minor">
-            <a:schemeClr val="tx1"/>
-          </a:fontRef>
-        </p:style>
-      </p:cxnSp>
-      <p:sp>
-        <p:nvSpPr>
-          <p:cNvPr id="169" name="TextBox 168"/>
-          <p:cNvSpPr txBox="1"/>
-          <p:nvPr/>
-        </p:nvSpPr>
-        <p:spPr>
-          <a:xfrm>
-            <a:off x="6272784" y="5650992"/>
-            <a:ext cx="548640" cy="228600"/>
-          </a:xfrm>
-          <a:prstGeom prst="rect">
-            <a:avLst/>
-          </a:prstGeom>
-          <a:noFill/>
-        </p:spPr>
-        <p:txBody>
-          <a:bodyPr wrap="square" lIns="45720" rIns="45720" tIns="18288" bIns="18288" anchor="t">
-            <a:spAutoFit/>
-          </a:bodyPr>
-          <a:lstStyle/>
-          <a:p>
-            <a:pPr algn="ctr"/>
-            <a:r>
-              <a:rPr sz="1100" b="1" i="0">
-                <a:solidFill>
-                  <a:srgbClr val="2E7D32"/>
-                </a:solidFill>
-                <a:latin typeface="Calibri"/>
-              </a:rPr>
-              <a:t>S</a:t>
-            </a:r>
-          </a:p>
-        </p:txBody>
-      </p:sp>
-      <p:sp>
-        <p:nvSpPr>
-          <p:cNvPr id="170" name="TextBox 169"/>
-          <p:cNvSpPr txBox="1"/>
-          <p:nvPr/>
-        </p:nvSpPr>
-        <p:spPr>
-          <a:xfrm>
-            <a:off x="5321808" y="5650992"/>
-            <a:ext cx="548640" cy="228600"/>
-          </a:xfrm>
-          <a:prstGeom prst="rect">
-            <a:avLst/>
-          </a:prstGeom>
-          <a:noFill/>
-        </p:spPr>
-        <p:txBody>
-          <a:bodyPr wrap="square" lIns="45720" rIns="45720" tIns="18288" bIns="18288" anchor="t">
-            <a:spAutoFit/>
-          </a:bodyPr>
-          <a:lstStyle/>
-          <a:p>
-            <a:pPr algn="ctr"/>
-            <a:r>
-              <a:rPr sz="1100" b="1" i="0">
-                <a:solidFill>
-                  <a:srgbClr val="E65C00"/>
-                </a:solidFill>
-                <a:latin typeface="Calibri"/>
-              </a:rPr>
-              <a:t>F</a:t>
-            </a:r>
-          </a:p>
-        </p:txBody>
-      </p:sp>
-      <p:sp>
-        <p:nvSpPr>
-          <p:cNvPr id="171" name="TextBox 170"/>
-          <p:cNvSpPr txBox="1"/>
-          <p:nvPr/>
-        </p:nvSpPr>
-        <p:spPr>
-          <a:xfrm>
-            <a:off x="502920" y="5888736"/>
-            <a:ext cx="1097280" cy="475488"/>
-          </a:xfrm>
-          <a:prstGeom prst="rect">
-            <a:avLst/>
-          </a:prstGeom>
-          <a:noFill/>
-        </p:spPr>
-        <p:txBody>
-          <a:bodyPr wrap="square" lIns="45720" rIns="45720" tIns="18288" bIns="18288" anchor="ctr">
-            <a:spAutoFit/>
-          </a:bodyPr>
-          <a:lstStyle/>
-          <a:p>
-            <a:pPr algn="r"/>
-            <a:r>
-              <a:rPr sz="1200" b="1" i="0">
-                <a:solidFill>
-                  <a:srgbClr val="0B2A4A"/>
-                </a:solidFill>
-                <a:latin typeface="Calibri"/>
-              </a:rPr>
-              <a:t>Step 6 ✓</a:t>
-            </a:r>
-          </a:p>
-        </p:txBody>
-      </p:sp>
-      <p:sp>
-        <p:nvSpPr>
-          <p:cNvPr id="172" name="Rounded Rectangle 171"/>
-          <p:cNvSpPr/>
-          <p:nvPr/>
-        </p:nvSpPr>
-        <p:spPr>
-          <a:xfrm>
-            <a:off x="1417320" y="5888736"/>
-            <a:ext cx="749808" cy="475488"/>
-          </a:xfrm>
-          <a:prstGeom prst="roundRect">
-            <a:avLst/>
-          </a:prstGeom>
-          <a:solidFill>
-            <a:srgbClr val="FFFFFF"/>
-          </a:solidFill>
-          <a:ln w="25400">
-            <a:solidFill>
-              <a:srgbClr val="0B2A4A"/>
-            </a:solidFill>
-          </a:ln>
-          <a:effectLst/>
-        </p:spPr>
-        <p:style>
-          <a:lnRef idx="1">
-            <a:schemeClr val="accent1"/>
-          </a:lnRef>
-          <a:fillRef idx="3">
-            <a:schemeClr val="accent1"/>
-          </a:fillRef>
-          <a:effectRef idx="2">
-            <a:schemeClr val="accent1"/>
-          </a:effectRef>
-          <a:fontRef idx="minor">
-            <a:schemeClr val="lt1"/>
-          </a:fontRef>
-        </p:style>
-        <p:txBody>
-          <a:bodyPr rtlCol="0" anchor="ctr"/>
-          <a:lstStyle/>
-          <a:p>
-            <a:pPr algn="ctr"/>
-          </a:p>
-        </p:txBody>
-      </p:sp>
-      <p:sp>
-        <p:nvSpPr>
-          <p:cNvPr id="173" name="TextBox 172"/>
-          <p:cNvSpPr txBox="1"/>
-          <p:nvPr/>
-        </p:nvSpPr>
-        <p:spPr>
-          <a:xfrm>
-            <a:off x="1417320" y="5888736"/>
-            <a:ext cx="749808" cy="475488"/>
-          </a:xfrm>
-          <a:prstGeom prst="rect">
-            <a:avLst/>
-          </a:prstGeom>
-          <a:noFill/>
-        </p:spPr>
-        <p:txBody>
-          <a:bodyPr wrap="square" lIns="45720" rIns="45720" tIns="18288" bIns="18288" anchor="ctr">
-            <a:spAutoFit/>
-          </a:bodyPr>
-          <a:lstStyle/>
-          <a:p>
-            <a:pPr algn="ctr"/>
-            <a:r>
-              <a:rPr sz="1300" b="1" i="0">
-                <a:solidFill>
-                  <a:srgbClr val="0B2A4A"/>
-                </a:solidFill>
-                <a:latin typeface="Calibri"/>
-              </a:rPr>
-              <a:t>1</a:t>
-            </a:r>
-          </a:p>
-        </p:txBody>
-      </p:sp>
-      <p:sp>
-        <p:nvSpPr>
-          <p:cNvPr id="174" name="Rounded Rectangle 173"/>
-          <p:cNvSpPr/>
-          <p:nvPr/>
-        </p:nvSpPr>
-        <p:spPr>
-          <a:xfrm>
-            <a:off x="2368296" y="5888736"/>
-            <a:ext cx="749808" cy="475488"/>
-          </a:xfrm>
-          <a:prstGeom prst="roundRect">
-            <a:avLst/>
-          </a:prstGeom>
-          <a:solidFill>
-            <a:srgbClr val="FFFFFF"/>
-          </a:solidFill>
-          <a:ln w="25400">
-            <a:solidFill>
-              <a:srgbClr val="0B2A4A"/>
-            </a:solidFill>
-          </a:ln>
-          <a:effectLst/>
-        </p:spPr>
-        <p:style>
-          <a:lnRef idx="1">
-            <a:schemeClr val="accent1"/>
-          </a:lnRef>
-          <a:fillRef idx="3">
-            <a:schemeClr val="accent1"/>
-          </a:fillRef>
-          <a:effectRef idx="2">
-            <a:schemeClr val="accent1"/>
-          </a:effectRef>
-          <a:fontRef idx="minor">
-            <a:schemeClr val="lt1"/>
-          </a:fontRef>
-        </p:style>
-        <p:txBody>
-          <a:bodyPr rtlCol="0" anchor="ctr"/>
-          <a:lstStyle/>
-          <a:p>
-            <a:pPr algn="ctr"/>
-          </a:p>
-        </p:txBody>
-      </p:sp>
-      <p:sp>
-        <p:nvSpPr>
-          <p:cNvPr id="175" name="TextBox 174"/>
-          <p:cNvSpPr txBox="1"/>
-          <p:nvPr/>
-        </p:nvSpPr>
-        <p:spPr>
-          <a:xfrm>
-            <a:off x="2368296" y="5888736"/>
-            <a:ext cx="749808" cy="475488"/>
-          </a:xfrm>
-          <a:prstGeom prst="rect">
-            <a:avLst/>
-          </a:prstGeom>
-          <a:noFill/>
-        </p:spPr>
-        <p:txBody>
-          <a:bodyPr wrap="square" lIns="45720" rIns="45720" tIns="18288" bIns="18288" anchor="ctr">
-            <a:spAutoFit/>
-          </a:bodyPr>
-          <a:lstStyle/>
-          <a:p>
-            <a:pPr algn="ctr"/>
-            <a:r>
-              <a:rPr sz="1300" b="1" i="0">
-                <a:solidFill>
-                  <a:srgbClr val="0B2A4A"/>
-                </a:solidFill>
-                <a:latin typeface="Calibri"/>
-              </a:rPr>
-              <a:t>2</a:t>
-            </a:r>
-          </a:p>
-        </p:txBody>
-      </p:sp>
-      <p:sp>
-        <p:nvSpPr>
-          <p:cNvPr id="176" name="Rounded Rectangle 175"/>
-          <p:cNvSpPr/>
-          <p:nvPr/>
-        </p:nvSpPr>
-        <p:spPr>
-          <a:xfrm>
-            <a:off x="3319272" y="5888736"/>
-            <a:ext cx="749808" cy="475488"/>
-          </a:xfrm>
-          <a:prstGeom prst="roundRect">
-            <a:avLst/>
-          </a:prstGeom>
-          <a:solidFill>
-            <a:srgbClr val="FFFFFF"/>
-          </a:solidFill>
-          <a:ln w="25400">
-            <a:solidFill>
-              <a:srgbClr val="0B2A4A"/>
-            </a:solidFill>
-          </a:ln>
-          <a:effectLst/>
-        </p:spPr>
-        <p:style>
-          <a:lnRef idx="1">
-            <a:schemeClr val="accent1"/>
-          </a:lnRef>
-          <a:fillRef idx="3">
-            <a:schemeClr val="accent1"/>
-          </a:fillRef>
-          <a:effectRef idx="2">
-            <a:schemeClr val="accent1"/>
-          </a:effectRef>
-          <a:fontRef idx="minor">
-            <a:schemeClr val="lt1"/>
-          </a:fontRef>
-        </p:style>
-        <p:txBody>
-          <a:bodyPr rtlCol="0" anchor="ctr"/>
-          <a:lstStyle/>
-          <a:p>
-            <a:pPr algn="ctr"/>
-          </a:p>
-        </p:txBody>
-      </p:sp>
-      <p:sp>
-        <p:nvSpPr>
-          <p:cNvPr id="177" name="TextBox 176"/>
-          <p:cNvSpPr txBox="1"/>
-          <p:nvPr/>
-        </p:nvSpPr>
-        <p:spPr>
-          <a:xfrm>
-            <a:off x="3319272" y="5888736"/>
-            <a:ext cx="749808" cy="475488"/>
-          </a:xfrm>
-          <a:prstGeom prst="rect">
-            <a:avLst/>
-          </a:prstGeom>
-          <a:noFill/>
-        </p:spPr>
-        <p:txBody>
-          <a:bodyPr wrap="square" lIns="45720" rIns="45720" tIns="18288" bIns="18288" anchor="ctr">
-            <a:spAutoFit/>
-          </a:bodyPr>
-          <a:lstStyle/>
-          <a:p>
-            <a:pPr algn="ctr"/>
-            <a:r>
-              <a:rPr sz="1300" b="1" i="0">
-                <a:solidFill>
-                  <a:srgbClr val="0B2A4A"/>
-                </a:solidFill>
-                <a:latin typeface="Calibri"/>
-              </a:rPr>
-              <a:t>3</a:t>
-            </a:r>
-          </a:p>
-        </p:txBody>
-      </p:sp>
-      <p:sp>
-        <p:nvSpPr>
-          <p:cNvPr id="178" name="Rounded Rectangle 177"/>
-          <p:cNvSpPr/>
-          <p:nvPr/>
-        </p:nvSpPr>
-        <p:spPr>
-          <a:xfrm>
-            <a:off x="4270248" y="5888736"/>
-            <a:ext cx="749808" cy="475488"/>
-          </a:xfrm>
-          <a:prstGeom prst="roundRect">
-            <a:avLst/>
-          </a:prstGeom>
-          <a:solidFill>
-            <a:srgbClr val="FFFFFF"/>
-          </a:solidFill>
-          <a:ln w="25400">
-            <a:solidFill>
-              <a:srgbClr val="0B2A4A"/>
-            </a:solidFill>
-          </a:ln>
-          <a:effectLst/>
-        </p:spPr>
-        <p:style>
-          <a:lnRef idx="1">
-            <a:schemeClr val="accent1"/>
-          </a:lnRef>
-          <a:fillRef idx="3">
-            <a:schemeClr val="accent1"/>
-          </a:fillRef>
-          <a:effectRef idx="2">
-            <a:schemeClr val="accent1"/>
-          </a:effectRef>
-          <a:fontRef idx="minor">
-            <a:schemeClr val="lt1"/>
-          </a:fontRef>
-        </p:style>
-        <p:txBody>
-          <a:bodyPr rtlCol="0" anchor="ctr"/>
-          <a:lstStyle/>
-          <a:p>
-            <a:pPr algn="ctr"/>
-          </a:p>
-        </p:txBody>
-      </p:sp>
-      <p:sp>
-        <p:nvSpPr>
-          <p:cNvPr id="179" name="TextBox 178"/>
-          <p:cNvSpPr txBox="1"/>
-          <p:nvPr/>
-        </p:nvSpPr>
-        <p:spPr>
-          <a:xfrm>
-            <a:off x="4270248" y="5888736"/>
-            <a:ext cx="749808" cy="475488"/>
-          </a:xfrm>
-          <a:prstGeom prst="rect">
-            <a:avLst/>
-          </a:prstGeom>
-          <a:noFill/>
-        </p:spPr>
-        <p:txBody>
-          <a:bodyPr wrap="square" lIns="45720" rIns="45720" tIns="18288" bIns="18288" anchor="ctr">
-            <a:spAutoFit/>
-          </a:bodyPr>
-          <a:lstStyle/>
-          <a:p>
-            <a:pPr algn="ctr"/>
-            <a:r>
-              <a:rPr sz="1300" b="1" i="0">
-                <a:solidFill>
-                  <a:srgbClr val="0B2A4A"/>
-                </a:solidFill>
-                <a:latin typeface="Calibri"/>
-              </a:rPr>
-              <a:t>4</a:t>
-            </a:r>
-          </a:p>
-        </p:txBody>
-      </p:sp>
-      <p:sp>
-        <p:nvSpPr>
-          <p:cNvPr id="180" name="Rounded Rectangle 179"/>
-          <p:cNvSpPr/>
-          <p:nvPr/>
-        </p:nvSpPr>
-        <p:spPr>
-          <a:xfrm>
-            <a:off x="5221224" y="5888736"/>
-            <a:ext cx="749808" cy="475488"/>
-          </a:xfrm>
-          <a:prstGeom prst="roundRect">
-            <a:avLst/>
-          </a:prstGeom>
-          <a:solidFill>
-            <a:srgbClr val="FFFFFF"/>
-          </a:solidFill>
-          <a:ln w="25400">
-            <a:solidFill>
-              <a:srgbClr val="0B2A4A"/>
-            </a:solidFill>
-          </a:ln>
-          <a:effectLst/>
-        </p:spPr>
-        <p:style>
-          <a:lnRef idx="1">
-            <a:schemeClr val="accent1"/>
-          </a:lnRef>
-          <a:fillRef idx="3">
-            <a:schemeClr val="accent1"/>
-          </a:fillRef>
-          <a:effectRef idx="2">
-            <a:schemeClr val="accent1"/>
-          </a:effectRef>
-          <a:fontRef idx="minor">
-            <a:schemeClr val="lt1"/>
-          </a:fontRef>
-        </p:style>
-        <p:txBody>
-          <a:bodyPr rtlCol="0" anchor="ctr"/>
-          <a:lstStyle/>
-          <a:p>
-            <a:pPr algn="ctr"/>
-          </a:p>
-        </p:txBody>
-      </p:sp>
-      <p:sp>
-        <p:nvSpPr>
-          <p:cNvPr id="181" name="TextBox 180"/>
-          <p:cNvSpPr txBox="1"/>
-          <p:nvPr/>
-        </p:nvSpPr>
-        <p:spPr>
-          <a:xfrm>
-            <a:off x="5221224" y="5888736"/>
-            <a:ext cx="749808" cy="475488"/>
-          </a:xfrm>
-          <a:prstGeom prst="rect">
-            <a:avLst/>
-          </a:prstGeom>
-          <a:noFill/>
-        </p:spPr>
-        <p:txBody>
-          <a:bodyPr wrap="square" lIns="45720" rIns="45720" tIns="18288" bIns="18288" anchor="ctr">
-            <a:spAutoFit/>
-          </a:bodyPr>
-          <a:lstStyle/>
-          <a:p>
-            <a:pPr algn="ctr"/>
-            <a:r>
-              <a:rPr sz="1300" b="1" i="0">
-                <a:solidFill>
-                  <a:srgbClr val="0B2A4A"/>
-                </a:solidFill>
-                <a:latin typeface="Calibri"/>
-              </a:rPr>
-              <a:t>5</a:t>
-            </a:r>
-          </a:p>
-        </p:txBody>
-      </p:sp>
-      <p:sp>
-        <p:nvSpPr>
-          <p:cNvPr id="182" name="Rounded Rectangle 181"/>
-          <p:cNvSpPr/>
-          <p:nvPr/>
-        </p:nvSpPr>
-        <p:spPr>
-          <a:xfrm>
-            <a:off x="6172200" y="5888736"/>
-            <a:ext cx="749808" cy="475488"/>
-          </a:xfrm>
-          <a:prstGeom prst="roundRect">
-            <a:avLst/>
-          </a:prstGeom>
-          <a:solidFill>
-            <a:srgbClr val="FFFFFF"/>
-          </a:solidFill>
-          <a:ln w="25400">
-            <a:solidFill>
-              <a:srgbClr val="0B2A4A"/>
-            </a:solidFill>
-          </a:ln>
-          <a:effectLst/>
-        </p:spPr>
-        <p:style>
-          <a:lnRef idx="1">
-            <a:schemeClr val="accent1"/>
-          </a:lnRef>
-          <a:fillRef idx="3">
-            <a:schemeClr val="accent1"/>
-          </a:fillRef>
-          <a:effectRef idx="2">
-            <a:schemeClr val="accent1"/>
-          </a:effectRef>
-          <a:fontRef idx="minor">
-            <a:schemeClr val="lt1"/>
-          </a:fontRef>
-        </p:style>
-        <p:txBody>
-          <a:bodyPr rtlCol="0" anchor="ctr"/>
-          <a:lstStyle/>
-          <a:p>
-            <a:pPr algn="ctr"/>
-          </a:p>
-        </p:txBody>
-      </p:sp>
-      <p:sp>
-        <p:nvSpPr>
-          <p:cNvPr id="183" name="TextBox 182"/>
-          <p:cNvSpPr txBox="1"/>
-          <p:nvPr/>
-        </p:nvSpPr>
-        <p:spPr>
-          <a:xfrm>
-            <a:off x="6172200" y="5888736"/>
-            <a:ext cx="749808" cy="475488"/>
-          </a:xfrm>
-          <a:prstGeom prst="rect">
-            <a:avLst/>
-          </a:prstGeom>
-          <a:noFill/>
-        </p:spPr>
-        <p:txBody>
-          <a:bodyPr wrap="square" lIns="45720" rIns="45720" tIns="18288" bIns="18288" anchor="ctr">
-            <a:spAutoFit/>
-          </a:bodyPr>
-          <a:lstStyle/>
-          <a:p>
-            <a:pPr algn="ctr"/>
-            <a:r>
-              <a:rPr sz="1300" b="1" i="0">
-                <a:solidFill>
-                  <a:srgbClr val="0B2A4A"/>
-                </a:solidFill>
-                <a:latin typeface="Calibri"/>
-              </a:rPr>
-              <a:t>6</a:t>
-            </a:r>
-          </a:p>
-        </p:txBody>
-      </p:sp>
-      <p:sp>
-        <p:nvSpPr>
-          <p:cNvPr id="184" name="Rounded Rectangle 183"/>
-          <p:cNvSpPr/>
-          <p:nvPr/>
-        </p:nvSpPr>
-        <p:spPr>
-          <a:xfrm>
-            <a:off x="7123176" y="5888736"/>
-            <a:ext cx="749808" cy="475488"/>
+            <a:off x="10564063" y="2487168"/>
+            <a:ext cx="384048" cy="292608"/>
           </a:xfrm>
           <a:prstGeom prst="roundRect">
             <a:avLst/>
@@ -26161,14 +26072,14 @@
       </p:sp>
       <p:sp>
         <p:nvSpPr>
-          <p:cNvPr id="185" name="TextBox 184"/>
+          <p:cNvPr id="180" name="TextBox 179"/>
           <p:cNvSpPr txBox="1"/>
           <p:nvPr/>
         </p:nvSpPr>
         <p:spPr>
           <a:xfrm>
-            <a:off x="7123176" y="5888736"/>
-            <a:ext cx="749808" cy="475488"/>
+            <a:off x="10564063" y="2487168"/>
+            <a:ext cx="384048" cy="292608"/>
           </a:xfrm>
           <a:prstGeom prst="rect">
             <a:avLst/>
@@ -26183,833 +26094,12 @@
           <a:p>
             <a:pPr algn="ctr"/>
             <a:r>
-              <a:rPr sz="1300" b="1" i="0">
+              <a:rPr sz="1100" b="1" i="0">
                 <a:solidFill>
                   <a:srgbClr val="FFFFFF"/>
                 </a:solidFill>
                 <a:latin typeface="Calibri"/>
               </a:rPr>
-              <a:t>7</a:t>
-            </a:r>
-          </a:p>
-        </p:txBody>
-      </p:sp>
-      <p:cxnSp>
-        <p:nvCxnSpPr>
-          <p:cNvPr id="186" name="Connector 185"/>
-          <p:cNvCxnSpPr/>
-          <p:nvPr/>
-        </p:nvCxnSpPr>
-        <p:spPr>
-          <a:xfrm>
-            <a:off x="2167128" y="6126480.0"/>
-            <a:ext cx="201168" cy="0.0"/>
-          </a:xfrm>
-          <a:prstGeom prst="line">
-            <a:avLst/>
-          </a:prstGeom>
-          <a:ln w="19050">
-            <a:solidFill>
-              <a:srgbClr val="127A8A"/>
-            </a:solidFill>
-            <a:tailEnd type="triangle" w="med" len="med"/>
-          </a:ln>
-        </p:spPr>
-        <p:style>
-          <a:lnRef idx="2">
-            <a:schemeClr val="accent1"/>
-          </a:lnRef>
-          <a:fillRef idx="0">
-            <a:schemeClr val="accent1"/>
-          </a:fillRef>
-          <a:effectRef idx="1">
-            <a:schemeClr val="accent1"/>
-          </a:effectRef>
-          <a:fontRef idx="minor">
-            <a:schemeClr val="tx1"/>
-          </a:fontRef>
-        </p:style>
-      </p:cxnSp>
-      <p:cxnSp>
-        <p:nvCxnSpPr>
-          <p:cNvPr id="187" name="Connector 186"/>
-          <p:cNvCxnSpPr/>
-          <p:nvPr/>
-        </p:nvCxnSpPr>
-        <p:spPr>
-          <a:xfrm>
-            <a:off x="3118104" y="6126480.0"/>
-            <a:ext cx="201168" cy="0.0"/>
-          </a:xfrm>
-          <a:prstGeom prst="line">
-            <a:avLst/>
-          </a:prstGeom>
-          <a:ln w="19050">
-            <a:solidFill>
-              <a:srgbClr val="127A8A"/>
-            </a:solidFill>
-            <a:tailEnd type="triangle" w="med" len="med"/>
-          </a:ln>
-        </p:spPr>
-        <p:style>
-          <a:lnRef idx="2">
-            <a:schemeClr val="accent1"/>
-          </a:lnRef>
-          <a:fillRef idx="0">
-            <a:schemeClr val="accent1"/>
-          </a:fillRef>
-          <a:effectRef idx="1">
-            <a:schemeClr val="accent1"/>
-          </a:effectRef>
-          <a:fontRef idx="minor">
-            <a:schemeClr val="tx1"/>
-          </a:fontRef>
-        </p:style>
-      </p:cxnSp>
-      <p:cxnSp>
-        <p:nvCxnSpPr>
-          <p:cNvPr id="188" name="Connector 187"/>
-          <p:cNvCxnSpPr/>
-          <p:nvPr/>
-        </p:nvCxnSpPr>
-        <p:spPr>
-          <a:xfrm>
-            <a:off x="4069080" y="6126480.0"/>
-            <a:ext cx="201168" cy="0.0"/>
-          </a:xfrm>
-          <a:prstGeom prst="line">
-            <a:avLst/>
-          </a:prstGeom>
-          <a:ln w="19050">
-            <a:solidFill>
-              <a:srgbClr val="127A8A"/>
-            </a:solidFill>
-            <a:tailEnd type="triangle" w="med" len="med"/>
-          </a:ln>
-        </p:spPr>
-        <p:style>
-          <a:lnRef idx="2">
-            <a:schemeClr val="accent1"/>
-          </a:lnRef>
-          <a:fillRef idx="0">
-            <a:schemeClr val="accent1"/>
-          </a:fillRef>
-          <a:effectRef idx="1">
-            <a:schemeClr val="accent1"/>
-          </a:effectRef>
-          <a:fontRef idx="minor">
-            <a:schemeClr val="tx1"/>
-          </a:fontRef>
-        </p:style>
-      </p:cxnSp>
-      <p:cxnSp>
-        <p:nvCxnSpPr>
-          <p:cNvPr id="189" name="Connector 188"/>
-          <p:cNvCxnSpPr/>
-          <p:nvPr/>
-        </p:nvCxnSpPr>
-        <p:spPr>
-          <a:xfrm>
-            <a:off x="5020056" y="6126480.0"/>
-            <a:ext cx="201168" cy="0.0"/>
-          </a:xfrm>
-          <a:prstGeom prst="line">
-            <a:avLst/>
-          </a:prstGeom>
-          <a:ln w="19050">
-            <a:solidFill>
-              <a:srgbClr val="127A8A"/>
-            </a:solidFill>
-            <a:tailEnd type="triangle" w="med" len="med"/>
-          </a:ln>
-        </p:spPr>
-        <p:style>
-          <a:lnRef idx="2">
-            <a:schemeClr val="accent1"/>
-          </a:lnRef>
-          <a:fillRef idx="0">
-            <a:schemeClr val="accent1"/>
-          </a:fillRef>
-          <a:effectRef idx="1">
-            <a:schemeClr val="accent1"/>
-          </a:effectRef>
-          <a:fontRef idx="minor">
-            <a:schemeClr val="tx1"/>
-          </a:fontRef>
-        </p:style>
-      </p:cxnSp>
-      <p:cxnSp>
-        <p:nvCxnSpPr>
-          <p:cNvPr id="190" name="Connector 189"/>
-          <p:cNvCxnSpPr/>
-          <p:nvPr/>
-        </p:nvCxnSpPr>
-        <p:spPr>
-          <a:xfrm>
-            <a:off x="5971032" y="6126480.0"/>
-            <a:ext cx="201168" cy="0.0"/>
-          </a:xfrm>
-          <a:prstGeom prst="line">
-            <a:avLst/>
-          </a:prstGeom>
-          <a:ln w="19050">
-            <a:solidFill>
-              <a:srgbClr val="127A8A"/>
-            </a:solidFill>
-            <a:tailEnd type="triangle" w="med" len="med"/>
-          </a:ln>
-        </p:spPr>
-        <p:style>
-          <a:lnRef idx="2">
-            <a:schemeClr val="accent1"/>
-          </a:lnRef>
-          <a:fillRef idx="0">
-            <a:schemeClr val="accent1"/>
-          </a:fillRef>
-          <a:effectRef idx="1">
-            <a:schemeClr val="accent1"/>
-          </a:effectRef>
-          <a:fontRef idx="minor">
-            <a:schemeClr val="tx1"/>
-          </a:fontRef>
-        </p:style>
-      </p:cxnSp>
-      <p:cxnSp>
-        <p:nvCxnSpPr>
-          <p:cNvPr id="191" name="Connector 190"/>
-          <p:cNvCxnSpPr/>
-          <p:nvPr/>
-        </p:nvCxnSpPr>
-        <p:spPr>
-          <a:xfrm>
-            <a:off x="6922008" y="6126480.0"/>
-            <a:ext cx="201168" cy="0.0"/>
-          </a:xfrm>
-          <a:prstGeom prst="line">
-            <a:avLst/>
-          </a:prstGeom>
-          <a:ln w="19050">
-            <a:solidFill>
-              <a:srgbClr val="127A8A"/>
-            </a:solidFill>
-            <a:tailEnd type="triangle" w="med" len="med"/>
-          </a:ln>
-        </p:spPr>
-        <p:style>
-          <a:lnRef idx="2">
-            <a:schemeClr val="accent1"/>
-          </a:lnRef>
-          <a:fillRef idx="0">
-            <a:schemeClr val="accent1"/>
-          </a:fillRef>
-          <a:effectRef idx="1">
-            <a:schemeClr val="accent1"/>
-          </a:effectRef>
-          <a:fontRef idx="minor">
-            <a:schemeClr val="tx1"/>
-          </a:fontRef>
-        </p:style>
-      </p:cxnSp>
-      <p:cxnSp>
-        <p:nvCxnSpPr>
-          <p:cNvPr id="192" name="Connector 191"/>
-          <p:cNvCxnSpPr/>
-          <p:nvPr/>
-        </p:nvCxnSpPr>
-        <p:spPr>
-          <a:xfrm>
-            <a:off x="7872984" y="6126480.0"/>
-            <a:ext cx="182880" cy="0.0"/>
-          </a:xfrm>
-          <a:prstGeom prst="line">
-            <a:avLst/>
-          </a:prstGeom>
-          <a:ln w="19050">
-            <a:solidFill>
-              <a:srgbClr val="C0392B"/>
-            </a:solidFill>
-          </a:ln>
-        </p:spPr>
-        <p:style>
-          <a:lnRef idx="2">
-            <a:schemeClr val="accent1"/>
-          </a:lnRef>
-          <a:fillRef idx="0">
-            <a:schemeClr val="accent1"/>
-          </a:fillRef>
-          <a:effectRef idx="1">
-            <a:schemeClr val="accent1"/>
-          </a:effectRef>
-          <a:fontRef idx="minor">
-            <a:schemeClr val="tx1"/>
-          </a:fontRef>
-        </p:style>
-      </p:cxnSp>
-      <p:cxnSp>
-        <p:nvCxnSpPr>
-          <p:cNvPr id="193" name="Connector 192"/>
-          <p:cNvCxnSpPr/>
-          <p:nvPr/>
-        </p:nvCxnSpPr>
-        <p:spPr>
-          <a:xfrm flipV="1">
-            <a:off x="8055864" y="5724144"/>
-            <a:ext cx="0" cy="402336.0"/>
-          </a:xfrm>
-          <a:prstGeom prst="line">
-            <a:avLst/>
-          </a:prstGeom>
-          <a:ln w="19050">
-            <a:solidFill>
-              <a:srgbClr val="C0392B"/>
-            </a:solidFill>
-          </a:ln>
-        </p:spPr>
-        <p:style>
-          <a:lnRef idx="2">
-            <a:schemeClr val="accent1"/>
-          </a:lnRef>
-          <a:fillRef idx="0">
-            <a:schemeClr val="accent1"/>
-          </a:fillRef>
-          <a:effectRef idx="1">
-            <a:schemeClr val="accent1"/>
-          </a:effectRef>
-          <a:fontRef idx="minor">
-            <a:schemeClr val="tx1"/>
-          </a:fontRef>
-        </p:style>
-      </p:cxnSp>
-      <p:cxnSp>
-        <p:nvCxnSpPr>
-          <p:cNvPr id="194" name="Connector 193"/>
-          <p:cNvCxnSpPr/>
-          <p:nvPr/>
-        </p:nvCxnSpPr>
-        <p:spPr>
-          <a:xfrm flipH="1">
-            <a:off x="3694176.0" y="5724144"/>
-            <a:ext cx="4361688.0" cy="0"/>
-          </a:xfrm>
-          <a:prstGeom prst="line">
-            <a:avLst/>
-          </a:prstGeom>
-          <a:ln w="19050">
-            <a:solidFill>
-              <a:srgbClr val="C0392B"/>
-            </a:solidFill>
-          </a:ln>
-        </p:spPr>
-        <p:style>
-          <a:lnRef idx="2">
-            <a:schemeClr val="accent1"/>
-          </a:lnRef>
-          <a:fillRef idx="0">
-            <a:schemeClr val="accent1"/>
-          </a:fillRef>
-          <a:effectRef idx="1">
-            <a:schemeClr val="accent1"/>
-          </a:effectRef>
-          <a:fontRef idx="minor">
-            <a:schemeClr val="tx1"/>
-          </a:fontRef>
-        </p:style>
-      </p:cxnSp>
-      <p:cxnSp>
-        <p:nvCxnSpPr>
-          <p:cNvPr id="195" name="Connector 194"/>
-          <p:cNvCxnSpPr/>
-          <p:nvPr/>
-        </p:nvCxnSpPr>
-        <p:spPr>
-          <a:xfrm>
-            <a:off x="3694176.0" y="5724144"/>
-            <a:ext cx="0.0" cy="164592"/>
-          </a:xfrm>
-          <a:prstGeom prst="line">
-            <a:avLst/>
-          </a:prstGeom>
-          <a:ln w="19050">
-            <a:solidFill>
-              <a:srgbClr val="C0392B"/>
-            </a:solidFill>
-            <a:tailEnd type="triangle" w="med" len="med"/>
-          </a:ln>
-        </p:spPr>
-        <p:style>
-          <a:lnRef idx="2">
-            <a:schemeClr val="accent1"/>
-          </a:lnRef>
-          <a:fillRef idx="0">
-            <a:schemeClr val="accent1"/>
-          </a:fillRef>
-          <a:effectRef idx="1">
-            <a:schemeClr val="accent1"/>
-          </a:effectRef>
-          <a:fontRef idx="minor">
-            <a:schemeClr val="tx1"/>
-          </a:fontRef>
-        </p:style>
-      </p:cxnSp>
-      <p:sp>
-        <p:nvSpPr>
-          <p:cNvPr id="196" name="TextBox 195"/>
-          <p:cNvSpPr txBox="1"/>
-          <p:nvPr/>
-        </p:nvSpPr>
-        <p:spPr>
-          <a:xfrm>
-            <a:off x="7223760" y="6400800"/>
-            <a:ext cx="548640" cy="228600"/>
-          </a:xfrm>
-          <a:prstGeom prst="rect">
-            <a:avLst/>
-          </a:prstGeom>
-          <a:noFill/>
-        </p:spPr>
-        <p:txBody>
-          <a:bodyPr wrap="square" lIns="45720" rIns="45720" tIns="18288" bIns="18288" anchor="t">
-            <a:spAutoFit/>
-          </a:bodyPr>
-          <a:lstStyle/>
-          <a:p>
-            <a:pPr algn="ctr"/>
-            <a:r>
-              <a:rPr sz="1100" b="1" i="0">
-                <a:solidFill>
-                  <a:srgbClr val="C0392B"/>
-                </a:solidFill>
-                <a:latin typeface="Calibri"/>
-              </a:rPr>
-              <a:t>S</a:t>
-            </a:r>
-          </a:p>
-        </p:txBody>
-      </p:sp>
-      <p:sp>
-        <p:nvSpPr>
-          <p:cNvPr id="197" name="TextBox 196"/>
-          <p:cNvSpPr txBox="1"/>
-          <p:nvPr/>
-        </p:nvSpPr>
-        <p:spPr>
-          <a:xfrm>
-            <a:off x="7223760" y="6400800"/>
-            <a:ext cx="548640" cy="228600"/>
-          </a:xfrm>
-          <a:prstGeom prst="rect">
-            <a:avLst/>
-          </a:prstGeom>
-          <a:noFill/>
-        </p:spPr>
-        <p:txBody>
-          <a:bodyPr wrap="square" lIns="45720" rIns="45720" tIns="18288" bIns="18288" anchor="t">
-            <a:spAutoFit/>
-          </a:bodyPr>
-          <a:lstStyle/>
-          <a:p>
-            <a:pPr algn="ctr"/>
-            <a:r>
-              <a:rPr sz="1100" b="1" i="0">
-                <a:solidFill>
-                  <a:srgbClr val="C0392B"/>
-                </a:solidFill>
-                <a:latin typeface="Calibri"/>
-              </a:rPr>
-              <a:t>S=F</a:t>
-            </a:r>
-          </a:p>
-        </p:txBody>
-      </p:sp>
-      <p:sp>
-        <p:nvSpPr>
-          <p:cNvPr id="198" name="Rounded Rectangle 197"/>
-          <p:cNvSpPr/>
-          <p:nvPr/>
-        </p:nvSpPr>
-        <p:spPr>
-          <a:xfrm>
-            <a:off x="10500055" y="1389888"/>
-            <a:ext cx="1325880" cy="1463040"/>
-          </a:xfrm>
-          <a:prstGeom prst="roundRect">
-            <a:avLst/>
-          </a:prstGeom>
-          <a:solidFill>
-            <a:srgbClr val="F2F4F7"/>
-          </a:solidFill>
-          <a:ln w="25400">
-            <a:solidFill>
-              <a:srgbClr val="333D4A"/>
-            </a:solidFill>
-          </a:ln>
-          <a:effectLst/>
-        </p:spPr>
-        <p:style>
-          <a:lnRef idx="1">
-            <a:schemeClr val="accent1"/>
-          </a:lnRef>
-          <a:fillRef idx="3">
-            <a:schemeClr val="accent1"/>
-          </a:fillRef>
-          <a:effectRef idx="2">
-            <a:schemeClr val="accent1"/>
-          </a:effectRef>
-          <a:fontRef idx="minor">
-            <a:schemeClr val="lt1"/>
-          </a:fontRef>
-        </p:style>
-        <p:txBody>
-          <a:bodyPr rtlCol="0" anchor="ctr"/>
-          <a:lstStyle/>
-          <a:p>
-            <a:pPr algn="ctr"/>
-          </a:p>
-        </p:txBody>
-      </p:sp>
-      <p:sp>
-        <p:nvSpPr>
-          <p:cNvPr id="199" name="TextBox 198"/>
-          <p:cNvSpPr txBox="1"/>
-          <p:nvPr/>
-        </p:nvSpPr>
-        <p:spPr>
-          <a:xfrm>
-            <a:off x="10545775" y="1444752"/>
-            <a:ext cx="1234440" cy="320040"/>
-          </a:xfrm>
-          <a:prstGeom prst="rect">
-            <a:avLst/>
-          </a:prstGeom>
-          <a:noFill/>
-        </p:spPr>
-        <p:txBody>
-          <a:bodyPr wrap="square" lIns="45720" rIns="45720" tIns="18288" bIns="18288" anchor="t">
-            <a:spAutoFit/>
-          </a:bodyPr>
-          <a:lstStyle/>
-          <a:p>
-            <a:pPr algn="l"/>
-            <a:r>
-              <a:rPr sz="1200" b="1" i="0">
-                <a:solidFill>
-                  <a:srgbClr val="0B2A4A"/>
-                </a:solidFill>
-                <a:latin typeface="Calibri"/>
-              </a:rPr>
-              <a:t>Legend</a:t>
-            </a:r>
-          </a:p>
-        </p:txBody>
-      </p:sp>
-      <p:sp>
-        <p:nvSpPr>
-          <p:cNvPr id="200" name="Rounded Rectangle 199"/>
-          <p:cNvSpPr/>
-          <p:nvPr/>
-        </p:nvSpPr>
-        <p:spPr>
-          <a:xfrm>
-            <a:off x="10564063" y="1810512"/>
-            <a:ext cx="384048" cy="292608"/>
-          </a:xfrm>
-          <a:prstGeom prst="roundRect">
-            <a:avLst/>
-          </a:prstGeom>
-          <a:solidFill>
-            <a:srgbClr val="D0F0D0"/>
-          </a:solidFill>
-          <a:ln w="25400">
-            <a:solidFill>
-              <a:srgbClr val="0B2A4A"/>
-            </a:solidFill>
-          </a:ln>
-          <a:effectLst/>
-        </p:spPr>
-        <p:style>
-          <a:lnRef idx="1">
-            <a:schemeClr val="accent1"/>
-          </a:lnRef>
-          <a:fillRef idx="3">
-            <a:schemeClr val="accent1"/>
-          </a:fillRef>
-          <a:effectRef idx="2">
-            <a:schemeClr val="accent1"/>
-          </a:effectRef>
-          <a:fontRef idx="minor">
-            <a:schemeClr val="lt1"/>
-          </a:fontRef>
-        </p:style>
-        <p:txBody>
-          <a:bodyPr rtlCol="0" anchor="ctr"/>
-          <a:lstStyle/>
-          <a:p>
-            <a:pPr algn="ctr"/>
-          </a:p>
-        </p:txBody>
-      </p:sp>
-      <p:sp>
-        <p:nvSpPr>
-          <p:cNvPr id="201" name="TextBox 200"/>
-          <p:cNvSpPr txBox="1"/>
-          <p:nvPr/>
-        </p:nvSpPr>
-        <p:spPr>
-          <a:xfrm>
-            <a:off x="10564063" y="1810512"/>
-            <a:ext cx="384048" cy="292608"/>
-          </a:xfrm>
-          <a:prstGeom prst="rect">
-            <a:avLst/>
-          </a:prstGeom>
-          <a:noFill/>
-        </p:spPr>
-        <p:txBody>
-          <a:bodyPr wrap="square" lIns="45720" rIns="45720" tIns="18288" bIns="18288" anchor="ctr">
-            <a:spAutoFit/>
-          </a:bodyPr>
-          <a:lstStyle/>
-          <a:p>
-            <a:pPr algn="ctr"/>
-            <a:r>
-              <a:rPr sz="1100" b="1" i="0">
-                <a:solidFill>
-                  <a:srgbClr val="FFFFFF"/>
-                </a:solidFill>
-                <a:latin typeface="Calibri"/>
-              </a:rPr>
-              <a:t>S</a:t>
-            </a:r>
-          </a:p>
-        </p:txBody>
-      </p:sp>
-      <p:sp>
-        <p:nvSpPr>
-          <p:cNvPr id="202" name="TextBox 201"/>
-          <p:cNvSpPr txBox="1"/>
-          <p:nvPr/>
-        </p:nvSpPr>
-        <p:spPr>
-          <a:xfrm>
-            <a:off x="11002975" y="1810512"/>
-            <a:ext cx="1005840" cy="292608"/>
-          </a:xfrm>
-          <a:prstGeom prst="rect">
-            <a:avLst/>
-          </a:prstGeom>
-          <a:noFill/>
-        </p:spPr>
-        <p:txBody>
-          <a:bodyPr wrap="square" lIns="45720" rIns="45720" tIns="18288" bIns="18288" anchor="ctr">
-            <a:spAutoFit/>
-          </a:bodyPr>
-          <a:lstStyle/>
-          <a:p>
-            <a:pPr algn="l"/>
-            <a:r>
-              <a:rPr sz="1100" b="0" i="0">
-                <a:solidFill>
-                  <a:srgbClr val="333D4A"/>
-                </a:solidFill>
-                <a:latin typeface="Calibri"/>
-              </a:rPr>
-              <a:t>= slow</a:t>
-            </a:r>
-          </a:p>
-        </p:txBody>
-      </p:sp>
-      <p:sp>
-        <p:nvSpPr>
-          <p:cNvPr id="203" name="Rounded Rectangle 202"/>
-          <p:cNvSpPr/>
-          <p:nvPr/>
-        </p:nvSpPr>
-        <p:spPr>
-          <a:xfrm>
-            <a:off x="10564063" y="2148840"/>
-            <a:ext cx="384048" cy="292608"/>
-          </a:xfrm>
-          <a:prstGeom prst="roundRect">
-            <a:avLst/>
-          </a:prstGeom>
-          <a:solidFill>
-            <a:srgbClr val="FFE0B2"/>
-          </a:solidFill>
-          <a:ln w="25400">
-            <a:solidFill>
-              <a:srgbClr val="0B2A4A"/>
-            </a:solidFill>
-          </a:ln>
-          <a:effectLst/>
-        </p:spPr>
-        <p:style>
-          <a:lnRef idx="1">
-            <a:schemeClr val="accent1"/>
-          </a:lnRef>
-          <a:fillRef idx="3">
-            <a:schemeClr val="accent1"/>
-          </a:fillRef>
-          <a:effectRef idx="2">
-            <a:schemeClr val="accent1"/>
-          </a:effectRef>
-          <a:fontRef idx="minor">
-            <a:schemeClr val="lt1"/>
-          </a:fontRef>
-        </p:style>
-        <p:txBody>
-          <a:bodyPr rtlCol="0" anchor="ctr"/>
-          <a:lstStyle/>
-          <a:p>
-            <a:pPr algn="ctr"/>
-          </a:p>
-        </p:txBody>
-      </p:sp>
-      <p:sp>
-        <p:nvSpPr>
-          <p:cNvPr id="204" name="TextBox 203"/>
-          <p:cNvSpPr txBox="1"/>
-          <p:nvPr/>
-        </p:nvSpPr>
-        <p:spPr>
-          <a:xfrm>
-            <a:off x="10564063" y="2148840"/>
-            <a:ext cx="384048" cy="292608"/>
-          </a:xfrm>
-          <a:prstGeom prst="rect">
-            <a:avLst/>
-          </a:prstGeom>
-          <a:noFill/>
-        </p:spPr>
-        <p:txBody>
-          <a:bodyPr wrap="square" lIns="45720" rIns="45720" tIns="18288" bIns="18288" anchor="ctr">
-            <a:spAutoFit/>
-          </a:bodyPr>
-          <a:lstStyle/>
-          <a:p>
-            <a:pPr algn="ctr"/>
-            <a:r>
-              <a:rPr sz="1100" b="1" i="0">
-                <a:solidFill>
-                  <a:srgbClr val="FFFFFF"/>
-                </a:solidFill>
-                <a:latin typeface="Calibri"/>
-              </a:rPr>
-              <a:t>F</a:t>
-            </a:r>
-          </a:p>
-        </p:txBody>
-      </p:sp>
-      <p:sp>
-        <p:nvSpPr>
-          <p:cNvPr id="205" name="TextBox 204"/>
-          <p:cNvSpPr txBox="1"/>
-          <p:nvPr/>
-        </p:nvSpPr>
-        <p:spPr>
-          <a:xfrm>
-            <a:off x="11002975" y="2148840"/>
-            <a:ext cx="1005840" cy="292608"/>
-          </a:xfrm>
-          <a:prstGeom prst="rect">
-            <a:avLst/>
-          </a:prstGeom>
-          <a:noFill/>
-        </p:spPr>
-        <p:txBody>
-          <a:bodyPr wrap="square" lIns="45720" rIns="45720" tIns="18288" bIns="18288" anchor="ctr">
-            <a:spAutoFit/>
-          </a:bodyPr>
-          <a:lstStyle/>
-          <a:p>
-            <a:pPr algn="l"/>
-            <a:r>
-              <a:rPr sz="1100" b="0" i="0">
-                <a:solidFill>
-                  <a:srgbClr val="333D4A"/>
-                </a:solidFill>
-                <a:latin typeface="Calibri"/>
-              </a:rPr>
-              <a:t>= fast</a:t>
-            </a:r>
-          </a:p>
-        </p:txBody>
-      </p:sp>
-      <p:sp>
-        <p:nvSpPr>
-          <p:cNvPr id="206" name="Rounded Rectangle 205"/>
-          <p:cNvSpPr/>
-          <p:nvPr/>
-        </p:nvSpPr>
-        <p:spPr>
-          <a:xfrm>
-            <a:off x="10564063" y="2487168"/>
-            <a:ext cx="384048" cy="292608"/>
-          </a:xfrm>
-          <a:prstGeom prst="roundRect">
-            <a:avLst/>
-          </a:prstGeom>
-          <a:solidFill>
-            <a:srgbClr val="C0392B"/>
-          </a:solidFill>
-          <a:ln w="25400">
-            <a:solidFill>
-              <a:srgbClr val="C0392B"/>
-            </a:solidFill>
-          </a:ln>
-          <a:effectLst/>
-        </p:spPr>
-        <p:style>
-          <a:lnRef idx="1">
-            <a:schemeClr val="accent1"/>
-          </a:lnRef>
-          <a:fillRef idx="3">
-            <a:schemeClr val="accent1"/>
-          </a:fillRef>
-          <a:effectRef idx="2">
-            <a:schemeClr val="accent1"/>
-          </a:effectRef>
-          <a:fontRef idx="minor">
-            <a:schemeClr val="lt1"/>
-          </a:fontRef>
-        </p:style>
-        <p:txBody>
-          <a:bodyPr rtlCol="0" anchor="ctr"/>
-          <a:lstStyle/>
-          <a:p>
-            <a:pPr algn="ctr"/>
-          </a:p>
-        </p:txBody>
-      </p:sp>
-      <p:sp>
-        <p:nvSpPr>
-          <p:cNvPr id="207" name="TextBox 206"/>
-          <p:cNvSpPr txBox="1"/>
-          <p:nvPr/>
-        </p:nvSpPr>
-        <p:spPr>
-          <a:xfrm>
-            <a:off x="10564063" y="2487168"/>
-            <a:ext cx="384048" cy="292608"/>
-          </a:xfrm>
-          <a:prstGeom prst="rect">
-            <a:avLst/>
-          </a:prstGeom>
-          <a:noFill/>
-        </p:spPr>
-        <p:txBody>
-          <a:bodyPr wrap="square" lIns="45720" rIns="45720" tIns="18288" bIns="18288" anchor="ctr">
-            <a:spAutoFit/>
-          </a:bodyPr>
-          <a:lstStyle/>
-          <a:p>
-            <a:pPr algn="ctr"/>
-            <a:r>
-              <a:rPr sz="1100" b="1" i="0">
-                <a:solidFill>
-                  <a:srgbClr val="FFFFFF"/>
-                </a:solidFill>
-                <a:latin typeface="Calibri"/>
-              </a:rPr>
               <a:t>!</a:t>
             </a:r>
           </a:p>
@@ -27017,7 +26107,7 @@
       </p:sp>
       <p:sp>
         <p:nvSpPr>
-          <p:cNvPr id="208" name="TextBox 207"/>
+          <p:cNvPr id="181" name="TextBox 180"/>
           <p:cNvSpPr txBox="1"/>
           <p:nvPr/>
         </p:nvSpPr>
@@ -28896,6 +27986,87 @@
             <a:avLst/>
           </a:prstGeom>
           <a:solidFill>
+            <a:srgbClr val="FFFFFF"/>
+          </a:solidFill>
+          <a:ln w="25400">
+            <a:solidFill>
+              <a:srgbClr val="0B2A4A"/>
+            </a:solidFill>
+          </a:ln>
+          <a:effectLst/>
+        </p:spPr>
+        <p:style>
+          <a:lnRef idx="1">
+            <a:schemeClr val="accent1"/>
+          </a:lnRef>
+          <a:fillRef idx="3">
+            <a:schemeClr val="accent1"/>
+          </a:fillRef>
+          <a:effectRef idx="2">
+            <a:schemeClr val="accent1"/>
+          </a:effectRef>
+          <a:fontRef idx="minor">
+            <a:schemeClr val="lt1"/>
+          </a:fontRef>
+        </p:style>
+        <p:txBody>
+          <a:bodyPr rtlCol="0" anchor="ctr"/>
+          <a:lstStyle/>
+          <a:p>
+            <a:pPr algn="ctr"/>
+          </a:p>
+        </p:txBody>
+      </p:sp>
+      <p:sp>
+        <p:nvSpPr>
+          <p:cNvPr id="44" name="TextBox 43"/>
+          <p:cNvSpPr txBox="1"/>
+          <p:nvPr/>
+        </p:nvSpPr>
+        <p:spPr>
+          <a:xfrm>
+            <a:off x="9418320" y="2770631"/>
+            <a:ext cx="548640" cy="384048"/>
+          </a:xfrm>
+          <a:prstGeom prst="rect">
+            <a:avLst/>
+          </a:prstGeom>
+          <a:noFill/>
+        </p:spPr>
+        <p:txBody>
+          <a:bodyPr wrap="square" lIns="45720" rIns="45720" tIns="18288" bIns="18288" anchor="ctr">
+            <a:spAutoFit/>
+          </a:bodyPr>
+          <a:lstStyle/>
+          <a:p>
+            <a:pPr algn="ctr"/>
+            <a:r>
+              <a:rPr sz="1100" b="1" i="0">
+                <a:solidFill>
+                  <a:srgbClr val="0B2A4A"/>
+                </a:solidFill>
+                <a:latin typeface="Calibri"/>
+              </a:rPr>
+              <a:t>4</a:t>
+            </a:r>
+          </a:p>
+        </p:txBody>
+      </p:sp>
+      <p:sp>
+        <p:nvSpPr>
+          <p:cNvPr id="45" name="Rounded Rectangle 44"/>
+          <p:cNvSpPr/>
+          <p:nvPr/>
+        </p:nvSpPr>
+        <p:spPr>
+          <a:xfrm>
+            <a:off x="10058400" y="2770631"/>
+            <a:ext cx="548640" cy="384048"/>
+          </a:xfrm>
+          <a:prstGeom prst="roundRect">
+            <a:avLst/>
+          </a:prstGeom>
+          <a:solidFill>
             <a:srgbClr val="FFE0B2"/>
           </a:solidFill>
           <a:ln w="25400">
@@ -28929,13 +28100,13 @@
       </p:sp>
       <p:sp>
         <p:nvSpPr>
-          <p:cNvPr id="44" name="TextBox 43"/>
+          <p:cNvPr id="46" name="TextBox 45"/>
           <p:cNvSpPr txBox="1"/>
           <p:nvPr/>
         </p:nvSpPr>
         <p:spPr>
           <a:xfrm>
-            <a:off x="9418320" y="2770631"/>
+            <a:off x="10058400" y="2770631"/>
             <a:ext cx="548640" cy="384048"/>
           </a:xfrm>
           <a:prstGeom prst="rect">
@@ -28957,20 +28128,270 @@
                 </a:solidFill>
                 <a:latin typeface="Calibri"/>
               </a:rPr>
-              <a:t>4</a:t>
-            </a:r>
-          </a:p>
-        </p:txBody>
-      </p:sp>
-      <p:sp>
-        <p:nvSpPr>
-          <p:cNvPr id="45" name="Rounded Rectangle 44"/>
+              <a:t>5</a:t>
+            </a:r>
+          </a:p>
+        </p:txBody>
+      </p:sp>
+      <p:cxnSp>
+        <p:nvCxnSpPr>
+          <p:cNvPr id="47" name="Connector 46"/>
+          <p:cNvCxnSpPr/>
+          <p:nvPr/>
+        </p:nvCxnSpPr>
+        <p:spPr>
+          <a:xfrm>
+            <a:off x="7406640" y="2962655.0"/>
+            <a:ext cx="91440" cy="0.0"/>
+          </a:xfrm>
+          <a:prstGeom prst="line">
+            <a:avLst/>
+          </a:prstGeom>
+          <a:ln w="12700">
+            <a:solidFill>
+              <a:srgbClr val="0B2A4A"/>
+            </a:solidFill>
+            <a:tailEnd type="triangle" w="med" len="med"/>
+          </a:ln>
+        </p:spPr>
+        <p:style>
+          <a:lnRef idx="2">
+            <a:schemeClr val="accent1"/>
+          </a:lnRef>
+          <a:fillRef idx="0">
+            <a:schemeClr val="accent1"/>
+          </a:fillRef>
+          <a:effectRef idx="1">
+            <a:schemeClr val="accent1"/>
+          </a:effectRef>
+          <a:fontRef idx="minor">
+            <a:schemeClr val="tx1"/>
+          </a:fontRef>
+        </p:style>
+      </p:cxnSp>
+      <p:cxnSp>
+        <p:nvCxnSpPr>
+          <p:cNvPr id="48" name="Connector 47"/>
+          <p:cNvCxnSpPr/>
+          <p:nvPr/>
+        </p:nvCxnSpPr>
+        <p:spPr>
+          <a:xfrm>
+            <a:off x="8046720" y="2962655.0"/>
+            <a:ext cx="91440" cy="0.0"/>
+          </a:xfrm>
+          <a:prstGeom prst="line">
+            <a:avLst/>
+          </a:prstGeom>
+          <a:ln w="12700">
+            <a:solidFill>
+              <a:srgbClr val="0B2A4A"/>
+            </a:solidFill>
+            <a:tailEnd type="triangle" w="med" len="med"/>
+          </a:ln>
+        </p:spPr>
+        <p:style>
+          <a:lnRef idx="2">
+            <a:schemeClr val="accent1"/>
+          </a:lnRef>
+          <a:fillRef idx="0">
+            <a:schemeClr val="accent1"/>
+          </a:fillRef>
+          <a:effectRef idx="1">
+            <a:schemeClr val="accent1"/>
+          </a:effectRef>
+          <a:fontRef idx="minor">
+            <a:schemeClr val="tx1"/>
+          </a:fontRef>
+        </p:style>
+      </p:cxnSp>
+      <p:cxnSp>
+        <p:nvCxnSpPr>
+          <p:cNvPr id="49" name="Connector 48"/>
+          <p:cNvCxnSpPr/>
+          <p:nvPr/>
+        </p:nvCxnSpPr>
+        <p:spPr>
+          <a:xfrm>
+            <a:off x="8686800" y="2962655.0"/>
+            <a:ext cx="91440" cy="0.0"/>
+          </a:xfrm>
+          <a:prstGeom prst="line">
+            <a:avLst/>
+          </a:prstGeom>
+          <a:ln w="12700">
+            <a:solidFill>
+              <a:srgbClr val="0B2A4A"/>
+            </a:solidFill>
+            <a:tailEnd type="triangle" w="med" len="med"/>
+          </a:ln>
+        </p:spPr>
+        <p:style>
+          <a:lnRef idx="2">
+            <a:schemeClr val="accent1"/>
+          </a:lnRef>
+          <a:fillRef idx="0">
+            <a:schemeClr val="accent1"/>
+          </a:fillRef>
+          <a:effectRef idx="1">
+            <a:schemeClr val="accent1"/>
+          </a:effectRef>
+          <a:fontRef idx="minor">
+            <a:schemeClr val="tx1"/>
+          </a:fontRef>
+        </p:style>
+      </p:cxnSp>
+      <p:cxnSp>
+        <p:nvCxnSpPr>
+          <p:cNvPr id="50" name="Connector 49"/>
+          <p:cNvCxnSpPr/>
+          <p:nvPr/>
+        </p:nvCxnSpPr>
+        <p:spPr>
+          <a:xfrm>
+            <a:off x="9326880" y="2962655.0"/>
+            <a:ext cx="91440" cy="0.0"/>
+          </a:xfrm>
+          <a:prstGeom prst="line">
+            <a:avLst/>
+          </a:prstGeom>
+          <a:ln w="12700">
+            <a:solidFill>
+              <a:srgbClr val="0B2A4A"/>
+            </a:solidFill>
+            <a:tailEnd type="triangle" w="med" len="med"/>
+          </a:ln>
+        </p:spPr>
+        <p:style>
+          <a:lnRef idx="2">
+            <a:schemeClr val="accent1"/>
+          </a:lnRef>
+          <a:fillRef idx="0">
+            <a:schemeClr val="accent1"/>
+          </a:fillRef>
+          <a:effectRef idx="1">
+            <a:schemeClr val="accent1"/>
+          </a:effectRef>
+          <a:fontRef idx="minor">
+            <a:schemeClr val="tx1"/>
+          </a:fontRef>
+        </p:style>
+      </p:cxnSp>
+      <p:cxnSp>
+        <p:nvCxnSpPr>
+          <p:cNvPr id="51" name="Connector 50"/>
+          <p:cNvCxnSpPr/>
+          <p:nvPr/>
+        </p:nvCxnSpPr>
+        <p:spPr>
+          <a:xfrm>
+            <a:off x="9966960" y="2962655.0"/>
+            <a:ext cx="91440" cy="0.0"/>
+          </a:xfrm>
+          <a:prstGeom prst="line">
+            <a:avLst/>
+          </a:prstGeom>
+          <a:ln w="12700">
+            <a:solidFill>
+              <a:srgbClr val="0B2A4A"/>
+            </a:solidFill>
+            <a:tailEnd type="triangle" w="med" len="med"/>
+          </a:ln>
+        </p:spPr>
+        <p:style>
+          <a:lnRef idx="2">
+            <a:schemeClr val="accent1"/>
+          </a:lnRef>
+          <a:fillRef idx="0">
+            <a:schemeClr val="accent1"/>
+          </a:fillRef>
+          <a:effectRef idx="1">
+            <a:schemeClr val="accent1"/>
+          </a:effectRef>
+          <a:fontRef idx="minor">
+            <a:schemeClr val="tx1"/>
+          </a:fontRef>
+        </p:style>
+      </p:cxnSp>
+      <p:sp>
+        <p:nvSpPr>
+          <p:cNvPr id="52" name="TextBox 51"/>
+          <p:cNvSpPr txBox="1"/>
+          <p:nvPr/>
+        </p:nvSpPr>
+        <p:spPr>
+          <a:xfrm>
+            <a:off x="10744200" y="2770631"/>
+            <a:ext cx="1188720" cy="384048"/>
+          </a:xfrm>
+          <a:prstGeom prst="rect">
+            <a:avLst/>
+          </a:prstGeom>
+          <a:noFill/>
+        </p:spPr>
+        <p:txBody>
+          <a:bodyPr wrap="square" lIns="45720" rIns="45720" tIns="18288" bIns="18288" anchor="ctr">
+            <a:spAutoFit/>
+          </a:bodyPr>
+          <a:lstStyle/>
+          <a:p>
+            <a:pPr algn="l"/>
+            <a:r>
+              <a:rPr sz="1100" b="1" i="0">
+                <a:solidFill>
+                  <a:srgbClr val="127A8A"/>
+                </a:solidFill>
+                <a:latin typeface="Calibri"/>
+              </a:rPr>
+              <a:t>Gap = 2</a:t>
+            </a:r>
+          </a:p>
+        </p:txBody>
+      </p:sp>
+      <p:sp>
+        <p:nvSpPr>
+          <p:cNvPr id="53" name="TextBox 52"/>
+          <p:cNvSpPr txBox="1"/>
+          <p:nvPr/>
+        </p:nvSpPr>
+        <p:spPr>
+          <a:xfrm>
+            <a:off x="6601968" y="3666743"/>
+            <a:ext cx="868680" cy="384048"/>
+          </a:xfrm>
+          <a:prstGeom prst="rect">
+            <a:avLst/>
+          </a:prstGeom>
+          <a:noFill/>
+        </p:spPr>
+        <p:txBody>
+          <a:bodyPr wrap="square" lIns="45720" rIns="45720" tIns="18288" bIns="18288" anchor="ctr">
+            <a:spAutoFit/>
+          </a:bodyPr>
+          <a:lstStyle/>
+          <a:p>
+            <a:pPr algn="l"/>
+            <a:r>
+              <a:rPr sz="1100" b="1" i="0">
+                <a:solidFill>
+                  <a:srgbClr val="333D4A"/>
+                </a:solidFill>
+                <a:latin typeface="Calibri"/>
+              </a:rPr>
+              <a:t>Iter 2</a:t>
+            </a:r>
+          </a:p>
+        </p:txBody>
+      </p:sp>
+      <p:sp>
+        <p:nvSpPr>
+          <p:cNvPr id="54" name="Rounded Rectangle 53"/>
           <p:cNvSpPr/>
           <p:nvPr/>
         </p:nvSpPr>
         <p:spPr>
           <a:xfrm>
-            <a:off x="10058400" y="2770631"/>
+            <a:off x="6858000" y="3666743"/>
             <a:ext cx="548640" cy="384048"/>
           </a:xfrm>
           <a:prstGeom prst="roundRect">
@@ -29010,13 +28431,13 @@
       </p:sp>
       <p:sp>
         <p:nvSpPr>
-          <p:cNvPr id="46" name="TextBox 45"/>
+          <p:cNvPr id="55" name="TextBox 54"/>
           <p:cNvSpPr txBox="1"/>
           <p:nvPr/>
         </p:nvSpPr>
         <p:spPr>
           <a:xfrm>
-            <a:off x="10058400" y="2770631"/>
+            <a:off x="6858000" y="3666743"/>
             <a:ext cx="548640" cy="384048"/>
           </a:xfrm>
           <a:prstGeom prst="rect">
@@ -29038,201 +28459,148 @@
                 </a:solidFill>
                 <a:latin typeface="Calibri"/>
               </a:rPr>
-              <a:t>5</a:t>
-            </a:r>
-          </a:p>
-        </p:txBody>
-      </p:sp>
-      <p:cxnSp>
-        <p:nvCxnSpPr>
-          <p:cNvPr id="47" name="Connector 46"/>
-          <p:cNvCxnSpPr/>
-          <p:nvPr/>
-        </p:nvCxnSpPr>
-        <p:spPr>
-          <a:xfrm>
-            <a:off x="7406640" y="2962655.0"/>
-            <a:ext cx="91440" cy="0.0"/>
-          </a:xfrm>
-          <a:prstGeom prst="line">
-            <a:avLst/>
-          </a:prstGeom>
-          <a:ln w="12700">
+              <a:t>0</a:t>
+            </a:r>
+          </a:p>
+        </p:txBody>
+      </p:sp>
+      <p:sp>
+        <p:nvSpPr>
+          <p:cNvPr id="56" name="Rounded Rectangle 55"/>
+          <p:cNvSpPr/>
+          <p:nvPr/>
+        </p:nvSpPr>
+        <p:spPr>
+          <a:xfrm>
+            <a:off x="7498080" y="3666743"/>
+            <a:ext cx="548640" cy="384048"/>
+          </a:xfrm>
+          <a:prstGeom prst="roundRect">
+            <a:avLst/>
+          </a:prstGeom>
+          <a:solidFill>
+            <a:srgbClr val="FFE0B2"/>
+          </a:solidFill>
+          <a:ln w="25400">
             <a:solidFill>
               <a:srgbClr val="0B2A4A"/>
             </a:solidFill>
-            <a:tailEnd type="triangle" w="med" len="med"/>
-          </a:ln>
-        </p:spPr>
-        <p:style>
-          <a:lnRef idx="2">
-            <a:schemeClr val="accent1"/>
-          </a:lnRef>
-          <a:fillRef idx="0">
-            <a:schemeClr val="accent1"/>
-          </a:fillRef>
-          <a:effectRef idx="1">
-            <a:schemeClr val="accent1"/>
-          </a:effectRef>
-          <a:fontRef idx="minor">
-            <a:schemeClr val="tx1"/>
-          </a:fontRef>
-        </p:style>
-      </p:cxnSp>
-      <p:cxnSp>
-        <p:nvCxnSpPr>
-          <p:cNvPr id="48" name="Connector 47"/>
-          <p:cNvCxnSpPr/>
-          <p:nvPr/>
-        </p:nvCxnSpPr>
-        <p:spPr>
-          <a:xfrm>
-            <a:off x="8046720" y="2962655.0"/>
-            <a:ext cx="91440" cy="0.0"/>
-          </a:xfrm>
-          <a:prstGeom prst="line">
-            <a:avLst/>
-          </a:prstGeom>
-          <a:ln w="12700">
+          </a:ln>
+          <a:effectLst/>
+        </p:spPr>
+        <p:style>
+          <a:lnRef idx="1">
+            <a:schemeClr val="accent1"/>
+          </a:lnRef>
+          <a:fillRef idx="3">
+            <a:schemeClr val="accent1"/>
+          </a:fillRef>
+          <a:effectRef idx="2">
+            <a:schemeClr val="accent1"/>
+          </a:effectRef>
+          <a:fontRef idx="minor">
+            <a:schemeClr val="lt1"/>
+          </a:fontRef>
+        </p:style>
+        <p:txBody>
+          <a:bodyPr rtlCol="0" anchor="ctr"/>
+          <a:lstStyle/>
+          <a:p>
+            <a:pPr algn="ctr"/>
+          </a:p>
+        </p:txBody>
+      </p:sp>
+      <p:sp>
+        <p:nvSpPr>
+          <p:cNvPr id="57" name="TextBox 56"/>
+          <p:cNvSpPr txBox="1"/>
+          <p:nvPr/>
+        </p:nvSpPr>
+        <p:spPr>
+          <a:xfrm>
+            <a:off x="7498080" y="3666743"/>
+            <a:ext cx="548640" cy="384048"/>
+          </a:xfrm>
+          <a:prstGeom prst="rect">
+            <a:avLst/>
+          </a:prstGeom>
+          <a:noFill/>
+        </p:spPr>
+        <p:txBody>
+          <a:bodyPr wrap="square" lIns="45720" rIns="45720" tIns="18288" bIns="18288" anchor="ctr">
+            <a:spAutoFit/>
+          </a:bodyPr>
+          <a:lstStyle/>
+          <a:p>
+            <a:pPr algn="ctr"/>
+            <a:r>
+              <a:rPr sz="1100" b="1" i="0">
+                <a:solidFill>
+                  <a:srgbClr val="FFFFFF"/>
+                </a:solidFill>
+                <a:latin typeface="Calibri"/>
+              </a:rPr>
+              <a:t>1</a:t>
+            </a:r>
+          </a:p>
+        </p:txBody>
+      </p:sp>
+      <p:sp>
+        <p:nvSpPr>
+          <p:cNvPr id="58" name="Rounded Rectangle 57"/>
+          <p:cNvSpPr/>
+          <p:nvPr/>
+        </p:nvSpPr>
+        <p:spPr>
+          <a:xfrm>
+            <a:off x="8138160" y="3666743"/>
+            <a:ext cx="548640" cy="384048"/>
+          </a:xfrm>
+          <a:prstGeom prst="roundRect">
+            <a:avLst/>
+          </a:prstGeom>
+          <a:solidFill>
+            <a:srgbClr val="D0F0D0"/>
+          </a:solidFill>
+          <a:ln w="25400">
             <a:solidFill>
               <a:srgbClr val="0B2A4A"/>
             </a:solidFill>
-            <a:tailEnd type="triangle" w="med" len="med"/>
-          </a:ln>
-        </p:spPr>
-        <p:style>
-          <a:lnRef idx="2">
-            <a:schemeClr val="accent1"/>
-          </a:lnRef>
-          <a:fillRef idx="0">
-            <a:schemeClr val="accent1"/>
-          </a:fillRef>
-          <a:effectRef idx="1">
-            <a:schemeClr val="accent1"/>
-          </a:effectRef>
-          <a:fontRef idx="minor">
-            <a:schemeClr val="tx1"/>
-          </a:fontRef>
-        </p:style>
-      </p:cxnSp>
-      <p:cxnSp>
-        <p:nvCxnSpPr>
-          <p:cNvPr id="49" name="Connector 48"/>
-          <p:cNvCxnSpPr/>
-          <p:nvPr/>
-        </p:nvCxnSpPr>
-        <p:spPr>
-          <a:xfrm>
-            <a:off x="8686800" y="2962655.0"/>
-            <a:ext cx="91440" cy="0.0"/>
-          </a:xfrm>
-          <a:prstGeom prst="line">
-            <a:avLst/>
-          </a:prstGeom>
-          <a:ln w="12700">
-            <a:solidFill>
-              <a:srgbClr val="0B2A4A"/>
-            </a:solidFill>
-            <a:tailEnd type="triangle" w="med" len="med"/>
-          </a:ln>
-        </p:spPr>
-        <p:style>
-          <a:lnRef idx="2">
-            <a:schemeClr val="accent1"/>
-          </a:lnRef>
-          <a:fillRef idx="0">
-            <a:schemeClr val="accent1"/>
-          </a:fillRef>
-          <a:effectRef idx="1">
-            <a:schemeClr val="accent1"/>
-          </a:effectRef>
-          <a:fontRef idx="minor">
-            <a:schemeClr val="tx1"/>
-          </a:fontRef>
-        </p:style>
-      </p:cxnSp>
-      <p:cxnSp>
-        <p:nvCxnSpPr>
-          <p:cNvPr id="50" name="Connector 49"/>
-          <p:cNvCxnSpPr/>
-          <p:nvPr/>
-        </p:nvCxnSpPr>
-        <p:spPr>
-          <a:xfrm>
-            <a:off x="9326880" y="2962655.0"/>
-            <a:ext cx="91440" cy="0.0"/>
-          </a:xfrm>
-          <a:prstGeom prst="line">
-            <a:avLst/>
-          </a:prstGeom>
-          <a:ln w="12700">
-            <a:solidFill>
-              <a:srgbClr val="0B2A4A"/>
-            </a:solidFill>
-            <a:tailEnd type="triangle" w="med" len="med"/>
-          </a:ln>
-        </p:spPr>
-        <p:style>
-          <a:lnRef idx="2">
-            <a:schemeClr val="accent1"/>
-          </a:lnRef>
-          <a:fillRef idx="0">
-            <a:schemeClr val="accent1"/>
-          </a:fillRef>
-          <a:effectRef idx="1">
-            <a:schemeClr val="accent1"/>
-          </a:effectRef>
-          <a:fontRef idx="minor">
-            <a:schemeClr val="tx1"/>
-          </a:fontRef>
-        </p:style>
-      </p:cxnSp>
-      <p:cxnSp>
-        <p:nvCxnSpPr>
-          <p:cNvPr id="51" name="Connector 50"/>
-          <p:cNvCxnSpPr/>
-          <p:nvPr/>
-        </p:nvCxnSpPr>
-        <p:spPr>
-          <a:xfrm>
-            <a:off x="9966960" y="2962655.0"/>
-            <a:ext cx="91440" cy="0.0"/>
-          </a:xfrm>
-          <a:prstGeom prst="line">
-            <a:avLst/>
-          </a:prstGeom>
-          <a:ln w="12700">
-            <a:solidFill>
-              <a:srgbClr val="0B2A4A"/>
-            </a:solidFill>
-            <a:tailEnd type="triangle" w="med" len="med"/>
-          </a:ln>
-        </p:spPr>
-        <p:style>
-          <a:lnRef idx="2">
-            <a:schemeClr val="accent1"/>
-          </a:lnRef>
-          <a:fillRef idx="0">
-            <a:schemeClr val="accent1"/>
-          </a:fillRef>
-          <a:effectRef idx="1">
-            <a:schemeClr val="accent1"/>
-          </a:effectRef>
-          <a:fontRef idx="minor">
-            <a:schemeClr val="tx1"/>
-          </a:fontRef>
-        </p:style>
-      </p:cxnSp>
-      <p:sp>
-        <p:nvSpPr>
-          <p:cNvPr id="52" name="TextBox 51"/>
+          </a:ln>
+          <a:effectLst/>
+        </p:spPr>
+        <p:style>
+          <a:lnRef idx="1">
+            <a:schemeClr val="accent1"/>
+          </a:lnRef>
+          <a:fillRef idx="3">
+            <a:schemeClr val="accent1"/>
+          </a:fillRef>
+          <a:effectRef idx="2">
+            <a:schemeClr val="accent1"/>
+          </a:effectRef>
+          <a:fontRef idx="minor">
+            <a:schemeClr val="lt1"/>
+          </a:fontRef>
+        </p:style>
+        <p:txBody>
+          <a:bodyPr rtlCol="0" anchor="ctr"/>
+          <a:lstStyle/>
+          <a:p>
+            <a:pPr algn="ctr"/>
+          </a:p>
+        </p:txBody>
+      </p:sp>
+      <p:sp>
+        <p:nvSpPr>
+          <p:cNvPr id="59" name="TextBox 58"/>
           <p:cNvSpPr txBox="1"/>
           <p:nvPr/>
         </p:nvSpPr>
         <p:spPr>
           <a:xfrm>
-            <a:off x="10744200" y="2770631"/>
-            <a:ext cx="1188720" cy="384048"/>
+            <a:off x="8138160" y="3666743"/>
+            <a:ext cx="548640" cy="384048"/>
           </a:xfrm>
           <a:prstGeom prst="rect">
             <a:avLst/>
@@ -29245,63 +28613,28 @@
           </a:bodyPr>
           <a:lstStyle/>
           <a:p>
-            <a:pPr algn="l"/>
+            <a:pPr algn="ctr"/>
             <a:r>
               <a:rPr sz="1100" b="1" i="0">
                 <a:solidFill>
-                  <a:srgbClr val="127A8A"/>
-                </a:solidFill>
-                <a:latin typeface="Calibri"/>
-              </a:rPr>
-              <a:t>Gap = 2</a:t>
-            </a:r>
-          </a:p>
-        </p:txBody>
-      </p:sp>
-      <p:sp>
-        <p:nvSpPr>
-          <p:cNvPr id="53" name="TextBox 52"/>
-          <p:cNvSpPr txBox="1"/>
-          <p:nvPr/>
-        </p:nvSpPr>
-        <p:spPr>
-          <a:xfrm>
-            <a:off x="6601968" y="3666743"/>
-            <a:ext cx="868680" cy="384048"/>
-          </a:xfrm>
-          <a:prstGeom prst="rect">
-            <a:avLst/>
-          </a:prstGeom>
-          <a:noFill/>
-        </p:spPr>
-        <p:txBody>
-          <a:bodyPr wrap="square" lIns="45720" rIns="45720" tIns="18288" bIns="18288" anchor="ctr">
-            <a:spAutoFit/>
-          </a:bodyPr>
-          <a:lstStyle/>
-          <a:p>
-            <a:pPr algn="l"/>
-            <a:r>
-              <a:rPr sz="1100" b="1" i="0">
-                <a:solidFill>
-                  <a:srgbClr val="333D4A"/>
-                </a:solidFill>
-                <a:latin typeface="Calibri"/>
-              </a:rPr>
-              <a:t>Iter 2</a:t>
-            </a:r>
-          </a:p>
-        </p:txBody>
-      </p:sp>
-      <p:sp>
-        <p:nvSpPr>
-          <p:cNvPr id="54" name="Rounded Rectangle 53"/>
+                  <a:srgbClr val="FFFFFF"/>
+                </a:solidFill>
+                <a:latin typeface="Calibri"/>
+              </a:rPr>
+              <a:t>2</a:t>
+            </a:r>
+          </a:p>
+        </p:txBody>
+      </p:sp>
+      <p:sp>
+        <p:nvSpPr>
+          <p:cNvPr id="60" name="Rounded Rectangle 59"/>
           <p:cNvSpPr/>
           <p:nvPr/>
         </p:nvSpPr>
         <p:spPr>
           <a:xfrm>
-            <a:off x="6858000" y="3666743"/>
+            <a:off x="8778240" y="3666743"/>
             <a:ext cx="548640" cy="384048"/>
           </a:xfrm>
           <a:prstGeom prst="roundRect">
@@ -29341,13 +28674,13 @@
       </p:sp>
       <p:sp>
         <p:nvSpPr>
-          <p:cNvPr id="55" name="TextBox 54"/>
+          <p:cNvPr id="61" name="TextBox 60"/>
           <p:cNvSpPr txBox="1"/>
           <p:nvPr/>
         </p:nvSpPr>
         <p:spPr>
           <a:xfrm>
-            <a:off x="6858000" y="3666743"/>
+            <a:off x="8778240" y="3666743"/>
             <a:ext cx="548640" cy="384048"/>
           </a:xfrm>
           <a:prstGeom prst="rect">
@@ -29369,20 +28702,20 @@
                 </a:solidFill>
                 <a:latin typeface="Calibri"/>
               </a:rPr>
-              <a:t>0</a:t>
-            </a:r>
-          </a:p>
-        </p:txBody>
-      </p:sp>
-      <p:sp>
-        <p:nvSpPr>
-          <p:cNvPr id="56" name="Rounded Rectangle 55"/>
+              <a:t>3</a:t>
+            </a:r>
+          </a:p>
+        </p:txBody>
+      </p:sp>
+      <p:sp>
+        <p:nvSpPr>
+          <p:cNvPr id="62" name="Rounded Rectangle 61"/>
           <p:cNvSpPr/>
           <p:nvPr/>
         </p:nvSpPr>
         <p:spPr>
           <a:xfrm>
-            <a:off x="7498080" y="3666743"/>
+            <a:off x="9418320" y="3666743"/>
             <a:ext cx="548640" cy="384048"/>
           </a:xfrm>
           <a:prstGeom prst="roundRect">
@@ -29422,13 +28755,13 @@
       </p:sp>
       <p:sp>
         <p:nvSpPr>
-          <p:cNvPr id="57" name="TextBox 56"/>
+          <p:cNvPr id="63" name="TextBox 62"/>
           <p:cNvSpPr txBox="1"/>
           <p:nvPr/>
         </p:nvSpPr>
         <p:spPr>
           <a:xfrm>
-            <a:off x="7498080" y="3666743"/>
+            <a:off x="9418320" y="3666743"/>
             <a:ext cx="548640" cy="384048"/>
           </a:xfrm>
           <a:prstGeom prst="rect">
@@ -29450,101 +28783,20 @@
                 </a:solidFill>
                 <a:latin typeface="Calibri"/>
               </a:rPr>
-              <a:t>1</a:t>
-            </a:r>
-          </a:p>
-        </p:txBody>
-      </p:sp>
-      <p:sp>
-        <p:nvSpPr>
-          <p:cNvPr id="58" name="Rounded Rectangle 57"/>
+              <a:t>4</a:t>
+            </a:r>
+          </a:p>
+        </p:txBody>
+      </p:sp>
+      <p:sp>
+        <p:nvSpPr>
+          <p:cNvPr id="64" name="Rounded Rectangle 63"/>
           <p:cNvSpPr/>
           <p:nvPr/>
         </p:nvSpPr>
         <p:spPr>
           <a:xfrm>
-            <a:off x="8138160" y="3666743"/>
-            <a:ext cx="548640" cy="384048"/>
-          </a:xfrm>
-          <a:prstGeom prst="roundRect">
-            <a:avLst/>
-          </a:prstGeom>
-          <a:solidFill>
-            <a:srgbClr val="D0F0D0"/>
-          </a:solidFill>
-          <a:ln w="25400">
-            <a:solidFill>
-              <a:srgbClr val="0B2A4A"/>
-            </a:solidFill>
-          </a:ln>
-          <a:effectLst/>
-        </p:spPr>
-        <p:style>
-          <a:lnRef idx="1">
-            <a:schemeClr val="accent1"/>
-          </a:lnRef>
-          <a:fillRef idx="3">
-            <a:schemeClr val="accent1"/>
-          </a:fillRef>
-          <a:effectRef idx="2">
-            <a:schemeClr val="accent1"/>
-          </a:effectRef>
-          <a:fontRef idx="minor">
-            <a:schemeClr val="lt1"/>
-          </a:fontRef>
-        </p:style>
-        <p:txBody>
-          <a:bodyPr rtlCol="0" anchor="ctr"/>
-          <a:lstStyle/>
-          <a:p>
-            <a:pPr algn="ctr"/>
-          </a:p>
-        </p:txBody>
-      </p:sp>
-      <p:sp>
-        <p:nvSpPr>
-          <p:cNvPr id="59" name="TextBox 58"/>
-          <p:cNvSpPr txBox="1"/>
-          <p:nvPr/>
-        </p:nvSpPr>
-        <p:spPr>
-          <a:xfrm>
-            <a:off x="8138160" y="3666743"/>
-            <a:ext cx="548640" cy="384048"/>
-          </a:xfrm>
-          <a:prstGeom prst="rect">
-            <a:avLst/>
-          </a:prstGeom>
-          <a:noFill/>
-        </p:spPr>
-        <p:txBody>
-          <a:bodyPr wrap="square" lIns="45720" rIns="45720" tIns="18288" bIns="18288" anchor="ctr">
-            <a:spAutoFit/>
-          </a:bodyPr>
-          <a:lstStyle/>
-          <a:p>
-            <a:pPr algn="ctr"/>
-            <a:r>
-              <a:rPr sz="1100" b="1" i="0">
-                <a:solidFill>
-                  <a:srgbClr val="FFFFFF"/>
-                </a:solidFill>
-                <a:latin typeface="Calibri"/>
-              </a:rPr>
-              <a:t>2</a:t>
-            </a:r>
-          </a:p>
-        </p:txBody>
-      </p:sp>
-      <p:sp>
-        <p:nvSpPr>
-          <p:cNvPr id="60" name="Rounded Rectangle 59"/>
-          <p:cNvSpPr/>
-          <p:nvPr/>
-        </p:nvSpPr>
-        <p:spPr>
-          <a:xfrm>
-            <a:off x="8778240" y="3666743"/>
+            <a:off x="10058400" y="3666743"/>
             <a:ext cx="548640" cy="384048"/>
           </a:xfrm>
           <a:prstGeom prst="roundRect">
@@ -29584,13 +28836,13 @@
       </p:sp>
       <p:sp>
         <p:nvSpPr>
-          <p:cNvPr id="61" name="TextBox 60"/>
+          <p:cNvPr id="65" name="TextBox 64"/>
           <p:cNvSpPr txBox="1"/>
           <p:nvPr/>
         </p:nvSpPr>
         <p:spPr>
           <a:xfrm>
-            <a:off x="8778240" y="3666743"/>
+            <a:off x="10058400" y="3666743"/>
             <a:ext cx="548640" cy="384048"/>
           </a:xfrm>
           <a:prstGeom prst="rect">
@@ -29612,20 +28864,270 @@
                 </a:solidFill>
                 <a:latin typeface="Calibri"/>
               </a:rPr>
-              <a:t>3</a:t>
-            </a:r>
-          </a:p>
-        </p:txBody>
-      </p:sp>
-      <p:sp>
-        <p:nvSpPr>
-          <p:cNvPr id="62" name="Rounded Rectangle 61"/>
+              <a:t>5</a:t>
+            </a:r>
+          </a:p>
+        </p:txBody>
+      </p:sp>
+      <p:cxnSp>
+        <p:nvCxnSpPr>
+          <p:cNvPr id="66" name="Connector 65"/>
+          <p:cNvCxnSpPr/>
+          <p:nvPr/>
+        </p:nvCxnSpPr>
+        <p:spPr>
+          <a:xfrm>
+            <a:off x="7406640" y="3858767.0"/>
+            <a:ext cx="91440" cy="0.0"/>
+          </a:xfrm>
+          <a:prstGeom prst="line">
+            <a:avLst/>
+          </a:prstGeom>
+          <a:ln w="12700">
+            <a:solidFill>
+              <a:srgbClr val="0B2A4A"/>
+            </a:solidFill>
+            <a:tailEnd type="triangle" w="med" len="med"/>
+          </a:ln>
+        </p:spPr>
+        <p:style>
+          <a:lnRef idx="2">
+            <a:schemeClr val="accent1"/>
+          </a:lnRef>
+          <a:fillRef idx="0">
+            <a:schemeClr val="accent1"/>
+          </a:fillRef>
+          <a:effectRef idx="1">
+            <a:schemeClr val="accent1"/>
+          </a:effectRef>
+          <a:fontRef idx="minor">
+            <a:schemeClr val="tx1"/>
+          </a:fontRef>
+        </p:style>
+      </p:cxnSp>
+      <p:cxnSp>
+        <p:nvCxnSpPr>
+          <p:cNvPr id="67" name="Connector 66"/>
+          <p:cNvCxnSpPr/>
+          <p:nvPr/>
+        </p:nvCxnSpPr>
+        <p:spPr>
+          <a:xfrm>
+            <a:off x="8046720" y="3858767.0"/>
+            <a:ext cx="91440" cy="0.0"/>
+          </a:xfrm>
+          <a:prstGeom prst="line">
+            <a:avLst/>
+          </a:prstGeom>
+          <a:ln w="12700">
+            <a:solidFill>
+              <a:srgbClr val="0B2A4A"/>
+            </a:solidFill>
+            <a:tailEnd type="triangle" w="med" len="med"/>
+          </a:ln>
+        </p:spPr>
+        <p:style>
+          <a:lnRef idx="2">
+            <a:schemeClr val="accent1"/>
+          </a:lnRef>
+          <a:fillRef idx="0">
+            <a:schemeClr val="accent1"/>
+          </a:fillRef>
+          <a:effectRef idx="1">
+            <a:schemeClr val="accent1"/>
+          </a:effectRef>
+          <a:fontRef idx="minor">
+            <a:schemeClr val="tx1"/>
+          </a:fontRef>
+        </p:style>
+      </p:cxnSp>
+      <p:cxnSp>
+        <p:nvCxnSpPr>
+          <p:cNvPr id="68" name="Connector 67"/>
+          <p:cNvCxnSpPr/>
+          <p:nvPr/>
+        </p:nvCxnSpPr>
+        <p:spPr>
+          <a:xfrm>
+            <a:off x="8686800" y="3858767.0"/>
+            <a:ext cx="91440" cy="0.0"/>
+          </a:xfrm>
+          <a:prstGeom prst="line">
+            <a:avLst/>
+          </a:prstGeom>
+          <a:ln w="12700">
+            <a:solidFill>
+              <a:srgbClr val="0B2A4A"/>
+            </a:solidFill>
+            <a:tailEnd type="triangle" w="med" len="med"/>
+          </a:ln>
+        </p:spPr>
+        <p:style>
+          <a:lnRef idx="2">
+            <a:schemeClr val="accent1"/>
+          </a:lnRef>
+          <a:fillRef idx="0">
+            <a:schemeClr val="accent1"/>
+          </a:fillRef>
+          <a:effectRef idx="1">
+            <a:schemeClr val="accent1"/>
+          </a:effectRef>
+          <a:fontRef idx="minor">
+            <a:schemeClr val="tx1"/>
+          </a:fontRef>
+        </p:style>
+      </p:cxnSp>
+      <p:cxnSp>
+        <p:nvCxnSpPr>
+          <p:cNvPr id="69" name="Connector 68"/>
+          <p:cNvCxnSpPr/>
+          <p:nvPr/>
+        </p:nvCxnSpPr>
+        <p:spPr>
+          <a:xfrm>
+            <a:off x="9326880" y="3858767.0"/>
+            <a:ext cx="91440" cy="0.0"/>
+          </a:xfrm>
+          <a:prstGeom prst="line">
+            <a:avLst/>
+          </a:prstGeom>
+          <a:ln w="12700">
+            <a:solidFill>
+              <a:srgbClr val="0B2A4A"/>
+            </a:solidFill>
+            <a:tailEnd type="triangle" w="med" len="med"/>
+          </a:ln>
+        </p:spPr>
+        <p:style>
+          <a:lnRef idx="2">
+            <a:schemeClr val="accent1"/>
+          </a:lnRef>
+          <a:fillRef idx="0">
+            <a:schemeClr val="accent1"/>
+          </a:fillRef>
+          <a:effectRef idx="1">
+            <a:schemeClr val="accent1"/>
+          </a:effectRef>
+          <a:fontRef idx="minor">
+            <a:schemeClr val="tx1"/>
+          </a:fontRef>
+        </p:style>
+      </p:cxnSp>
+      <p:cxnSp>
+        <p:nvCxnSpPr>
+          <p:cNvPr id="70" name="Connector 69"/>
+          <p:cNvCxnSpPr/>
+          <p:nvPr/>
+        </p:nvCxnSpPr>
+        <p:spPr>
+          <a:xfrm>
+            <a:off x="9966960" y="3858767.0"/>
+            <a:ext cx="91440" cy="0.0"/>
+          </a:xfrm>
+          <a:prstGeom prst="line">
+            <a:avLst/>
+          </a:prstGeom>
+          <a:ln w="12700">
+            <a:solidFill>
+              <a:srgbClr val="0B2A4A"/>
+            </a:solidFill>
+            <a:tailEnd type="triangle" w="med" len="med"/>
+          </a:ln>
+        </p:spPr>
+        <p:style>
+          <a:lnRef idx="2">
+            <a:schemeClr val="accent1"/>
+          </a:lnRef>
+          <a:fillRef idx="0">
+            <a:schemeClr val="accent1"/>
+          </a:fillRef>
+          <a:effectRef idx="1">
+            <a:schemeClr val="accent1"/>
+          </a:effectRef>
+          <a:fontRef idx="minor">
+            <a:schemeClr val="tx1"/>
+          </a:fontRef>
+        </p:style>
+      </p:cxnSp>
+      <p:sp>
+        <p:nvSpPr>
+          <p:cNvPr id="71" name="TextBox 70"/>
+          <p:cNvSpPr txBox="1"/>
+          <p:nvPr/>
+        </p:nvSpPr>
+        <p:spPr>
+          <a:xfrm>
+            <a:off x="10744200" y="3666743"/>
+            <a:ext cx="1188720" cy="384048"/>
+          </a:xfrm>
+          <a:prstGeom prst="rect">
+            <a:avLst/>
+          </a:prstGeom>
+          <a:noFill/>
+        </p:spPr>
+        <p:txBody>
+          <a:bodyPr wrap="square" lIns="45720" rIns="45720" tIns="18288" bIns="18288" anchor="ctr">
+            <a:spAutoFit/>
+          </a:bodyPr>
+          <a:lstStyle/>
+          <a:p>
+            <a:pPr algn="l"/>
+            <a:r>
+              <a:rPr sz="1100" b="1" i="0">
+                <a:solidFill>
+                  <a:srgbClr val="127A8A"/>
+                </a:solidFill>
+                <a:latin typeface="Calibri"/>
+              </a:rPr>
+              <a:t>Gap = 1</a:t>
+            </a:r>
+          </a:p>
+        </p:txBody>
+      </p:sp>
+      <p:sp>
+        <p:nvSpPr>
+          <p:cNvPr id="72" name="TextBox 71"/>
+          <p:cNvSpPr txBox="1"/>
+          <p:nvPr/>
+        </p:nvSpPr>
+        <p:spPr>
+          <a:xfrm>
+            <a:off x="6601968" y="4562855"/>
+            <a:ext cx="868680" cy="384048"/>
+          </a:xfrm>
+          <a:prstGeom prst="rect">
+            <a:avLst/>
+          </a:prstGeom>
+          <a:noFill/>
+        </p:spPr>
+        <p:txBody>
+          <a:bodyPr wrap="square" lIns="45720" rIns="45720" tIns="18288" bIns="18288" anchor="ctr">
+            <a:spAutoFit/>
+          </a:bodyPr>
+          <a:lstStyle/>
+          <a:p>
+            <a:pPr algn="l"/>
+            <a:r>
+              <a:rPr sz="1100" b="1" i="0">
+                <a:solidFill>
+                  <a:srgbClr val="333D4A"/>
+                </a:solidFill>
+                <a:latin typeface="Calibri"/>
+              </a:rPr>
+              <a:t>Iter 3</a:t>
+            </a:r>
+          </a:p>
+        </p:txBody>
+      </p:sp>
+      <p:sp>
+        <p:nvSpPr>
+          <p:cNvPr id="73" name="Rounded Rectangle 72"/>
           <p:cNvSpPr/>
           <p:nvPr/>
         </p:nvSpPr>
         <p:spPr>
           <a:xfrm>
-            <a:off x="9418320" y="3666743"/>
+            <a:off x="6858000" y="4562855"/>
             <a:ext cx="548640" cy="384048"/>
           </a:xfrm>
           <a:prstGeom prst="roundRect">
@@ -29636,7 +29138,7 @@
           </a:solidFill>
           <a:ln w="25400">
             <a:solidFill>
-              <a:srgbClr val="0B2A4A"/>
+              <a:srgbClr val="C0392B"/>
             </a:solidFill>
           </a:ln>
           <a:effectLst/>
@@ -29665,13 +29167,13 @@
       </p:sp>
       <p:sp>
         <p:nvSpPr>
-          <p:cNvPr id="63" name="TextBox 62"/>
+          <p:cNvPr id="74" name="TextBox 73"/>
           <p:cNvSpPr txBox="1"/>
           <p:nvPr/>
         </p:nvSpPr>
         <p:spPr>
           <a:xfrm>
-            <a:off x="9418320" y="3666743"/>
+            <a:off x="6858000" y="4562855"/>
             <a:ext cx="548640" cy="384048"/>
           </a:xfrm>
           <a:prstGeom prst="rect">
@@ -29690,418 +29192,6 @@
               <a:rPr sz="1100" b="1" i="0">
                 <a:solidFill>
                   <a:srgbClr val="0B2A4A"/>
-                </a:solidFill>
-                <a:latin typeface="Calibri"/>
-              </a:rPr>
-              <a:t>4</a:t>
-            </a:r>
-          </a:p>
-        </p:txBody>
-      </p:sp>
-      <p:sp>
-        <p:nvSpPr>
-          <p:cNvPr id="64" name="Rounded Rectangle 63"/>
-          <p:cNvSpPr/>
-          <p:nvPr/>
-        </p:nvSpPr>
-        <p:spPr>
-          <a:xfrm>
-            <a:off x="10058400" y="3666743"/>
-            <a:ext cx="548640" cy="384048"/>
-          </a:xfrm>
-          <a:prstGeom prst="roundRect">
-            <a:avLst/>
-          </a:prstGeom>
-          <a:solidFill>
-            <a:srgbClr val="FFE0B2"/>
-          </a:solidFill>
-          <a:ln w="25400">
-            <a:solidFill>
-              <a:srgbClr val="0B2A4A"/>
-            </a:solidFill>
-          </a:ln>
-          <a:effectLst/>
-        </p:spPr>
-        <p:style>
-          <a:lnRef idx="1">
-            <a:schemeClr val="accent1"/>
-          </a:lnRef>
-          <a:fillRef idx="3">
-            <a:schemeClr val="accent1"/>
-          </a:fillRef>
-          <a:effectRef idx="2">
-            <a:schemeClr val="accent1"/>
-          </a:effectRef>
-          <a:fontRef idx="minor">
-            <a:schemeClr val="lt1"/>
-          </a:fontRef>
-        </p:style>
-        <p:txBody>
-          <a:bodyPr rtlCol="0" anchor="ctr"/>
-          <a:lstStyle/>
-          <a:p>
-            <a:pPr algn="ctr"/>
-          </a:p>
-        </p:txBody>
-      </p:sp>
-      <p:sp>
-        <p:nvSpPr>
-          <p:cNvPr id="65" name="TextBox 64"/>
-          <p:cNvSpPr txBox="1"/>
-          <p:nvPr/>
-        </p:nvSpPr>
-        <p:spPr>
-          <a:xfrm>
-            <a:off x="10058400" y="3666743"/>
-            <a:ext cx="548640" cy="384048"/>
-          </a:xfrm>
-          <a:prstGeom prst="rect">
-            <a:avLst/>
-          </a:prstGeom>
-          <a:noFill/>
-        </p:spPr>
-        <p:txBody>
-          <a:bodyPr wrap="square" lIns="45720" rIns="45720" tIns="18288" bIns="18288" anchor="ctr">
-            <a:spAutoFit/>
-          </a:bodyPr>
-          <a:lstStyle/>
-          <a:p>
-            <a:pPr algn="ctr"/>
-            <a:r>
-              <a:rPr sz="1100" b="1" i="0">
-                <a:solidFill>
-                  <a:srgbClr val="FFFFFF"/>
-                </a:solidFill>
-                <a:latin typeface="Calibri"/>
-              </a:rPr>
-              <a:t>5</a:t>
-            </a:r>
-          </a:p>
-        </p:txBody>
-      </p:sp>
-      <p:cxnSp>
-        <p:nvCxnSpPr>
-          <p:cNvPr id="66" name="Connector 65"/>
-          <p:cNvCxnSpPr/>
-          <p:nvPr/>
-        </p:nvCxnSpPr>
-        <p:spPr>
-          <a:xfrm>
-            <a:off x="7406640" y="3858767.0"/>
-            <a:ext cx="91440" cy="0.0"/>
-          </a:xfrm>
-          <a:prstGeom prst="line">
-            <a:avLst/>
-          </a:prstGeom>
-          <a:ln w="12700">
-            <a:solidFill>
-              <a:srgbClr val="0B2A4A"/>
-            </a:solidFill>
-            <a:tailEnd type="triangle" w="med" len="med"/>
-          </a:ln>
-        </p:spPr>
-        <p:style>
-          <a:lnRef idx="2">
-            <a:schemeClr val="accent1"/>
-          </a:lnRef>
-          <a:fillRef idx="0">
-            <a:schemeClr val="accent1"/>
-          </a:fillRef>
-          <a:effectRef idx="1">
-            <a:schemeClr val="accent1"/>
-          </a:effectRef>
-          <a:fontRef idx="minor">
-            <a:schemeClr val="tx1"/>
-          </a:fontRef>
-        </p:style>
-      </p:cxnSp>
-      <p:cxnSp>
-        <p:nvCxnSpPr>
-          <p:cNvPr id="67" name="Connector 66"/>
-          <p:cNvCxnSpPr/>
-          <p:nvPr/>
-        </p:nvCxnSpPr>
-        <p:spPr>
-          <a:xfrm>
-            <a:off x="8046720" y="3858767.0"/>
-            <a:ext cx="91440" cy="0.0"/>
-          </a:xfrm>
-          <a:prstGeom prst="line">
-            <a:avLst/>
-          </a:prstGeom>
-          <a:ln w="12700">
-            <a:solidFill>
-              <a:srgbClr val="0B2A4A"/>
-            </a:solidFill>
-            <a:tailEnd type="triangle" w="med" len="med"/>
-          </a:ln>
-        </p:spPr>
-        <p:style>
-          <a:lnRef idx="2">
-            <a:schemeClr val="accent1"/>
-          </a:lnRef>
-          <a:fillRef idx="0">
-            <a:schemeClr val="accent1"/>
-          </a:fillRef>
-          <a:effectRef idx="1">
-            <a:schemeClr val="accent1"/>
-          </a:effectRef>
-          <a:fontRef idx="minor">
-            <a:schemeClr val="tx1"/>
-          </a:fontRef>
-        </p:style>
-      </p:cxnSp>
-      <p:cxnSp>
-        <p:nvCxnSpPr>
-          <p:cNvPr id="68" name="Connector 67"/>
-          <p:cNvCxnSpPr/>
-          <p:nvPr/>
-        </p:nvCxnSpPr>
-        <p:spPr>
-          <a:xfrm>
-            <a:off x="8686800" y="3858767.0"/>
-            <a:ext cx="91440" cy="0.0"/>
-          </a:xfrm>
-          <a:prstGeom prst="line">
-            <a:avLst/>
-          </a:prstGeom>
-          <a:ln w="12700">
-            <a:solidFill>
-              <a:srgbClr val="0B2A4A"/>
-            </a:solidFill>
-            <a:tailEnd type="triangle" w="med" len="med"/>
-          </a:ln>
-        </p:spPr>
-        <p:style>
-          <a:lnRef idx="2">
-            <a:schemeClr val="accent1"/>
-          </a:lnRef>
-          <a:fillRef idx="0">
-            <a:schemeClr val="accent1"/>
-          </a:fillRef>
-          <a:effectRef idx="1">
-            <a:schemeClr val="accent1"/>
-          </a:effectRef>
-          <a:fontRef idx="minor">
-            <a:schemeClr val="tx1"/>
-          </a:fontRef>
-        </p:style>
-      </p:cxnSp>
-      <p:cxnSp>
-        <p:nvCxnSpPr>
-          <p:cNvPr id="69" name="Connector 68"/>
-          <p:cNvCxnSpPr/>
-          <p:nvPr/>
-        </p:nvCxnSpPr>
-        <p:spPr>
-          <a:xfrm>
-            <a:off x="9326880" y="3858767.0"/>
-            <a:ext cx="91440" cy="0.0"/>
-          </a:xfrm>
-          <a:prstGeom prst="line">
-            <a:avLst/>
-          </a:prstGeom>
-          <a:ln w="12700">
-            <a:solidFill>
-              <a:srgbClr val="0B2A4A"/>
-            </a:solidFill>
-            <a:tailEnd type="triangle" w="med" len="med"/>
-          </a:ln>
-        </p:spPr>
-        <p:style>
-          <a:lnRef idx="2">
-            <a:schemeClr val="accent1"/>
-          </a:lnRef>
-          <a:fillRef idx="0">
-            <a:schemeClr val="accent1"/>
-          </a:fillRef>
-          <a:effectRef idx="1">
-            <a:schemeClr val="accent1"/>
-          </a:effectRef>
-          <a:fontRef idx="minor">
-            <a:schemeClr val="tx1"/>
-          </a:fontRef>
-        </p:style>
-      </p:cxnSp>
-      <p:cxnSp>
-        <p:nvCxnSpPr>
-          <p:cNvPr id="70" name="Connector 69"/>
-          <p:cNvCxnSpPr/>
-          <p:nvPr/>
-        </p:nvCxnSpPr>
-        <p:spPr>
-          <a:xfrm>
-            <a:off x="9966960" y="3858767.0"/>
-            <a:ext cx="91440" cy="0.0"/>
-          </a:xfrm>
-          <a:prstGeom prst="line">
-            <a:avLst/>
-          </a:prstGeom>
-          <a:ln w="12700">
-            <a:solidFill>
-              <a:srgbClr val="0B2A4A"/>
-            </a:solidFill>
-            <a:tailEnd type="triangle" w="med" len="med"/>
-          </a:ln>
-        </p:spPr>
-        <p:style>
-          <a:lnRef idx="2">
-            <a:schemeClr val="accent1"/>
-          </a:lnRef>
-          <a:fillRef idx="0">
-            <a:schemeClr val="accent1"/>
-          </a:fillRef>
-          <a:effectRef idx="1">
-            <a:schemeClr val="accent1"/>
-          </a:effectRef>
-          <a:fontRef idx="minor">
-            <a:schemeClr val="tx1"/>
-          </a:fontRef>
-        </p:style>
-      </p:cxnSp>
-      <p:sp>
-        <p:nvSpPr>
-          <p:cNvPr id="71" name="TextBox 70"/>
-          <p:cNvSpPr txBox="1"/>
-          <p:nvPr/>
-        </p:nvSpPr>
-        <p:spPr>
-          <a:xfrm>
-            <a:off x="10744200" y="3666743"/>
-            <a:ext cx="1188720" cy="384048"/>
-          </a:xfrm>
-          <a:prstGeom prst="rect">
-            <a:avLst/>
-          </a:prstGeom>
-          <a:noFill/>
-        </p:spPr>
-        <p:txBody>
-          <a:bodyPr wrap="square" lIns="45720" rIns="45720" tIns="18288" bIns="18288" anchor="ctr">
-            <a:spAutoFit/>
-          </a:bodyPr>
-          <a:lstStyle/>
-          <a:p>
-            <a:pPr algn="l"/>
-            <a:r>
-              <a:rPr sz="1100" b="1" i="0">
-                <a:solidFill>
-                  <a:srgbClr val="127A8A"/>
-                </a:solidFill>
-                <a:latin typeface="Calibri"/>
-              </a:rPr>
-              <a:t>Gap = 1</a:t>
-            </a:r>
-          </a:p>
-        </p:txBody>
-      </p:sp>
-      <p:sp>
-        <p:nvSpPr>
-          <p:cNvPr id="72" name="TextBox 71"/>
-          <p:cNvSpPr txBox="1"/>
-          <p:nvPr/>
-        </p:nvSpPr>
-        <p:spPr>
-          <a:xfrm>
-            <a:off x="6601968" y="4562855"/>
-            <a:ext cx="868680" cy="384048"/>
-          </a:xfrm>
-          <a:prstGeom prst="rect">
-            <a:avLst/>
-          </a:prstGeom>
-          <a:noFill/>
-        </p:spPr>
-        <p:txBody>
-          <a:bodyPr wrap="square" lIns="45720" rIns="45720" tIns="18288" bIns="18288" anchor="ctr">
-            <a:spAutoFit/>
-          </a:bodyPr>
-          <a:lstStyle/>
-          <a:p>
-            <a:pPr algn="l"/>
-            <a:r>
-              <a:rPr sz="1100" b="1" i="0">
-                <a:solidFill>
-                  <a:srgbClr val="333D4A"/>
-                </a:solidFill>
-                <a:latin typeface="Calibri"/>
-              </a:rPr>
-              <a:t>Iter 3</a:t>
-            </a:r>
-          </a:p>
-        </p:txBody>
-      </p:sp>
-      <p:sp>
-        <p:nvSpPr>
-          <p:cNvPr id="73" name="Rounded Rectangle 72"/>
-          <p:cNvSpPr/>
-          <p:nvPr/>
-        </p:nvSpPr>
-        <p:spPr>
-          <a:xfrm>
-            <a:off x="6858000" y="4562855"/>
-            <a:ext cx="548640" cy="384048"/>
-          </a:xfrm>
-          <a:prstGeom prst="roundRect">
-            <a:avLst/>
-          </a:prstGeom>
-          <a:solidFill>
-            <a:srgbClr val="FFE0B2"/>
-          </a:solidFill>
-          <a:ln w="25400">
-            <a:solidFill>
-              <a:srgbClr val="0B2A4A"/>
-            </a:solidFill>
-          </a:ln>
-          <a:effectLst/>
-        </p:spPr>
-        <p:style>
-          <a:lnRef idx="1">
-            <a:schemeClr val="accent1"/>
-          </a:lnRef>
-          <a:fillRef idx="3">
-            <a:schemeClr val="accent1"/>
-          </a:fillRef>
-          <a:effectRef idx="2">
-            <a:schemeClr val="accent1"/>
-          </a:effectRef>
-          <a:fontRef idx="minor">
-            <a:schemeClr val="lt1"/>
-          </a:fontRef>
-        </p:style>
-        <p:txBody>
-          <a:bodyPr rtlCol="0" anchor="ctr"/>
-          <a:lstStyle/>
-          <a:p>
-            <a:pPr algn="ctr"/>
-          </a:p>
-        </p:txBody>
-      </p:sp>
-      <p:sp>
-        <p:nvSpPr>
-          <p:cNvPr id="74" name="TextBox 73"/>
-          <p:cNvSpPr txBox="1"/>
-          <p:nvPr/>
-        </p:nvSpPr>
-        <p:spPr>
-          <a:xfrm>
-            <a:off x="6858000" y="4562855"/>
-            <a:ext cx="548640" cy="384048"/>
-          </a:xfrm>
-          <a:prstGeom prst="rect">
-            <a:avLst/>
-          </a:prstGeom>
-          <a:noFill/>
-        </p:spPr>
-        <p:txBody>
-          <a:bodyPr wrap="square" lIns="45720" rIns="45720" tIns="18288" bIns="18288" anchor="ctr">
-            <a:spAutoFit/>
-          </a:bodyPr>
-          <a:lstStyle/>
-          <a:p>
-            <a:pPr algn="ctr"/>
-            <a:r>
-              <a:rPr sz="1100" b="1" i="0">
-                <a:solidFill>
-                  <a:srgbClr val="FFFFFF"/>
                 </a:solidFill>
                 <a:latin typeface="Calibri"/>
               </a:rPr>
@@ -30129,7 +29219,7 @@
           </a:solidFill>
           <a:ln w="25400">
             <a:solidFill>
-              <a:srgbClr val="0B2A4A"/>
+              <a:srgbClr val="C0392B"/>
             </a:solidFill>
           </a:ln>
           <a:effectLst/>
@@ -30210,7 +29300,7 @@
           </a:solidFill>
           <a:ln w="25400">
             <a:solidFill>
-              <a:srgbClr val="0B2A4A"/>
+              <a:srgbClr val="C0392B"/>
             </a:solidFill>
           </a:ln>
           <a:effectLst/>
@@ -30291,7 +29381,7 @@
           </a:solidFill>
           <a:ln w="25400">
             <a:solidFill>
-              <a:srgbClr val="0B2A4A"/>
+              <a:srgbClr val="C0392B"/>
             </a:solidFill>
           </a:ln>
           <a:effectLst/>
@@ -30372,7 +29462,7 @@
           </a:solidFill>
           <a:ln w="25400">
             <a:solidFill>
-              <a:srgbClr val="0B2A4A"/>
+              <a:srgbClr val="C0392B"/>
             </a:solidFill>
           </a:ln>
           <a:effectLst/>
@@ -30453,7 +29543,7 @@
           </a:solidFill>
           <a:ln w="25400">
             <a:solidFill>
-              <a:srgbClr val="0B2A4A"/>
+              <a:srgbClr val="C0392B"/>
             </a:solidFill>
           </a:ln>
           <a:effectLst/>
